--- a/examples/声声慢/课件/声声慢.pptx
+++ b/examples/声声慢/课件/声声慢.pptx
@@ -559,7 +559,7 @@
   <p:cSld>
     <p:spTree>
       <p:nvGrpSpPr>
-        <p:cNvPr id="1" name="" descr="&lt;Slide style={{ background: '#F5F1E6', padding: '48px 64px', fontFamily: '宋体' }}&gt;&#13;&#10;  &lt;Box style={{ height: 560, flexDirection: 'row', alignItems: 'center' }}&gt;&#13;&#10;    &lt;Box style={{ width: 6, height: 300, background: '#B4552D' }} /&gt;&#13;&#10;    &lt;Box style={{ marginLeft: 48, flexDirection: 'column' }}&gt;&#13;&#10;      &lt;Text style={{ fontSize: 96, fontWeight: 'bold', color: '#1F3A34', lineHeight: 1.1 }}&gt;声声慢&lt;/Text&gt;&#13;&#10;      &lt;Text style={{ fontSize: 34, color: '#1F3A34', marginTop: 20 }}&gt;李清照 · 寻寻觅觅&lt;/Text&gt;&#13;&#10;      &lt;Text style={{ fontSize: 28, color: '#6B6B6B', marginTop: 32 }}&gt;一节课，把“愁”读成看得见的东西&lt;/Text&gt;&#13;&#10;    &lt;/Box&gt;&#13;&#10;  &lt;/Box&gt;&#13;&#10;  &lt;Box style={{ height: 40, borderTop: '1px solid rgba(31,58,52,0.2)', flexDirection: 'row', justifyContent: 'space-between', alignItems: 'center', paddingTop: 8 }}&gt;&#13;&#10;    &lt;Text style={{ fontSize: 24, color: '#6B6B6B' }}&gt;统编版必修上 · 第三单元&lt;/Text&gt;&#13;&#10;    &lt;Text style={{ fontSize: 24, color: '#B4552D' }}&gt;01/16&lt;/Text&gt;&#13;&#10;  &lt;/Box&gt;&#13;&#10;&lt;/Slide&gt;"/>
+        <p:cNvPr id="1" name="" descr="&lt;Slide style={{ background: '#F5F1E6', padding: '48px 64px', fontFamily: '宋体' }}&gt;&#13;&#10;  &lt;Box style={{ height: 560, flexDirection: 'row', alignItems: 'center' }}&gt;&#13;&#10;    &lt;Box style={{ width: 6, height: 300, background: '#B4552D' }} /&gt;&#13;&#10;    &lt;Box style={{ marginLeft: 48, flexDirection: 'column' }}&gt;&#13;&#10;      &lt;Text style={{ fontSize: 96, fontWeight: 'bold', color: '#1F3A34', lineHeight: 1.1 }}&gt;声声慢&lt;/Text&gt;&#13;&#10;      &lt;Text style={{ fontSize: 34, color: '#1F3A34', marginTop: 20 }}&gt;李清照 · 寻寻觅觅&lt;/Text&gt;&#13;&#10;      &lt;Text style={{ fontSize: 28, color: '#6B6B6B', marginTop: 32 }}&gt;一节课，学会三种看法&lt;/Text&gt;&#13;&#10;    &lt;/Box&gt;&#13;&#10;  &lt;/Box&gt;&#13;&#10;  &lt;Box style={{ height: 40, borderTop: '1px solid rgba(31,58,52,0.2)', flexDirection: 'row', justifyContent: 'space-between', alignItems: 'center', paddingTop: 8 }}&gt;&#13;&#10;    &lt;Text style={{ fontSize: 24, color: '#6B6B6B' }}&gt;统编版必修上 · 第三单元&lt;/Text&gt;&#13;&#10;    &lt;Text style={{ fontSize: 24, color: '#B4552D' }}&gt;01/16&lt;/Text&gt;&#13;&#10;  &lt;/Box&gt;&#13;&#10;&lt;/Slide&gt;"/>
         <p:cNvGrpSpPr/>
         <p:nvPr/>
       </p:nvGrpSpPr>
@@ -628,7 +628,7 @@
         <p:spPr>
           <a:xfrm rot="0" flipH="0" flipV="0">
             <a:off x="1123950" y="1914525"/>
-            <a:ext cx="3952875" cy="1209675"/>
+            <a:ext cx="2743200" cy="1209675"/>
           </a:xfrm>
           <a:prstGeom prst="rect"/>
         </p:spPr>
@@ -663,7 +663,7 @@
         <p:spPr>
           <a:xfrm rot="0" flipH="0" flipV="0">
             <a:off x="1123950" y="3314700"/>
-            <a:ext cx="3952875" cy="390525"/>
+            <a:ext cx="2743200" cy="390525"/>
           </a:xfrm>
           <a:prstGeom prst="rect"/>
         </p:spPr>
@@ -718,7 +718,7 @@
         <p:spPr>
           <a:xfrm rot="0" flipH="0" flipV="0">
             <a:off x="1123950" y="4010025"/>
-            <a:ext cx="3952875" cy="323850"/>
+            <a:ext cx="2743200" cy="323850"/>
           </a:xfrm>
           <a:prstGeom prst="rect"/>
         </p:spPr>
@@ -738,7 +738,7 @@
                 <a:latin typeface="宋体"/>
                 <a:ea typeface="宋体"/>
               </a:rPr>
-              <a:t>一节课，把“愁”读成看得见的东西</a:t>
+              <a:t>一节课，学会三种看法</a:t>
             </a:r>
             <a:endParaRPr/>
           </a:p>
@@ -886,7 +886,7 @@
   <p:cSld>
     <p:spTree>
       <p:nvGrpSpPr>
-        <p:cNvPr id="10" name="" descr="&lt;Slide style={{ background: '#F5F1E6', padding: '48px 64px', fontFamily: '宋体' }}&gt;&#13;&#10;  &lt;Box style={{ flexDirection: 'row', justifyContent: 'space-between', alignItems: 'flex-end', height: 72 }}&gt;&#13;&#10;    &lt;Text style={{ fontSize: 40, fontWeight: 'bold', color: '#1F3A34', lineHeight: 1.2 }}&gt;“旧时相识”与“有谁堪摘”&lt;/Text&gt;&#13;&#10;    &lt;Text style={{ fontSize: 24, color: '#6B6B6B' }}&gt;环节三 · 任务二&lt;/Text&gt;&#13;&#10;  &lt;/Box&gt;&#13;&#10;  &lt;Box style={{ height: 472, marginTop: 20, flexDirection: 'column' }}&gt;&#13;&#10;  &lt;Box style={{ height: 472, flexDirection: 'column' }}&gt;&#13;&#10;    &lt;Box style={{ flexDirection: 'row', gap: 24, height: 300, marginTop: 16 }}&gt;&#13;&#10;      &lt;Box style={{ flex: 1, background: 'rgba(31,58,52,0.07)', padding: 24, flexDirection: 'column' }}&gt;&#13;&#10;        &lt;Text style={{ fontSize: 28, fontWeight: 'bold', color: '#1F3A34' }}&gt;旧时&lt;/Text&gt;&#13;&#10;        &lt;Text style={{ fontSize: 28, color: '#1F3A34', marginTop: 20, lineHeight: 1.9 }}&gt;过雁&lt;/Text&gt;&#13;&#10;        &lt;Text style={{ fontSize: 24, color: '#6B6B6B', marginTop: 8 }}&gt;依据：旧时相识&lt;/Text&gt;&#13;&#10;      &lt;/Box&gt;&#13;&#10;      &lt;Box style={{ flex: 1, background: 'rgba(180,85,45,0.10)', padding: 24, flexDirection: 'column' }}&gt;&#13;&#10;        &lt;Text style={{ fontSize: 28, fontWeight: 'bold', color: '#B4552D' }}&gt;如今&lt;/Text&gt;&#13;&#10;        &lt;Text style={{ fontSize: 28, color: '#1F3A34', marginTop: 20, lineHeight: 1.9 }}&gt;黄花&lt;/Text&gt;&#13;&#10;        &lt;Text style={{ fontSize: 24, color: '#6B6B6B', marginTop: 8 }}&gt;依据：有谁堪摘&lt;/Text&gt;&#13;&#10;      &lt;/Box&gt;&#13;&#10;    &lt;/Box&gt;&#13;&#10;    &lt;Text style={{ fontSize: 28, color: '#1F3A34', marginTop: 24 }}&gt;花还在开，摘花的人不在了——东西没变，时候变了。&lt;/Text&gt;&#13;&#10;  &lt;/Box&gt;&#13;&#10;  &lt;/Box&gt;&#13;&#10;  &lt;Box style={{ height: 40, marginTop: 12, borderTop: '1px solid rgba(31,58,52,0.2)', flexDirection: 'row', justifyContent: 'space-between', alignItems: 'center', paddingTop: 8 }}&gt;&#13;&#10;    &lt;Text style={{ fontSize: 24, color: '#6B6B6B' }}&gt;《声声慢》· 李清照&lt;/Text&gt;&#13;&#10;    &lt;Text style={{ fontSize: 24, color: '#B4552D' }}&gt;10/16&lt;/Text&gt;&#13;&#10;  &lt;/Box&gt;&#13;&#10;&lt;/Slide&gt;"/>
+        <p:cNvPr id="10" name="" descr="&lt;Slide style={{ background: '#F5F1E6', padding: '48px 64px', fontFamily: '宋体' }}&gt;&#13;&#10;  &lt;Box style={{ flexDirection: 'row', justifyContent: 'space-between', alignItems: 'flex-end', height: 72 }}&gt;&#13;&#10;    &lt;Text style={{ fontSize: 40, fontWeight: 'bold', color: '#1F3A34', lineHeight: 1.2 }}&gt;雁与梧桐，变在哪&lt;/Text&gt;&#13;&#10;    &lt;Text style={{ fontSize: 24, color: '#6B6B6B' }}&gt;环节三 · 任务二&lt;/Text&gt;&#13;&#10;  &lt;/Box&gt;&#13;&#10;  &lt;Box style={{ height: 472, marginTop: 20, flexDirection: 'column' }}&gt;&#13;&#10;  &lt;Box style={{ height: 472, flexDirection: 'column' }}&gt;&#13;&#10;    &lt;Box style={{ flexDirection: 'row', gap: 24, height: 300, marginTop: 16 }}&gt;&#13;&#10;      &lt;Box style={{ flex: 1, background: 'rgba(31,58,52,0.07)', padding: 24, flexDirection: 'column' }}&gt;&#13;&#10;        &lt;Text style={{ fontSize: 28, fontWeight: 'bold', color: '#1F3A34' }}&gt;雁&lt;/Text&gt;&#13;&#10;        &lt;Text style={{ fontSize: 24, color: '#1F3A34', marginTop: 16, lineHeight: 1.9 }}&gt;前人：雁足传书&lt;/Text&gt;&#13;&#10;        &lt;Text style={{ fontSize: 24, color: '#6B6B6B', marginTop: 8 }}&gt;“归雁洛阳边”&lt;/Text&gt;&#13;&#10;        &lt;Text style={{ fontSize: 24, color: '#B4552D', marginTop: 12 }}&gt;这一首：旧时相识&lt;/Text&gt;&#13;&#10;      &lt;/Box&gt;&#13;&#10;      &lt;Box style={{ flex: 1, background: 'rgba(180,85,45,0.10)', padding: 24, flexDirection: 'column' }}&gt;&#13;&#10;        &lt;Text style={{ fontSize: 28, fontWeight: 'bold', color: '#B4552D' }}&gt;梧桐&lt;/Text&gt;&#13;&#10;        &lt;Text style={{ fontSize: 24, color: '#1F3A34', marginTop: 16, lineHeight: 1.9 }}&gt;前人：寂寞梧桐深院&lt;/Text&gt;&#13;&#10;        &lt;Text style={{ fontSize: 24, color: '#6B6B6B', marginTop: 8 }}&gt;梧桐树，三更雨&lt;/Text&gt;&#13;&#10;        &lt;Text style={{ fontSize: 24, color: '#B4552D', marginTop: 12 }}&gt;这一首：到黄昏，点点滴滴&lt;/Text&gt;&#13;&#10;      &lt;/Box&gt;&#13;&#10;    &lt;/Box&gt;&#13;&#10;    &lt;Text style={{ fontSize: 28, color: '#1F3A34', marginTop: 24 }}&gt;词还是那些词，可是全都转向了“如今”。&lt;/Text&gt;&#13;&#10;  &lt;/Box&gt;&#13;&#10;  &lt;/Box&gt;&#13;&#10;  &lt;Box style={{ height: 40, marginTop: 12, borderTop: '1px solid rgba(31,58,52,0.2)', flexDirection: 'row', justifyContent: 'space-between', alignItems: 'center', paddingTop: 8 }}&gt;&#13;&#10;    &lt;Text style={{ fontSize: 24, color: '#6B6B6B' }}&gt;《声声慢》· 李清照&lt;/Text&gt;&#13;&#10;    &lt;Text style={{ fontSize: 24, color: '#B4552D' }}&gt;10/16&lt;/Text&gt;&#13;&#10;  &lt;/Box&gt;&#13;&#10;&lt;/Slide&gt;"/>
         <p:cNvGrpSpPr/>
         <p:nvPr/>
       </p:nvGrpSpPr>
@@ -931,7 +931,7 @@
         <p:spPr>
           <a:xfrm rot="0" flipH="0" flipV="0">
             <a:off x="609600" y="590550"/>
-            <a:ext cx="4181475" cy="552450"/>
+            <a:ext cx="3048000" cy="552450"/>
           </a:xfrm>
           <a:prstGeom prst="rect"/>
         </p:spPr>
@@ -951,7 +951,7 @@
                 <a:latin typeface="宋体"/>
                 <a:ea typeface="宋体"/>
               </a:rPr>
-              <a:t>“旧时相识”与“有谁堪摘”</a:t>
+              <a:t>雁与梧桐，变在哪</a:t>
             </a:r>
             <a:endParaRPr/>
           </a:p>
@@ -1067,7 +1067,7 @@
                 <a:latin typeface="宋体"/>
                 <a:ea typeface="宋体"/>
               </a:rPr>
-              <a:t>旧时</a:t>
+              <a:t>雁</a:t>
             </a:r>
             <a:endParaRPr/>
           </a:p>
@@ -1081,8 +1081,8 @@
         </p:nvSpPr>
         <p:spPr>
           <a:xfrm rot="0" flipH="0" flipV="0">
-            <a:off x="838200" y="2228850"/>
-            <a:ext cx="4914900" cy="609600"/>
+            <a:off x="838200" y="2190750"/>
+            <a:ext cx="4914900" cy="523875"/>
           </a:xfrm>
           <a:prstGeom prst="rect"/>
         </p:spPr>
@@ -1095,14 +1095,14 @@
               </a:lnSpc>
             </a:pPr>
             <a:r>
-              <a:rPr lang="zh-CN" sz="2100">
+              <a:rPr lang="zh-CN" sz="1800">
                 <a:solidFill>
                   <a:srgbClr val="1F3A34"/>
                 </a:solidFill>
                 <a:latin typeface="宋体"/>
                 <a:ea typeface="宋体"/>
               </a:rPr>
-              <a:t>过雁</a:t>
+              <a:t>前人：雁足传书</a:t>
             </a:r>
             <a:endParaRPr/>
           </a:p>
@@ -1116,7 +1116,7 @@
         </p:nvSpPr>
         <p:spPr>
           <a:xfrm rot="0" flipH="0" flipV="0">
-            <a:off x="838200" y="2914650"/>
+            <a:off x="838200" y="2790825"/>
             <a:ext cx="4914900" cy="276225"/>
           </a:xfrm>
           <a:prstGeom prst="rect"/>
@@ -1137,15 +1137,50 @@
                 <a:latin typeface="宋体"/>
                 <a:ea typeface="宋体"/>
               </a:rPr>
-              <a:t>依据：旧时相识</a:t>
-            </a:r>
-            <a:endParaRPr/>
-          </a:p>
-        </p:txBody>
-      </p:sp>
-      <p:sp>
-        <p:nvSpPr>
-          <p:cNvPr id="18" name=""/>
+              <a:t>“归雁洛阳边”</a:t>
+            </a:r>
+            <a:endParaRPr/>
+          </a:p>
+        </p:txBody>
+      </p:sp>
+      <p:sp>
+        <p:nvSpPr>
+          <p:cNvPr id="18" name="" descr="{&quot;isTemplate&quot;:true,&quot;type&quot;:&quot;text&quot;}"/>
+          <p:cNvSpPr txBox="1"/>
+          <p:nvPr/>
+        </p:nvSpPr>
+        <p:spPr>
+          <a:xfrm rot="0" flipH="0" flipV="0">
+            <a:off x="838200" y="3181350"/>
+            <a:ext cx="4914900" cy="276225"/>
+          </a:xfrm>
+          <a:prstGeom prst="rect"/>
+        </p:spPr>
+        <p:txBody>
+          <a:bodyPr wrap="none" lIns="0" tIns="0" rIns="0" bIns="0"/>
+          <a:p>
+            <a:pPr>
+              <a:lnSpc>
+                <a:spcPct val="100000"/>
+              </a:lnSpc>
+            </a:pPr>
+            <a:r>
+              <a:rPr lang="zh-CN" sz="1800">
+                <a:solidFill>
+                  <a:srgbClr val="B4552D"/>
+                </a:solidFill>
+                <a:latin typeface="宋体"/>
+                <a:ea typeface="宋体"/>
+              </a:rPr>
+              <a:t>这一首：旧时相识</a:t>
+            </a:r>
+            <a:endParaRPr/>
+          </a:p>
+        </p:txBody>
+      </p:sp>
+      <p:sp>
+        <p:nvSpPr>
+          <p:cNvPr id="19" name=""/>
           <p:cNvSpPr/>
           <p:nvPr/>
         </p:nvSpPr>
@@ -1171,7 +1206,7 @@
       </p:sp>
       <p:sp>
         <p:nvSpPr>
-          <p:cNvPr id="19" name="" descr="{&quot;isTemplate&quot;:true,&quot;type&quot;:&quot;text&quot;}"/>
+          <p:cNvPr id="20" name="" descr="{&quot;isTemplate&quot;:true,&quot;type&quot;:&quot;text&quot;}"/>
           <p:cNvSpPr txBox="1"/>
           <p:nvPr/>
         </p:nvSpPr>
@@ -1198,22 +1233,22 @@
                 <a:latin typeface="宋体"/>
                 <a:ea typeface="宋体"/>
               </a:rPr>
-              <a:t>如今</a:t>
-            </a:r>
-            <a:endParaRPr/>
-          </a:p>
-        </p:txBody>
-      </p:sp>
-      <p:sp>
-        <p:nvSpPr>
-          <p:cNvPr id="20" name="" descr="{&quot;isTemplate&quot;:true,&quot;type&quot;:&quot;text&quot;}"/>
-          <p:cNvSpPr txBox="1"/>
-          <p:nvPr/>
-        </p:nvSpPr>
-        <p:spPr>
-          <a:xfrm rot="0" flipH="0" flipV="0">
-            <a:off x="6438900" y="2228850"/>
-            <a:ext cx="4914900" cy="609600"/>
+              <a:t>梧桐</a:t>
+            </a:r>
+            <a:endParaRPr/>
+          </a:p>
+        </p:txBody>
+      </p:sp>
+      <p:sp>
+        <p:nvSpPr>
+          <p:cNvPr id="21" name="" descr="{&quot;isTemplate&quot;:true,&quot;type&quot;:&quot;text&quot;}"/>
+          <p:cNvSpPr txBox="1"/>
+          <p:nvPr/>
+        </p:nvSpPr>
+        <p:spPr>
+          <a:xfrm rot="0" flipH="0" flipV="0">
+            <a:off x="6438900" y="2190750"/>
+            <a:ext cx="4914900" cy="523875"/>
           </a:xfrm>
           <a:prstGeom prst="rect"/>
         </p:spPr>
@@ -1226,28 +1261,28 @@
               </a:lnSpc>
             </a:pPr>
             <a:r>
-              <a:rPr lang="zh-CN" sz="2100">
+              <a:rPr lang="zh-CN" sz="1800">
                 <a:solidFill>
                   <a:srgbClr val="1F3A34"/>
                 </a:solidFill>
                 <a:latin typeface="宋体"/>
                 <a:ea typeface="宋体"/>
               </a:rPr>
-              <a:t>黄花</a:t>
-            </a:r>
-            <a:endParaRPr/>
-          </a:p>
-        </p:txBody>
-      </p:sp>
-      <p:sp>
-        <p:nvSpPr>
-          <p:cNvPr id="21" name="" descr="{&quot;isTemplate&quot;:true,&quot;type&quot;:&quot;text&quot;}"/>
-          <p:cNvSpPr txBox="1"/>
-          <p:nvPr/>
-        </p:nvSpPr>
-        <p:spPr>
-          <a:xfrm rot="0" flipH="0" flipV="0">
-            <a:off x="6438900" y="2914650"/>
+              <a:t>前人：寂寞梧桐深院</a:t>
+            </a:r>
+            <a:endParaRPr/>
+          </a:p>
+        </p:txBody>
+      </p:sp>
+      <p:sp>
+        <p:nvSpPr>
+          <p:cNvPr id="22" name="" descr="{&quot;isTemplate&quot;:true,&quot;type&quot;:&quot;text&quot;}"/>
+          <p:cNvSpPr txBox="1"/>
+          <p:nvPr/>
+        </p:nvSpPr>
+        <p:spPr>
+          <a:xfrm rot="0" flipH="0" flipV="0">
+            <a:off x="6438900" y="2790825"/>
             <a:ext cx="4914900" cy="276225"/>
           </a:xfrm>
           <a:prstGeom prst="rect"/>
@@ -1268,15 +1303,50 @@
                 <a:latin typeface="宋体"/>
                 <a:ea typeface="宋体"/>
               </a:rPr>
-              <a:t>依据：有谁堪摘</a:t>
-            </a:r>
-            <a:endParaRPr/>
-          </a:p>
-        </p:txBody>
-      </p:sp>
-      <p:sp>
-        <p:nvSpPr>
-          <p:cNvPr id="22" name="" descr="{&quot;isTemplate&quot;:true,&quot;type&quot;:&quot;text&quot;}"/>
+              <a:t>梧桐树，三更雨</a:t>
+            </a:r>
+            <a:endParaRPr/>
+          </a:p>
+        </p:txBody>
+      </p:sp>
+      <p:sp>
+        <p:nvSpPr>
+          <p:cNvPr id="23" name="" descr="{&quot;isTemplate&quot;:true,&quot;type&quot;:&quot;text&quot;}"/>
+          <p:cNvSpPr txBox="1"/>
+          <p:nvPr/>
+        </p:nvSpPr>
+        <p:spPr>
+          <a:xfrm rot="0" flipH="0" flipV="0">
+            <a:off x="6438900" y="3181350"/>
+            <a:ext cx="4914900" cy="276225"/>
+          </a:xfrm>
+          <a:prstGeom prst="rect"/>
+        </p:spPr>
+        <p:txBody>
+          <a:bodyPr wrap="none" lIns="0" tIns="0" rIns="0" bIns="0"/>
+          <a:p>
+            <a:pPr>
+              <a:lnSpc>
+                <a:spcPct val="100000"/>
+              </a:lnSpc>
+            </a:pPr>
+            <a:r>
+              <a:rPr lang="zh-CN" sz="1800">
+                <a:solidFill>
+                  <a:srgbClr val="B4552D"/>
+                </a:solidFill>
+                <a:latin typeface="宋体"/>
+                <a:ea typeface="宋体"/>
+              </a:rPr>
+              <a:t>这一首：到黄昏，点点滴滴</a:t>
+            </a:r>
+            <a:endParaRPr/>
+          </a:p>
+        </p:txBody>
+      </p:sp>
+      <p:sp>
+        <p:nvSpPr>
+          <p:cNvPr id="24" name="" descr="{&quot;isTemplate&quot;:true,&quot;type&quot;:&quot;text&quot;}"/>
           <p:cNvSpPr txBox="1"/>
           <p:nvPr/>
         </p:nvSpPr>
@@ -1303,15 +1373,15 @@
                 <a:latin typeface="宋体"/>
                 <a:ea typeface="宋体"/>
               </a:rPr>
-              <a:t>花还在开，摘花的人不在了——东西没变，时候变了。</a:t>
-            </a:r>
-            <a:endParaRPr/>
-          </a:p>
-        </p:txBody>
-      </p:sp>
-      <p:sp>
-        <p:nvSpPr>
-          <p:cNvPr id="23" name=""/>
+              <a:t>词还是那些词，可是全都转向了“如今”。</a:t>
+            </a:r>
+            <a:endParaRPr/>
+          </a:p>
+        </p:txBody>
+      </p:sp>
+      <p:sp>
+        <p:nvSpPr>
+          <p:cNvPr id="25" name=""/>
           <p:cNvSpPr/>
           <p:nvPr/>
         </p:nvSpPr>
@@ -1353,7 +1423,7 @@
       </p:sp>
       <p:sp>
         <p:nvSpPr>
-          <p:cNvPr id="24" name="" descr="{&quot;isTemplate&quot;:true,&quot;type&quot;:&quot;text&quot;}"/>
+          <p:cNvPr id="26" name="" descr="{&quot;isTemplate&quot;:true,&quot;type&quot;:&quot;text&quot;}"/>
           <p:cNvSpPr txBox="1"/>
           <p:nvPr/>
         </p:nvSpPr>
@@ -1408,7 +1478,7 @@
       </p:sp>
       <p:sp>
         <p:nvSpPr>
-          <p:cNvPr id="25" name="" descr="{&quot;isTemplate&quot;:true,&quot;type&quot;:&quot;text&quot;}"/>
+          <p:cNvPr id="27" name="" descr="{&quot;isTemplate&quot;:true,&quot;type&quot;:&quot;text&quot;}"/>
           <p:cNvSpPr txBox="1"/>
           <p:nvPr/>
         </p:nvSpPr>
@@ -1451,7 +1521,7 @@
   <p:cSld>
     <p:spTree>
       <p:nvGrpSpPr>
-        <p:cNvPr id="26" name="" descr="&lt;Slide style={{ background: '#F5F1E6', padding: '48px 64px', fontFamily: '宋体' }}&gt;&#13;&#10;  &lt;Box style={{ flexDirection: 'row', justifyContent: 'space-between', alignItems: 'flex-end', height: 72 }}&gt;&#13;&#10;    &lt;Text style={{ fontSize: 40, fontWeight: 'bold', color: '#1F3A34', lineHeight: 1.2 }}&gt;修订：把“我觉得”换成“因为”&lt;/Text&gt;&#13;&#10;    &lt;Text style={{ fontSize: 24, color: '#6B6B6B' }}&gt;环节四 · 修订&lt;/Text&gt;&#13;&#10;  &lt;/Box&gt;&#13;&#10;  &lt;Box style={{ height: 472, marginTop: 20, flexDirection: 'column' }}&gt;&#13;&#10;  &lt;Box style={{ height: 472, flexDirection: 'column', justifyContent: 'center' }}&gt;&#13;&#10;    &lt;Text style={{ fontSize: 34, fontWeight: 'bold', color: '#1F3A34' }}&gt;改一句话：把“我觉得凄凉”改成“因为某字……”&lt;/Text&gt;&#13;&#10;    &lt;Box style={{ marginTop: 28, borderLeft: '4px solid #B4552D', paddingLeft: 24, flexDirection: 'column' }}&gt;&#13;&#10;      &lt;Text style={{ fontSize: 28, color: '#1F3A34', lineHeight: 1.9 }}&gt;达标：指出依据字，并说出它在哪一句。&lt;/Text&gt;&#13;&#10;      &lt;Text style={{ fontSize: 28, color: '#1F3A34', lineHeight: 1.9, marginTop: 8 }}&gt;优秀：还能说出这个字有几种讲法。&lt;/Text&gt;&#13;&#10;    &lt;/Box&gt;&#13;&#10;    &lt;Text style={{ fontSize: 28, color: '#B4552D', marginTop: 28 }}&gt;只改“依据字”那一列，3 分钟，不重抄表格。&lt;/Text&gt;&#13;&#10;  &lt;/Box&gt;&#13;&#10;  &lt;/Box&gt;&#13;&#10;  &lt;Box style={{ height: 40, marginTop: 12, borderTop: '1px solid rgba(31,58,52,0.2)', flexDirection: 'row', justifyContent: 'space-between', alignItems: 'center', paddingTop: 8 }}&gt;&#13;&#10;    &lt;Text style={{ fontSize: 24, color: '#6B6B6B' }}&gt;《声声慢》· 李清照&lt;/Text&gt;&#13;&#10;    &lt;Text style={{ fontSize: 24, color: '#B4552D' }}&gt;11/16&lt;/Text&gt;&#13;&#10;  &lt;/Box&gt;&#13;&#10;&lt;/Slide&gt;"/>
+        <p:cNvPr id="28" name="" descr="&lt;Slide style={{ background: '#F5F1E6', padding: '48px 64px', fontFamily: '宋体' }}&gt;&#13;&#10;  &lt;Box style={{ flexDirection: 'row', justifyContent: 'space-between', alignItems: 'flex-end', height: 72 }}&gt;&#13;&#10;    &lt;Text style={{ fontSize: 40, fontWeight: 'bold', color: '#1F3A34', lineHeight: 1.2 }}&gt;修订：把“很有层次”改掉&lt;/Text&gt;&#13;&#10;    &lt;Text style={{ fontSize: 24, color: '#6B6B6B' }}&gt;环节四 · 修订&lt;/Text&gt;&#13;&#10;  &lt;/Box&gt;&#13;&#10;  &lt;Box style={{ height: 472, marginTop: 20, flexDirection: 'column' }}&gt;&#13;&#10;  &lt;Box style={{ height: 472, flexDirection: 'column', justifyContent: 'center' }}&gt;&#13;&#10;    &lt;Text style={{ fontSize: 34, fontWeight: 'bold', color: '#1F3A34' }}&gt;改一句话：把“很有层次”改成“从哪一级走到哪一级”&lt;/Text&gt;&#13;&#10;    &lt;Box style={{ marginTop: 28, borderLeft: '4px solid #B4552D', paddingLeft: 24, flexDirection: 'column' }}&gt;&#13;&#10;      &lt;Text style={{ fontSize: 28, color: '#1F3A34', lineHeight: 1.9 }}&gt;达标：分出外／内两级以上，并说出互换后坏掉的是什么。&lt;/Text&gt;&#13;&#10;      &lt;Text style={{ fontSize: 28, color: '#1F3A34', lineHeight: 1.9, marginTop: 8 }}&gt;优秀：还能说出“寻”与“觅”之别。&lt;/Text&gt;&#13;&#10;    &lt;/Box&gt;&#13;&#10;    &lt;Text style={{ fontSize: 28, color: '#B4552D', marginTop: 28 }}&gt;只改这一段，3 分钟，不重抄。&lt;/Text&gt;&#13;&#10;  &lt;/Box&gt;&#13;&#10;  &lt;/Box&gt;&#13;&#10;  &lt;Box style={{ height: 40, marginTop: 12, borderTop: '1px solid rgba(31,58,52,0.2)', flexDirection: 'row', justifyContent: 'space-between', alignItems: 'center', paddingTop: 8 }}&gt;&#13;&#10;    &lt;Text style={{ fontSize: 24, color: '#6B6B6B' }}&gt;《声声慢》· 李清照&lt;/Text&gt;&#13;&#10;    &lt;Text style={{ fontSize: 24, color: '#B4552D' }}&gt;11/16&lt;/Text&gt;&#13;&#10;  &lt;/Box&gt;&#13;&#10;&lt;/Slide&gt;"/>
         <p:cNvGrpSpPr/>
         <p:nvPr/>
       </p:nvGrpSpPr>
@@ -1465,7 +1535,7 @@
       </p:grpSpPr>
       <p:sp>
         <p:nvSpPr>
-          <p:cNvPr id="27" name=""/>
+          <p:cNvPr id="29" name=""/>
           <p:cNvSpPr/>
           <p:nvPr/>
         </p:nvSpPr>
@@ -1489,14 +1559,14 @@
       </p:sp>
       <p:sp>
         <p:nvSpPr>
-          <p:cNvPr id="28" name="" descr="{&quot;isTemplate&quot;:true,&quot;type&quot;:&quot;text&quot;}"/>
+          <p:cNvPr id="30" name="" descr="{&quot;isTemplate&quot;:true,&quot;type&quot;:&quot;text&quot;}"/>
           <p:cNvSpPr txBox="1"/>
           <p:nvPr/>
         </p:nvSpPr>
         <p:spPr>
           <a:xfrm rot="0" flipH="0" flipV="0">
             <a:off x="609600" y="590550"/>
-            <a:ext cx="4943475" cy="552450"/>
+            <a:ext cx="4191000" cy="552450"/>
           </a:xfrm>
           <a:prstGeom prst="rect"/>
         </p:spPr>
@@ -1516,15 +1586,15 @@
                 <a:latin typeface="宋体"/>
                 <a:ea typeface="宋体"/>
               </a:rPr>
-              <a:t>修订：把“我觉得”换成“因为”</a:t>
-            </a:r>
-            <a:endParaRPr/>
-          </a:p>
-        </p:txBody>
-      </p:sp>
-      <p:sp>
-        <p:nvSpPr>
-          <p:cNvPr id="29" name="" descr="{&quot;isTemplate&quot;:true,&quot;type&quot;:&quot;text&quot;}"/>
+              <a:t>修订：把“很有层次”改掉</a:t>
+            </a:r>
+            <a:endParaRPr/>
+          </a:p>
+        </p:txBody>
+      </p:sp>
+      <p:sp>
+        <p:nvSpPr>
+          <p:cNvPr id="31" name="" descr="{&quot;isTemplate&quot;:true,&quot;type&quot;:&quot;text&quot;}"/>
           <p:cNvSpPr txBox="1"/>
           <p:nvPr/>
         </p:nvSpPr>
@@ -1579,7 +1649,7 @@
       </p:sp>
       <p:sp>
         <p:nvSpPr>
-          <p:cNvPr id="30" name="" descr="{&quot;isTemplate&quot;:true,&quot;type&quot;:&quot;text&quot;}"/>
+          <p:cNvPr id="32" name="" descr="{&quot;isTemplate&quot;:true,&quot;type&quot;:&quot;text&quot;}"/>
           <p:cNvSpPr txBox="1"/>
           <p:nvPr/>
         </p:nvSpPr>
@@ -1606,15 +1676,15 @@
                 <a:latin typeface="宋体"/>
                 <a:ea typeface="宋体"/>
               </a:rPr>
-              <a:t>改一句话：把“我觉得凄凉”改成“因为某字……”</a:t>
-            </a:r>
-            <a:endParaRPr/>
-          </a:p>
-        </p:txBody>
-      </p:sp>
-      <p:sp>
-        <p:nvSpPr>
-          <p:cNvPr id="31" name=""/>
+              <a:t>改一句话：把“很有层次”改成“从哪一级走到哪一级”</a:t>
+            </a:r>
+            <a:endParaRPr/>
+          </a:p>
+        </p:txBody>
+      </p:sp>
+      <p:sp>
+        <p:nvSpPr>
+          <p:cNvPr id="33" name=""/>
           <p:cNvSpPr/>
           <p:nvPr/>
         </p:nvSpPr>
@@ -1654,7 +1724,7 @@
       </p:sp>
       <p:sp>
         <p:nvSpPr>
-          <p:cNvPr id="32" name="" descr="{&quot;isTemplate&quot;:true,&quot;type&quot;:&quot;text&quot;}"/>
+          <p:cNvPr id="34" name="" descr="{&quot;isTemplate&quot;:true,&quot;type&quot;:&quot;text&quot;}"/>
           <p:cNvSpPr txBox="1"/>
           <p:nvPr/>
         </p:nvSpPr>
@@ -1681,15 +1751,15 @@
                 <a:latin typeface="宋体"/>
                 <a:ea typeface="宋体"/>
               </a:rPr>
-              <a:t>达标：指出依据字，并说出它在哪一句。</a:t>
-            </a:r>
-            <a:endParaRPr/>
-          </a:p>
-        </p:txBody>
-      </p:sp>
-      <p:sp>
-        <p:nvSpPr>
-          <p:cNvPr id="33" name="" descr="{&quot;isTemplate&quot;:true,&quot;type&quot;:&quot;text&quot;}"/>
+              <a:t>达标：分出外／内两级以上，并说出互换后坏掉的是什么。</a:t>
+            </a:r>
+            <a:endParaRPr/>
+          </a:p>
+        </p:txBody>
+      </p:sp>
+      <p:sp>
+        <p:nvSpPr>
+          <p:cNvPr id="35" name="" descr="{&quot;isTemplate&quot;:true,&quot;type&quot;:&quot;text&quot;}"/>
           <p:cNvSpPr txBox="1"/>
           <p:nvPr/>
         </p:nvSpPr>
@@ -1716,15 +1786,15 @@
                 <a:latin typeface="宋体"/>
                 <a:ea typeface="宋体"/>
               </a:rPr>
-              <a:t>优秀：还能说出这个字有几种讲法。</a:t>
-            </a:r>
-            <a:endParaRPr/>
-          </a:p>
-        </p:txBody>
-      </p:sp>
-      <p:sp>
-        <p:nvSpPr>
-          <p:cNvPr id="34" name="" descr="{&quot;isTemplate&quot;:true,&quot;type&quot;:&quot;text&quot;}"/>
+              <a:t>优秀：还能说出“寻”与“觅”之别。</a:t>
+            </a:r>
+            <a:endParaRPr/>
+          </a:p>
+        </p:txBody>
+      </p:sp>
+      <p:sp>
+        <p:nvSpPr>
+          <p:cNvPr id="36" name="" descr="{&quot;isTemplate&quot;:true,&quot;type&quot;:&quot;text&quot;}"/>
           <p:cNvSpPr txBox="1"/>
           <p:nvPr/>
         </p:nvSpPr>
@@ -1751,7 +1821,7 @@
                 <a:latin typeface="宋体"/>
                 <a:ea typeface="宋体"/>
               </a:rPr>
-              <a:t>只改“依据字”那一列，</a:t>
+              <a:t>只改这一段，</a:t>
             </a:r>
             <a:r>
               <a:rPr lang="en-US" sz="2100">
@@ -1771,15 +1841,15 @@
                 <a:latin typeface="宋体"/>
                 <a:ea typeface="宋体"/>
               </a:rPr>
-              <a:t>分钟，不重抄表格。</a:t>
-            </a:r>
-            <a:endParaRPr/>
-          </a:p>
-        </p:txBody>
-      </p:sp>
-      <p:sp>
-        <p:nvSpPr>
-          <p:cNvPr id="35" name=""/>
+              <a:t>分钟，不重抄。</a:t>
+            </a:r>
+            <a:endParaRPr/>
+          </a:p>
+        </p:txBody>
+      </p:sp>
+      <p:sp>
+        <p:nvSpPr>
+          <p:cNvPr id="37" name=""/>
           <p:cNvSpPr/>
           <p:nvPr/>
         </p:nvSpPr>
@@ -1821,7 +1891,7 @@
       </p:sp>
       <p:sp>
         <p:nvSpPr>
-          <p:cNvPr id="36" name="" descr="{&quot;isTemplate&quot;:true,&quot;type&quot;:&quot;text&quot;}"/>
+          <p:cNvPr id="38" name="" descr="{&quot;isTemplate&quot;:true,&quot;type&quot;:&quot;text&quot;}"/>
           <p:cNvSpPr txBox="1"/>
           <p:nvPr/>
         </p:nvSpPr>
@@ -1876,7 +1946,7 @@
       </p:sp>
       <p:sp>
         <p:nvSpPr>
-          <p:cNvPr id="37" name="" descr="{&quot;isTemplate&quot;:true,&quot;type&quot;:&quot;text&quot;}"/>
+          <p:cNvPr id="39" name="" descr="{&quot;isTemplate&quot;:true,&quot;type&quot;:&quot;text&quot;}"/>
           <p:cNvSpPr txBox="1"/>
           <p:nvPr/>
         </p:nvSpPr>
@@ -1919,7 +1989,7 @@
   <p:cSld>
     <p:spTree>
       <p:nvGrpSpPr>
-        <p:cNvPr id="38" name="" descr="&lt;Slide style={{ background: '#F5F1E6', padding: '48px 64px', fontFamily: '宋体' }}&gt;&#13;&#10;  &lt;Box style={{ flexDirection: 'row', justifyContent: 'space-between', alignItems: 'flex-end', height: 72 }}&gt;&#13;&#10;    &lt;Text style={{ fontSize: 40, fontWeight: 'bold', color: '#1F3A34', lineHeight: 1.2 }}&gt;再验证：谁在憔悴&lt;/Text&gt;&#13;&#10;    &lt;Text style={{ fontSize: 24, color: '#6B6B6B' }}&gt;环节四 · 再验证&lt;/Text&gt;&#13;&#10;  &lt;/Box&gt;&#13;&#10;  &lt;Box style={{ height: 472, marginTop: 20, flexDirection: 'column' }}&gt;&#13;&#10;  &lt;Box style={{ marginTop: 24, padding: '32px 40px', background: 'rgba(31,58,52,0.05)' }}&gt;&#13;&#10;    &lt;Text style={{ fontSize: 34, color: '#1F3A34', lineHeight: 2, letterSpacing: 1 }}&gt;满地黄花堆积，憔悴损，如今有谁堪摘？&lt;/Text&gt;&#13;&#10;  &lt;/Box&gt;&#13;&#10;  &lt;Box style={{ marginTop: 32, borderLeft: '4px solid #B4552D', paddingLeft: 24 }}&gt;&#13;&#10;    &lt;Text style={{ fontSize: 28, color: '#1F3A34', lineHeight: 1.9 }}&gt;“憔悴损”的“损”，主语是花，还是人？&lt;/Text&gt;&#13;&#10;    &lt;Text style={{ fontSize: 24, color: '#6B6B6B', marginTop: 12 }}&gt;用刚才那个方法答：先说依据，再说结论。&lt;/Text&gt;&#13;&#10;  &lt;/Box&gt;&#13;&#10;  &lt;/Box&gt;&#13;&#10;  &lt;Box style={{ height: 40, marginTop: 12, borderTop: '1px solid rgba(31,58,52,0.2)', flexDirection: 'row', justifyContent: 'space-between', alignItems: 'center', paddingTop: 8 }}&gt;&#13;&#10;    &lt;Text style={{ fontSize: 24, color: '#6B6B6B' }}&gt;《声声慢》· 李清照&lt;/Text&gt;&#13;&#10;    &lt;Text style={{ fontSize: 24, color: '#B4552D' }}&gt;12/16&lt;/Text&gt;&#13;&#10;  &lt;/Box&gt;&#13;&#10;&lt;/Slide&gt;"/>
+        <p:cNvPr id="40" name="" descr="&lt;Slide style={{ background: '#F5F1E6', padding: '48px 64px', fontFamily: '宋体' }}&gt;&#13;&#10;  &lt;Box style={{ flexDirection: 'row', justifyContent: 'space-between', alignItems: 'flex-end', height: 72 }}&gt;&#13;&#10;    &lt;Text style={{ fontSize: 40, fontWeight: 'bold', color: '#1F3A34', lineHeight: 1.2 }}&gt;再验证：动词是哪个&lt;/Text&gt;&#13;&#10;    &lt;Text style={{ fontSize: 24, color: '#6B6B6B' }}&gt;环节四 · 再验证&lt;/Text&gt;&#13;&#10;  &lt;/Box&gt;&#13;&#10;  &lt;Box style={{ height: 472, marginTop: 20, flexDirection: 'column' }}&gt;&#13;&#10;  &lt;Box style={{ marginTop: 24, padding: '32px 40px', background: 'rgba(31,58,52,0.05)' }}&gt;&#13;&#10;    &lt;Text style={{ fontSize: 34, color: '#1F3A34', lineHeight: 1.9 }}&gt;守着窗儿，独自怎生得黑？&lt;/Text&gt;&#13;&#10;  &lt;/Box&gt;&#13;&#10;  &lt;Box style={{ marginTop: 32, borderLeft: '4px solid #B4552D', paddingLeft: 24 }}&gt;&#13;&#10;    &lt;Text style={{ fontSize: 28, color: '#1F3A34', lineHeight: 1.9 }}&gt;这一句的动词是哪个？&lt;/Text&gt;&#13;&#10;    &lt;Text style={{ fontSize: 24, color: '#6B6B6B', marginTop: 12 }}&gt;提示：“怎生”的“生”是语助词。&lt;/Text&gt;&#13;&#10;  &lt;/Box&gt;&#13;&#10;  &lt;/Box&gt;&#13;&#10;  &lt;Box style={{ height: 40, marginTop: 12, borderTop: '1px solid rgba(31,58,52,0.2)', flexDirection: 'row', justifyContent: 'space-between', alignItems: 'center', paddingTop: 8 }}&gt;&#13;&#10;    &lt;Text style={{ fontSize: 24, color: '#6B6B6B' }}&gt;《声声慢》· 李清照&lt;/Text&gt;&#13;&#10;    &lt;Text style={{ fontSize: 24, color: '#B4552D' }}&gt;12/16&lt;/Text&gt;&#13;&#10;  &lt;/Box&gt;&#13;&#10;&lt;/Slide&gt;"/>
         <p:cNvGrpSpPr/>
         <p:nvPr/>
       </p:nvGrpSpPr>
@@ -1933,7 +2003,7 @@
       </p:grpSpPr>
       <p:sp>
         <p:nvSpPr>
-          <p:cNvPr id="39" name=""/>
+          <p:cNvPr id="41" name=""/>
           <p:cNvSpPr/>
           <p:nvPr/>
         </p:nvSpPr>
@@ -1957,14 +2027,14 @@
       </p:sp>
       <p:sp>
         <p:nvSpPr>
-          <p:cNvPr id="40" name="" descr="{&quot;isTemplate&quot;:true,&quot;type&quot;:&quot;text&quot;}"/>
+          <p:cNvPr id="42" name="" descr="{&quot;isTemplate&quot;:true,&quot;type&quot;:&quot;text&quot;}"/>
           <p:cNvSpPr txBox="1"/>
           <p:nvPr/>
         </p:nvSpPr>
         <p:spPr>
           <a:xfrm rot="0" flipH="0" flipV="0">
             <a:off x="609600" y="590550"/>
-            <a:ext cx="3048000" cy="552450"/>
+            <a:ext cx="3429000" cy="552450"/>
           </a:xfrm>
           <a:prstGeom prst="rect"/>
         </p:spPr>
@@ -1984,15 +2054,15 @@
                 <a:latin typeface="宋体"/>
                 <a:ea typeface="宋体"/>
               </a:rPr>
-              <a:t>再验证：谁在憔悴</a:t>
-            </a:r>
-            <a:endParaRPr/>
-          </a:p>
-        </p:txBody>
-      </p:sp>
-      <p:sp>
-        <p:nvSpPr>
-          <p:cNvPr id="41" name="" descr="{&quot;isTemplate&quot;:true,&quot;type&quot;:&quot;text&quot;}"/>
+              <a:t>再验证：动词是哪个</a:t>
+            </a:r>
+            <a:endParaRPr/>
+          </a:p>
+        </p:txBody>
+      </p:sp>
+      <p:sp>
+        <p:nvSpPr>
+          <p:cNvPr id="43" name="" descr="{&quot;isTemplate&quot;:true,&quot;type&quot;:&quot;text&quot;}"/>
           <p:cNvSpPr txBox="1"/>
           <p:nvPr/>
         </p:nvSpPr>
@@ -2047,14 +2117,14 @@
       </p:sp>
       <p:sp>
         <p:nvSpPr>
-          <p:cNvPr id="42" name=""/>
+          <p:cNvPr id="44" name=""/>
           <p:cNvSpPr/>
           <p:nvPr/>
         </p:nvSpPr>
         <p:spPr>
           <a:xfrm rot="0" flipH="0" flipV="0">
             <a:off x="609600" y="1562100"/>
-            <a:ext cx="10972800" cy="1390650"/>
+            <a:ext cx="10972800" cy="1352550"/>
           </a:xfrm>
           <a:prstGeom prst="rect">
             <a:avLst/>
@@ -2073,48 +2143,48 @@
       </p:sp>
       <p:sp>
         <p:nvSpPr>
-          <p:cNvPr id="43" name="" descr="{&quot;isTemplate&quot;:true,&quot;type&quot;:&quot;text&quot;}"/>
+          <p:cNvPr id="45" name="" descr="{&quot;isTemplate&quot;:true,&quot;type&quot;:&quot;text&quot;}"/>
           <p:cNvSpPr txBox="1"/>
           <p:nvPr/>
         </p:nvSpPr>
         <p:spPr>
           <a:xfrm rot="0" flipH="0" flipV="0">
             <a:off x="990600" y="1866900"/>
-            <a:ext cx="10210800" cy="781050"/>
-          </a:xfrm>
-          <a:prstGeom prst="rect"/>
-        </p:spPr>
-        <p:txBody>
-          <a:bodyPr wrap="none" lIns="0" tIns="0" rIns="0" bIns="0"/>
-          <a:p>
-            <a:pPr>
-              <a:lnSpc>
-                <a:spcPct val="200000"/>
-              </a:lnSpc>
-            </a:pPr>
-            <a:r>
-              <a:rPr lang="zh-CN" sz="2550" spc="75">
+            <a:ext cx="10210800" cy="742950"/>
+          </a:xfrm>
+          <a:prstGeom prst="rect"/>
+        </p:spPr>
+        <p:txBody>
+          <a:bodyPr wrap="none" lIns="0" tIns="0" rIns="0" bIns="0"/>
+          <a:p>
+            <a:pPr>
+              <a:lnSpc>
+                <a:spcPct val="190000"/>
+              </a:lnSpc>
+            </a:pPr>
+            <a:r>
+              <a:rPr lang="zh-CN" sz="2550">
                 <a:solidFill>
                   <a:srgbClr val="1F3A34"/>
                 </a:solidFill>
                 <a:latin typeface="宋体"/>
                 <a:ea typeface="宋体"/>
               </a:rPr>
-              <a:t>满地黄花堆积，憔悴损，如今有谁堪摘？</a:t>
-            </a:r>
-            <a:endParaRPr/>
-          </a:p>
-        </p:txBody>
-      </p:sp>
-      <p:sp>
-        <p:nvSpPr>
-          <p:cNvPr id="44" name=""/>
+              <a:t>守着窗儿，独自怎生得黑？</a:t>
+            </a:r>
+            <a:endParaRPr/>
+          </a:p>
+        </p:txBody>
+      </p:sp>
+      <p:sp>
+        <p:nvSpPr>
+          <p:cNvPr id="46" name=""/>
           <p:cNvSpPr/>
           <p:nvPr/>
         </p:nvSpPr>
         <p:spPr>
           <a:xfrm rot="0" flipH="0" flipV="0">
-            <a:off x="609600" y="3257550"/>
+            <a:off x="609600" y="3219450"/>
             <a:ext cx="11010900" cy="1000125"/>
           </a:xfrm>
           <a:custGeom>
@@ -2148,13 +2218,13 @@
       </p:sp>
       <p:sp>
         <p:nvSpPr>
-          <p:cNvPr id="45" name="" descr="{&quot;isTemplate&quot;:true,&quot;type&quot;:&quot;text&quot;}"/>
-          <p:cNvSpPr txBox="1"/>
-          <p:nvPr/>
-        </p:nvSpPr>
-        <p:spPr>
-          <a:xfrm rot="0" flipH="0" flipV="0">
-            <a:off x="876300" y="3257550"/>
+          <p:cNvPr id="47" name="" descr="{&quot;isTemplate&quot;:true,&quot;type&quot;:&quot;text&quot;}"/>
+          <p:cNvSpPr txBox="1"/>
+          <p:nvPr/>
+        </p:nvSpPr>
+        <p:spPr>
+          <a:xfrm rot="0" flipH="0" flipV="0">
+            <a:off x="876300" y="3219450"/>
             <a:ext cx="10706100" cy="609600"/>
           </a:xfrm>
           <a:prstGeom prst="rect"/>
@@ -2175,21 +2245,21 @@
                 <a:latin typeface="宋体"/>
                 <a:ea typeface="宋体"/>
               </a:rPr>
-              <a:t>“憔悴损”的“损”，主语是花，还是人？</a:t>
-            </a:r>
-            <a:endParaRPr/>
-          </a:p>
-        </p:txBody>
-      </p:sp>
-      <p:sp>
-        <p:nvSpPr>
-          <p:cNvPr id="46" name="" descr="{&quot;isTemplate&quot;:true,&quot;type&quot;:&quot;text&quot;}"/>
-          <p:cNvSpPr txBox="1"/>
-          <p:nvPr/>
-        </p:nvSpPr>
-        <p:spPr>
-          <a:xfrm rot="0" flipH="0" flipV="0">
-            <a:off x="876300" y="3981450"/>
+              <a:t>这一句的动词是哪个？</a:t>
+            </a:r>
+            <a:endParaRPr/>
+          </a:p>
+        </p:txBody>
+      </p:sp>
+      <p:sp>
+        <p:nvSpPr>
+          <p:cNvPr id="48" name="" descr="{&quot;isTemplate&quot;:true,&quot;type&quot;:&quot;text&quot;}"/>
+          <p:cNvSpPr txBox="1"/>
+          <p:nvPr/>
+        </p:nvSpPr>
+        <p:spPr>
+          <a:xfrm rot="0" flipH="0" flipV="0">
+            <a:off x="876300" y="3943350"/>
             <a:ext cx="10706100" cy="276225"/>
           </a:xfrm>
           <a:prstGeom prst="rect"/>
@@ -2210,15 +2280,15 @@
                 <a:latin typeface="宋体"/>
                 <a:ea typeface="宋体"/>
               </a:rPr>
-              <a:t>用刚才那个方法答：先说依据，再说结论。</a:t>
-            </a:r>
-            <a:endParaRPr/>
-          </a:p>
-        </p:txBody>
-      </p:sp>
-      <p:sp>
-        <p:nvSpPr>
-          <p:cNvPr id="47" name=""/>
+              <a:t>提示：“怎生”的“生”是语助词。</a:t>
+            </a:r>
+            <a:endParaRPr/>
+          </a:p>
+        </p:txBody>
+      </p:sp>
+      <p:sp>
+        <p:nvSpPr>
+          <p:cNvPr id="49" name=""/>
           <p:cNvSpPr/>
           <p:nvPr/>
         </p:nvSpPr>
@@ -2260,7 +2330,7 @@
       </p:sp>
       <p:sp>
         <p:nvSpPr>
-          <p:cNvPr id="48" name="" descr="{&quot;isTemplate&quot;:true,&quot;type&quot;:&quot;text&quot;}"/>
+          <p:cNvPr id="50" name="" descr="{&quot;isTemplate&quot;:true,&quot;type&quot;:&quot;text&quot;}"/>
           <p:cNvSpPr txBox="1"/>
           <p:nvPr/>
         </p:nvSpPr>
@@ -2315,7 +2385,7 @@
       </p:sp>
       <p:sp>
         <p:nvSpPr>
-          <p:cNvPr id="49" name="" descr="{&quot;isTemplate&quot;:true,&quot;type&quot;:&quot;text&quot;}"/>
+          <p:cNvPr id="51" name="" descr="{&quot;isTemplate&quot;:true,&quot;type&quot;:&quot;text&quot;}"/>
           <p:cNvSpPr txBox="1"/>
           <p:nvPr/>
         </p:nvSpPr>
@@ -2358,7 +2428,7 @@
   <p:cSld>
     <p:spTree>
       <p:nvGrpSpPr>
-        <p:cNvPr id="50" name="" descr="&lt;Slide style={{ background: '#F5F1E6', padding: '48px 64px', fontFamily: '宋体' }}&gt;&#13;&#10;  &lt;Box style={{ flexDirection: 'row', justifyContent: 'space-between', alignItems: 'flex-end', height: 72 }}&gt;&#13;&#10;    &lt;Text style={{ fontSize: 40, fontWeight: 'bold', color: '#1F3A34', lineHeight: 1.2 }}&gt;这些韵脚，为什么这么短&lt;/Text&gt;&#13;&#10;    &lt;Text style={{ fontSize: 24, color: '#6B6B6B' }}&gt;环节五 · 任务三&lt;/Text&gt;&#13;&#10;  &lt;/Box&gt;&#13;&#10;  &lt;Box style={{ height: 472, marginTop: 20, flexDirection: 'column' }}&gt;&#13;&#10;  &lt;Box style={{ height: 472, justifyContent: 'center', flexDirection: 'column' }}&gt;&#13;&#10;    &lt;Box style={{ flexDirection: 'row', gap: 14 }}&gt;&#13;&#10;      &lt;Box style={{ flex: 1, height: 110, background: 'rgba(31,58,52,0.06)', alignItems: 'center', justifyContent: 'center' }}&gt;&#13;&#10;        &lt;Text style={{ fontSize: 34, fontWeight: 'bold', color: '#1F3A34' }}&gt;觅&lt;/Text&gt;&#13;&#10;      &lt;/Box&gt;&lt;Box style={{ flex: 1, height: 110, background: 'rgba(31,58,52,0.06)', alignItems: 'center', justifyContent: 'center' }}&gt;&#13;&#10;        &lt;Text style={{ fontSize: 34, fontWeight: 'bold', color: '#1F3A34' }}&gt;戚&lt;/Text&gt;&#13;&#10;      &lt;/Box&gt;&lt;Box style={{ flex: 1, height: 110, background: 'rgba(31,58,52,0.06)', alignItems: 'center', justifyContent: 'center' }}&gt;&#13;&#10;        &lt;Text style={{ fontSize: 34, fontWeight: 'bold', color: '#1F3A34' }}&gt;息&lt;/Text&gt;&#13;&#10;      &lt;/Box&gt;&lt;Box style={{ flex: 1, height: 110, background: 'rgba(31,58,52,0.06)', alignItems: 'center', justifyContent: 'center' }}&gt;&#13;&#10;        &lt;Text style={{ fontSize: 34, fontWeight: 'bold', color: '#1F3A34' }}&gt;急&lt;/Text&gt;&#13;&#10;      &lt;/Box&gt;&lt;Box style={{ flex: 1, height: 110, background: 'rgba(31,58,52,0.06)', alignItems: 'center', justifyContent: 'center' }}&gt;&#13;&#10;        &lt;Text style={{ fontSize: 34, fontWeight: 'bold', color: '#1F3A34' }}&gt;识&lt;/Text&gt;&#13;&#10;      &lt;/Box&gt;&lt;Box style={{ flex: 1, height: 110, background: 'rgba(31,58,52,0.06)', alignItems: 'center', justifyContent: 'center' }}&gt;&#13;&#10;        &lt;Text style={{ fontSize: 34, fontWeight: 'bold', color: '#1F3A34' }}&gt;积&lt;/Text&gt;&#13;&#10;      &lt;/Box&gt;&lt;Box style={{ flex: 1, height: 110, background: 'rgba(31,58,52,0.06)', alignItems: 'center', justifyContent: 'center' }}&gt;&#13;&#10;        &lt;Text style={{ fontSize: 34, fontWeight: 'bold', color: '#1F3A34' }}&gt;摘&lt;/Text&gt;&#13;&#10;      &lt;/Box&gt;&lt;Box style={{ flex: 1, height: 110, background: 'rgba(31,58,52,0.06)', alignItems: 'center', justifyContent: 'center' }}&gt;&#13;&#10;        &lt;Text style={{ fontSize: 34, fontWeight: 'bold', color: '#1F3A34' }}&gt;黑&lt;/Text&gt;&#13;&#10;      &lt;/Box&gt;&lt;Box style={{ flex: 1, height: 110, background: 'rgba(31,58,52,0.06)', alignItems: 'center', justifyContent: 'center' }}&gt;&#13;&#10;        &lt;Text style={{ fontSize: 34, fontWeight: 'bold', color: '#1F3A34' }}&gt;滴&lt;/Text&gt;&#13;&#10;      &lt;/Box&gt;&lt;Box style={{ flex: 1, height: 110, background: 'rgba(31,58,52,0.06)', alignItems: 'center', justifyContent: 'center' }}&gt;&#13;&#10;        &lt;Text style={{ fontSize: 34, fontWeight: 'bold', color: '#1F3A34' }}&gt;得&lt;/Text&gt;&#13;&#10;      &lt;/Box&gt;&#13;&#10;    &lt;/Box&gt;&#13;&#10;    &lt;Text style={{ fontSize: 28, color: '#1F3A34', marginTop: 36 }}&gt;十个韵脚连起来读，声音是被拖长，还是被收住？&lt;/Text&gt;&#13;&#10;    &lt;Text style={{ fontSize: 24, color: '#6B6B6B', marginTop: 12 }}&gt;这一句的感觉，不是想出来的，是读出来的。&lt;/Text&gt;&#13;&#10;  &lt;/Box&gt;&#13;&#10;  &lt;/Box&gt;&#13;&#10;  &lt;Box style={{ height: 40, marginTop: 12, borderTop: '1px solid rgba(31,58,52,0.2)', flexDirection: 'row', justifyContent: 'space-between', alignItems: 'center', paddingTop: 8 }}&gt;&#13;&#10;    &lt;Text style={{ fontSize: 24, color: '#6B6B6B' }}&gt;《声声慢》· 李清照&lt;/Text&gt;&#13;&#10;    &lt;Text style={{ fontSize: 24, color: '#B4552D' }}&gt;13/16&lt;/Text&gt;&#13;&#10;  &lt;/Box&gt;&#13;&#10;&lt;/Slide&gt;"/>
+        <p:cNvPr id="52" name="" descr="&lt;Slide style={{ background: '#F5F1E6', padding: '48px 64px', fontFamily: '宋体' }}&gt;&#13;&#10;  &lt;Box style={{ flexDirection: 'row', justifyContent: 'space-between', alignItems: 'flex-end', height: 72 }}&gt;&#13;&#10;    &lt;Text style={{ fontSize: 40, fontWeight: 'bold', color: '#1F3A34', lineHeight: 1.2 }}&gt;这些韵脚，为什么这么短&lt;/Text&gt;&#13;&#10;    &lt;Text style={{ fontSize: 24, color: '#6B6B6B' }}&gt;环节五 · 任务三&lt;/Text&gt;&#13;&#10;  &lt;/Box&gt;&#13;&#10;  &lt;Box style={{ height: 472, marginTop: 20, flexDirection: 'column' }}&gt;&#13;&#10;  &lt;Box style={{ height: 472, justifyContent: 'center', flexDirection: 'column' }}&gt;&#13;&#10;    &lt;Box style={{ flexDirection: 'row', gap: 14 }}&gt;&#13;&#10;      &lt;Box style={{ flex: 1, height: 110, background: 'rgba(31,58,52,0.06)', alignItems: 'center', justifyContent: 'center' }}&gt;&#13;&#10;        &lt;Text style={{ fontSize: 34, fontWeight: 'bold', color: '#1F3A34' }}&gt;觅&lt;/Text&gt;&#13;&#10;      &lt;/Box&gt;&lt;Box style={{ flex: 1, height: 110, background: 'rgba(31,58,52,0.06)', alignItems: 'center', justifyContent: 'center' }}&gt;&#13;&#10;        &lt;Text style={{ fontSize: 34, fontWeight: 'bold', color: '#1F3A34' }}&gt;戚&lt;/Text&gt;&#13;&#10;      &lt;/Box&gt;&lt;Box style={{ flex: 1, height: 110, background: 'rgba(31,58,52,0.06)', alignItems: 'center', justifyContent: 'center' }}&gt;&#13;&#10;        &lt;Text style={{ fontSize: 34, fontWeight: 'bold', color: '#1F3A34' }}&gt;息&lt;/Text&gt;&#13;&#10;      &lt;/Box&gt;&lt;Box style={{ flex: 1, height: 110, background: 'rgba(31,58,52,0.06)', alignItems: 'center', justifyContent: 'center' }}&gt;&#13;&#10;        &lt;Text style={{ fontSize: 34, fontWeight: 'bold', color: '#1F3A34' }}&gt;急&lt;/Text&gt;&#13;&#10;      &lt;/Box&gt;&lt;Box style={{ flex: 1, height: 110, background: 'rgba(31,58,52,0.06)', alignItems: 'center', justifyContent: 'center' }}&gt;&#13;&#10;        &lt;Text style={{ fontSize: 34, fontWeight: 'bold', color: '#1F3A34' }}&gt;识&lt;/Text&gt;&#13;&#10;      &lt;/Box&gt;&lt;Box style={{ flex: 1, height: 110, background: 'rgba(31,58,52,0.06)', alignItems: 'center', justifyContent: 'center' }}&gt;&#13;&#10;        &lt;Text style={{ fontSize: 34, fontWeight: 'bold', color: '#1F3A34' }}&gt;积&lt;/Text&gt;&#13;&#10;      &lt;/Box&gt;&lt;Box style={{ flex: 1, height: 110, background: 'rgba(31,58,52,0.06)', alignItems: 'center', justifyContent: 'center' }}&gt;&#13;&#10;        &lt;Text style={{ fontSize: 34, fontWeight: 'bold', color: '#1F3A34' }}&gt;摘&lt;/Text&gt;&#13;&#10;      &lt;/Box&gt;&lt;Box style={{ flex: 1, height: 110, background: 'rgba(31,58,52,0.06)', alignItems: 'center', justifyContent: 'center' }}&gt;&#13;&#10;        &lt;Text style={{ fontSize: 34, fontWeight: 'bold', color: '#1F3A34' }}&gt;黑&lt;/Text&gt;&#13;&#10;      &lt;/Box&gt;&lt;Box style={{ flex: 1, height: 110, background: 'rgba(31,58,52,0.06)', alignItems: 'center', justifyContent: 'center' }}&gt;&#13;&#10;        &lt;Text style={{ fontSize: 34, fontWeight: 'bold', color: '#1F3A34' }}&gt;滴&lt;/Text&gt;&#13;&#10;      &lt;/Box&gt;&lt;Box style={{ flex: 1, height: 110, background: 'rgba(31,58,52,0.06)', alignItems: 'center', justifyContent: 'center' }}&gt;&#13;&#10;        &lt;Text style={{ fontSize: 34, fontWeight: 'bold', color: '#1F3A34' }}&gt;得&lt;/Text&gt;&#13;&#10;      &lt;/Box&gt;&#13;&#10;    &lt;/Box&gt;&#13;&#10;    &lt;Text style={{ fontSize: 28, color: '#1F3A34', marginTop: 36 }}&gt;十个韵脚连起来读，声音是被拖长，还是被收住？&lt;/Text&gt;&#13;&#10;    &lt;Text style={{ fontSize: 24, color: '#6B6B6B', marginTop: 12 }}&gt;这一句的感觉，不是想出来的，是读出来的。&lt;/Text&gt;&#13;&#10;  &lt;/Box&gt;&#13;&#10;  &lt;/Box&gt;&#13;&#10;  &lt;Box style={{ height: 40, marginTop: 12, borderTop: '1px solid rgba(31,58,52,0.2)', flexDirection: 'row', justifyContent: 'space-between', alignItems: 'center', paddingTop: 8 }}&gt;&#13;&#10;    &lt;Text style={{ fontSize: 24, color: '#6B6B6B' }}&gt;《声声慢》· 李清照&lt;/Text&gt;&#13;&#10;    &lt;Text style={{ fontSize: 24, color: '#B4552D' }}&gt;13/16&lt;/Text&gt;&#13;&#10;  &lt;/Box&gt;&#13;&#10;&lt;/Slide&gt;"/>
         <p:cNvGrpSpPr/>
         <p:nvPr/>
       </p:nvGrpSpPr>
@@ -2372,7 +2442,7 @@
       </p:grpSpPr>
       <p:sp>
         <p:nvSpPr>
-          <p:cNvPr id="51" name=""/>
+          <p:cNvPr id="53" name=""/>
           <p:cNvSpPr/>
           <p:nvPr/>
         </p:nvSpPr>
@@ -2396,7 +2466,7 @@
       </p:sp>
       <p:sp>
         <p:nvSpPr>
-          <p:cNvPr id="52" name="" descr="{&quot;isTemplate&quot;:true,&quot;type&quot;:&quot;text&quot;}"/>
+          <p:cNvPr id="54" name="" descr="{&quot;isTemplate&quot;:true,&quot;type&quot;:&quot;text&quot;}"/>
           <p:cNvSpPr txBox="1"/>
           <p:nvPr/>
         </p:nvSpPr>
@@ -2431,7 +2501,7 @@
       </p:sp>
       <p:sp>
         <p:nvSpPr>
-          <p:cNvPr id="53" name="" descr="{&quot;isTemplate&quot;:true,&quot;type&quot;:&quot;text&quot;}"/>
+          <p:cNvPr id="55" name="" descr="{&quot;isTemplate&quot;:true,&quot;type&quot;:&quot;text&quot;}"/>
           <p:cNvSpPr txBox="1"/>
           <p:nvPr/>
         </p:nvSpPr>
@@ -2486,7 +2556,7 @@
       </p:sp>
       <p:sp>
         <p:nvSpPr>
-          <p:cNvPr id="54" name=""/>
+          <p:cNvPr id="56" name=""/>
           <p:cNvSpPr/>
           <p:nvPr/>
         </p:nvSpPr>
@@ -2512,7 +2582,7 @@
       </p:sp>
       <p:sp>
         <p:nvSpPr>
-          <p:cNvPr id="55" name="" descr="{&quot;isTemplate&quot;:true,&quot;type&quot;:&quot;text&quot;}"/>
+          <p:cNvPr id="57" name="" descr="{&quot;isTemplate&quot;:true,&quot;type&quot;:&quot;text&quot;}"/>
           <p:cNvSpPr txBox="1"/>
           <p:nvPr/>
         </p:nvSpPr>
@@ -2547,7 +2617,7 @@
       </p:sp>
       <p:sp>
         <p:nvSpPr>
-          <p:cNvPr id="56" name=""/>
+          <p:cNvPr id="58" name=""/>
           <p:cNvSpPr/>
           <p:nvPr/>
         </p:nvSpPr>
@@ -2573,7 +2643,7 @@
       </p:sp>
       <p:sp>
         <p:nvSpPr>
-          <p:cNvPr id="57" name="" descr="{&quot;isTemplate&quot;:true,&quot;type&quot;:&quot;text&quot;}"/>
+          <p:cNvPr id="59" name="" descr="{&quot;isTemplate&quot;:true,&quot;type&quot;:&quot;text&quot;}"/>
           <p:cNvSpPr txBox="1"/>
           <p:nvPr/>
         </p:nvSpPr>
@@ -2608,7 +2678,7 @@
       </p:sp>
       <p:sp>
         <p:nvSpPr>
-          <p:cNvPr id="58" name=""/>
+          <p:cNvPr id="60" name=""/>
           <p:cNvSpPr/>
           <p:nvPr/>
         </p:nvSpPr>
@@ -2634,7 +2704,7 @@
       </p:sp>
       <p:sp>
         <p:nvSpPr>
-          <p:cNvPr id="59" name="" descr="{&quot;isTemplate&quot;:true,&quot;type&quot;:&quot;text&quot;}"/>
+          <p:cNvPr id="61" name="" descr="{&quot;isTemplate&quot;:true,&quot;type&quot;:&quot;text&quot;}"/>
           <p:cNvSpPr txBox="1"/>
           <p:nvPr/>
         </p:nvSpPr>
@@ -2669,7 +2739,7 @@
       </p:sp>
       <p:sp>
         <p:nvSpPr>
-          <p:cNvPr id="60" name=""/>
+          <p:cNvPr id="62" name=""/>
           <p:cNvSpPr/>
           <p:nvPr/>
         </p:nvSpPr>
@@ -2695,7 +2765,7 @@
       </p:sp>
       <p:sp>
         <p:nvSpPr>
-          <p:cNvPr id="61" name="" descr="{&quot;isTemplate&quot;:true,&quot;type&quot;:&quot;text&quot;}"/>
+          <p:cNvPr id="63" name="" descr="{&quot;isTemplate&quot;:true,&quot;type&quot;:&quot;text&quot;}"/>
           <p:cNvSpPr txBox="1"/>
           <p:nvPr/>
         </p:nvSpPr>
@@ -2730,7 +2800,7 @@
       </p:sp>
       <p:sp>
         <p:nvSpPr>
-          <p:cNvPr id="62" name=""/>
+          <p:cNvPr id="64" name=""/>
           <p:cNvSpPr/>
           <p:nvPr/>
         </p:nvSpPr>
@@ -2756,7 +2826,7 @@
       </p:sp>
       <p:sp>
         <p:nvSpPr>
-          <p:cNvPr id="63" name="" descr="{&quot;isTemplate&quot;:true,&quot;type&quot;:&quot;text&quot;}"/>
+          <p:cNvPr id="65" name="" descr="{&quot;isTemplate&quot;:true,&quot;type&quot;:&quot;text&quot;}"/>
           <p:cNvSpPr txBox="1"/>
           <p:nvPr/>
         </p:nvSpPr>
@@ -2791,7 +2861,7 @@
       </p:sp>
       <p:sp>
         <p:nvSpPr>
-          <p:cNvPr id="64" name=""/>
+          <p:cNvPr id="66" name=""/>
           <p:cNvSpPr/>
           <p:nvPr/>
         </p:nvSpPr>
@@ -2817,7 +2887,7 @@
       </p:sp>
       <p:sp>
         <p:nvSpPr>
-          <p:cNvPr id="65" name="" descr="{&quot;isTemplate&quot;:true,&quot;type&quot;:&quot;text&quot;}"/>
+          <p:cNvPr id="67" name="" descr="{&quot;isTemplate&quot;:true,&quot;type&quot;:&quot;text&quot;}"/>
           <p:cNvSpPr txBox="1"/>
           <p:nvPr/>
         </p:nvSpPr>
@@ -2852,7 +2922,7 @@
       </p:sp>
       <p:sp>
         <p:nvSpPr>
-          <p:cNvPr id="66" name=""/>
+          <p:cNvPr id="68" name=""/>
           <p:cNvSpPr/>
           <p:nvPr/>
         </p:nvSpPr>
@@ -2878,7 +2948,7 @@
       </p:sp>
       <p:sp>
         <p:nvSpPr>
-          <p:cNvPr id="67" name="" descr="{&quot;isTemplate&quot;:true,&quot;type&quot;:&quot;text&quot;}"/>
+          <p:cNvPr id="69" name="" descr="{&quot;isTemplate&quot;:true,&quot;type&quot;:&quot;text&quot;}"/>
           <p:cNvSpPr txBox="1"/>
           <p:nvPr/>
         </p:nvSpPr>
@@ -2913,7 +2983,7 @@
       </p:sp>
       <p:sp>
         <p:nvSpPr>
-          <p:cNvPr id="68" name=""/>
+          <p:cNvPr id="70" name=""/>
           <p:cNvSpPr/>
           <p:nvPr/>
         </p:nvSpPr>
@@ -2939,7 +3009,7 @@
       </p:sp>
       <p:sp>
         <p:nvSpPr>
-          <p:cNvPr id="69" name="" descr="{&quot;isTemplate&quot;:true,&quot;type&quot;:&quot;text&quot;}"/>
+          <p:cNvPr id="71" name="" descr="{&quot;isTemplate&quot;:true,&quot;type&quot;:&quot;text&quot;}"/>
           <p:cNvSpPr txBox="1"/>
           <p:nvPr/>
         </p:nvSpPr>
@@ -2974,7 +3044,7 @@
       </p:sp>
       <p:sp>
         <p:nvSpPr>
-          <p:cNvPr id="70" name=""/>
+          <p:cNvPr id="72" name=""/>
           <p:cNvSpPr/>
           <p:nvPr/>
         </p:nvSpPr>
@@ -3000,7 +3070,7 @@
       </p:sp>
       <p:sp>
         <p:nvSpPr>
-          <p:cNvPr id="71" name="" descr="{&quot;isTemplate&quot;:true,&quot;type&quot;:&quot;text&quot;}"/>
+          <p:cNvPr id="73" name="" descr="{&quot;isTemplate&quot;:true,&quot;type&quot;:&quot;text&quot;}"/>
           <p:cNvSpPr txBox="1"/>
           <p:nvPr/>
         </p:nvSpPr>
@@ -3035,7 +3105,7 @@
       </p:sp>
       <p:sp>
         <p:nvSpPr>
-          <p:cNvPr id="72" name=""/>
+          <p:cNvPr id="74" name=""/>
           <p:cNvSpPr/>
           <p:nvPr/>
         </p:nvSpPr>
@@ -3061,7 +3131,7 @@
       </p:sp>
       <p:sp>
         <p:nvSpPr>
-          <p:cNvPr id="73" name="" descr="{&quot;isTemplate&quot;:true,&quot;type&quot;:&quot;text&quot;}"/>
+          <p:cNvPr id="75" name="" descr="{&quot;isTemplate&quot;:true,&quot;type&quot;:&quot;text&quot;}"/>
           <p:cNvSpPr txBox="1"/>
           <p:nvPr/>
         </p:nvSpPr>
@@ -3096,7 +3166,7 @@
       </p:sp>
       <p:sp>
         <p:nvSpPr>
-          <p:cNvPr id="74" name="" descr="{&quot;isTemplate&quot;:true,&quot;type&quot;:&quot;text&quot;}"/>
+          <p:cNvPr id="76" name="" descr="{&quot;isTemplate&quot;:true,&quot;type&quot;:&quot;text&quot;}"/>
           <p:cNvSpPr txBox="1"/>
           <p:nvPr/>
         </p:nvSpPr>
@@ -3131,7 +3201,7 @@
       </p:sp>
       <p:sp>
         <p:nvSpPr>
-          <p:cNvPr id="75" name="" descr="{&quot;isTemplate&quot;:true,&quot;type&quot;:&quot;text&quot;}"/>
+          <p:cNvPr id="77" name="" descr="{&quot;isTemplate&quot;:true,&quot;type&quot;:&quot;text&quot;}"/>
           <p:cNvSpPr txBox="1"/>
           <p:nvPr/>
         </p:nvSpPr>
@@ -3166,7 +3236,7 @@
       </p:sp>
       <p:sp>
         <p:nvSpPr>
-          <p:cNvPr id="76" name=""/>
+          <p:cNvPr id="78" name=""/>
           <p:cNvSpPr/>
           <p:nvPr/>
         </p:nvSpPr>
@@ -3208,7 +3278,7 @@
       </p:sp>
       <p:sp>
         <p:nvSpPr>
-          <p:cNvPr id="77" name="" descr="{&quot;isTemplate&quot;:true,&quot;type&quot;:&quot;text&quot;}"/>
+          <p:cNvPr id="79" name="" descr="{&quot;isTemplate&quot;:true,&quot;type&quot;:&quot;text&quot;}"/>
           <p:cNvSpPr txBox="1"/>
           <p:nvPr/>
         </p:nvSpPr>
@@ -3263,7 +3333,7 @@
       </p:sp>
       <p:sp>
         <p:nvSpPr>
-          <p:cNvPr id="78" name="" descr="{&quot;isTemplate&quot;:true,&quot;type&quot;:&quot;text&quot;}"/>
+          <p:cNvPr id="80" name="" descr="{&quot;isTemplate&quot;:true,&quot;type&quot;:&quot;text&quot;}"/>
           <p:cNvSpPr txBox="1"/>
           <p:nvPr/>
         </p:nvSpPr>
@@ -3306,7 +3376,7 @@
   <p:cSld>
     <p:spTree>
       <p:nvGrpSpPr>
-        <p:cNvPr id="79" name="" descr="&lt;Slide style={{ background: '#F5F1E6', padding: '48px 64px', fontFamily: '宋体' }}&gt;&#13;&#10;  &lt;Box style={{ flexDirection: 'row', justifyContent: 'space-between', alignItems: 'flex-end', height: 72 }}&gt;&#13;&#10;    &lt;Text style={{ fontSize: 40, fontWeight: 'bold', color: '#1F3A34', lineHeight: 1.2 }}&gt;末句：拖长，还是收住&lt;/Text&gt;&#13;&#10;    &lt;Text style={{ fontSize: 24, color: '#6B6B6B' }}&gt;环节五 · 任务三&lt;/Text&gt;&#13;&#10;  &lt;/Box&gt;&#13;&#10;  &lt;Box style={{ height: 472, marginTop: 20, flexDirection: 'column' }}&gt;&#13;&#10;  &lt;Box style={{ marginTop: 20, padding: '24px 40px', background: 'rgba(31,58,52,0.05)' }}&gt;&#13;&#10;    &lt;Text style={{ fontSize: 34, color: '#1F3A34', lineHeight: 1.9 }}&gt;这次第，怎一个愁字了得！&lt;/Text&gt;&#13;&#10;  &lt;/Box&gt;&#13;&#10;  &lt;Box style={{ flexDirection: 'row', gap: 24, marginTop: 28, height: 180 }}&gt;&#13;&#10;    &lt;Box style={{ flex: 1, border: '1px solid rgba(31,58,52,0.35)', padding: 24, justifyContent: 'center' }}&gt;&#13;&#10;      &lt;Text style={{ fontSize: 28, fontWeight: 'bold', color: '#1F3A34' }}&gt;读法 A：拖长&lt;/Text&gt;&#13;&#10;      &lt;Text style={{ fontSize: 24, color: '#6B6B6B', marginTop: 12 }}&gt;把“了得”放开，声音散出去&lt;/Text&gt;&#13;&#10;    &lt;/Box&gt;&#13;&#10;    &lt;Box style={{ flex: 1, border: '1px solid rgba(180,85,45,0.5)', padding: 24, justifyContent: 'center' }}&gt;&#13;&#10;      &lt;Text style={{ fontSize: 28, fontWeight: 'bold', color: '#B4552D' }}&gt;读法 B：收住&lt;/Text&gt;&#13;&#10;      &lt;Text style={{ fontSize: 24, color: '#6B6B6B', marginTop: 12 }}&gt;把“得”压实，声音咽回去&lt;/Text&gt;&#13;&#10;    &lt;/Box&gt;&#13;&#10;  &lt;/Box&gt;&#13;&#10;  &lt;Text style={{ fontSize: 28, color: '#1F3A34', marginTop: 24 }}&gt;选一种，说一句“为什么”。&lt;/Text&gt;&#13;&#10;  &lt;/Box&gt;&#13;&#10;  &lt;Box style={{ height: 40, marginTop: 12, borderTop: '1px solid rgba(31,58,52,0.2)', flexDirection: 'row', justifyContent: 'space-between', alignItems: 'center', paddingTop: 8 }}&gt;&#13;&#10;    &lt;Text style={{ fontSize: 24, color: '#6B6B6B' }}&gt;《声声慢》· 李清照&lt;/Text&gt;&#13;&#10;    &lt;Text style={{ fontSize: 24, color: '#B4552D' }}&gt;14/16&lt;/Text&gt;&#13;&#10;  &lt;/Box&gt;&#13;&#10;&lt;/Slide&gt;"/>
+        <p:cNvPr id="81" name="" descr="&lt;Slide style={{ background: '#F5F1E6', padding: '48px 64px', fontFamily: '宋体' }}&gt;&#13;&#10;  &lt;Box style={{ flexDirection: 'row', justifyContent: 'space-between', alignItems: 'flex-end', height: 72 }}&gt;&#13;&#10;    &lt;Text style={{ fontSize: 40, fontWeight: 'bold', color: '#1F3A34', lineHeight: 1.2 }}&gt;有人说它伧气&lt;/Text&gt;&#13;&#10;    &lt;Text style={{ fontSize: 24, color: '#6B6B6B' }}&gt;环节五 · 任务三&lt;/Text&gt;&#13;&#10;  &lt;/Box&gt;&#13;&#10;  &lt;Box style={{ height: 472, marginTop: 20, flexDirection: 'column' }}&gt;&#13;&#10;  &lt;Box style={{ height: 472, flexDirection: 'column', justifyContent: 'center', gap: 18 }}&gt;&#13;&#10;    &lt;Box style={{ padding: '22px 28px', background: 'rgba(31,58,52,0.06)', borderLeft: '4px solid #1F3A34' }}&gt;&#13;&#10;      &lt;Text style={{ fontSize: 26, color: '#1F3A34', lineHeight: 1.7 }}&gt;许昂霄：此词颇带伧气，而昔人极口称之，殆不可解。&lt;/Text&gt;&#13;&#10;    &lt;/Box&gt;&#13;&#10;    &lt;Box style={{ padding: '22px 28px', background: 'rgba(31,58,52,0.06)', borderLeft: '4px solid #1F3A34' }}&gt;&#13;&#10;      &lt;Text style={{ fontSize: 26, color: '#1F3A34', lineHeight: 1.7 }}&gt;陈廷焯：此不过奇笔耳，并非高调。&lt;/Text&gt;&#13;&#10;    &lt;/Box&gt;&#13;&#10;    &lt;Box style={{ marginTop: 10, borderLeft: '4px solid #B4552D', paddingLeft: 24 }}&gt;&#13;&#10;      &lt;Text style={{ fontSize: 28, fontWeight: 'bold', color: '#B4552D' }}&gt;你同意吗？举一句词为证。&lt;/Text&gt;&#13;&#10;      &lt;Text style={{ fontSize: 24, color: '#6B6B6B', marginTop: 10 }}&gt;不举词句的表态，同意与不同意都不算。&lt;/Text&gt;&#13;&#10;    &lt;/Box&gt;&#13;&#10;  &lt;/Box&gt;&#13;&#10;  &lt;/Box&gt;&#13;&#10;  &lt;Box style={{ height: 40, marginTop: 12, borderTop: '1px solid rgba(31,58,52,0.2)', flexDirection: 'row', justifyContent: 'space-between', alignItems: 'center', paddingTop: 8 }}&gt;&#13;&#10;    &lt;Text style={{ fontSize: 24, color: '#6B6B6B' }}&gt;《声声慢》· 李清照&lt;/Text&gt;&#13;&#10;    &lt;Text style={{ fontSize: 24, color: '#B4552D' }}&gt;14/16&lt;/Text&gt;&#13;&#10;  &lt;/Box&gt;&#13;&#10;&lt;/Slide&gt;"/>
         <p:cNvGrpSpPr/>
         <p:nvPr/>
       </p:nvGrpSpPr>
@@ -3320,7 +3390,7 @@
       </p:grpSpPr>
       <p:sp>
         <p:nvSpPr>
-          <p:cNvPr id="80" name=""/>
+          <p:cNvPr id="82" name=""/>
           <p:cNvSpPr/>
           <p:nvPr/>
         </p:nvSpPr>
@@ -3344,14 +3414,14 @@
       </p:sp>
       <p:sp>
         <p:nvSpPr>
-          <p:cNvPr id="81" name="" descr="{&quot;isTemplate&quot;:true,&quot;type&quot;:&quot;text&quot;}"/>
+          <p:cNvPr id="83" name="" descr="{&quot;isTemplate&quot;:true,&quot;type&quot;:&quot;text&quot;}"/>
           <p:cNvSpPr txBox="1"/>
           <p:nvPr/>
         </p:nvSpPr>
         <p:spPr>
           <a:xfrm rot="0" flipH="0" flipV="0">
             <a:off x="609600" y="590550"/>
-            <a:ext cx="3810000" cy="552450"/>
+            <a:ext cx="2286000" cy="552450"/>
           </a:xfrm>
           <a:prstGeom prst="rect"/>
         </p:spPr>
@@ -3371,15 +3441,15 @@
                 <a:latin typeface="宋体"/>
                 <a:ea typeface="宋体"/>
               </a:rPr>
-              <a:t>末句：拖长，还是收住</a:t>
-            </a:r>
-            <a:endParaRPr/>
-          </a:p>
-        </p:txBody>
-      </p:sp>
-      <p:sp>
-        <p:nvSpPr>
-          <p:cNvPr id="82" name="" descr="{&quot;isTemplate&quot;:true,&quot;type&quot;:&quot;text&quot;}"/>
+              <a:t>有人说它伧气</a:t>
+            </a:r>
+            <a:endParaRPr/>
+          </a:p>
+        </p:txBody>
+      </p:sp>
+      <p:sp>
+        <p:nvSpPr>
+          <p:cNvPr id="84" name="" descr="{&quot;isTemplate&quot;:true,&quot;type&quot;:&quot;text&quot;}"/>
           <p:cNvSpPr txBox="1"/>
           <p:nvPr/>
         </p:nvSpPr>
@@ -3434,21 +3504,21 @@
       </p:sp>
       <p:sp>
         <p:nvSpPr>
-          <p:cNvPr id="83" name=""/>
+          <p:cNvPr id="85" name=""/>
           <p:cNvSpPr/>
           <p:nvPr/>
         </p:nvSpPr>
         <p:spPr>
           <a:xfrm rot="0" flipH="0" flipV="0">
-            <a:off x="609600" y="1524000"/>
-            <a:ext cx="10972800" cy="1200150"/>
+            <a:off x="647700" y="2085975"/>
+            <a:ext cx="10972800" cy="933450"/>
           </a:xfrm>
           <a:prstGeom prst="rect">
             <a:avLst/>
           </a:prstGeom>
           <a:solidFill>
             <a:srgbClr val="1F3A34">
-              <a:alpha val="5000"/>
+              <a:alpha val="6000"/>
             </a:srgbClr>
           </a:solidFill>
           <a:ln/>
@@ -3460,61 +3530,99 @@
       </p:sp>
       <p:sp>
         <p:nvSpPr>
-          <p:cNvPr id="84" name="" descr="{&quot;isTemplate&quot;:true,&quot;type&quot;:&quot;text&quot;}"/>
-          <p:cNvSpPr txBox="1"/>
-          <p:nvPr/>
-        </p:nvSpPr>
-        <p:spPr>
-          <a:xfrm rot="0" flipH="0" flipV="0">
-            <a:off x="990600" y="1752600"/>
-            <a:ext cx="10210800" cy="742950"/>
-          </a:xfrm>
-          <a:prstGeom prst="rect"/>
-        </p:spPr>
-        <p:txBody>
-          <a:bodyPr wrap="none" lIns="0" tIns="0" rIns="0" bIns="0"/>
-          <a:p>
-            <a:pPr>
-              <a:lnSpc>
-                <a:spcPct val="190000"/>
-              </a:lnSpc>
-            </a:pPr>
-            <a:r>
-              <a:rPr lang="zh-CN" sz="2550">
+          <p:cNvPr id="86" name=""/>
+          <p:cNvSpPr/>
+          <p:nvPr/>
+        </p:nvSpPr>
+        <p:spPr>
+          <a:xfrm rot="0" flipH="0" flipV="0">
+            <a:off x="609600" y="2085975"/>
+            <a:ext cx="11010900" cy="933450"/>
+          </a:xfrm>
+          <a:custGeom>
+            <a:pathLst>
+              <a:path w="1156" h="98">
+                <a:moveTo>
+                  <a:pt x="0" y="0"/>
+                </a:moveTo>
+                <a:lnTo>
+                  <a:pt x="4" y="0"/>
+                </a:lnTo>
+                <a:lnTo>
+                  <a:pt x="4" y="98"/>
+                </a:lnTo>
+                <a:lnTo>
+                  <a:pt x="0" y="98"/>
+                </a:lnTo>
+                <a:close/>
+              </a:path>
+            </a:pathLst>
+          </a:custGeom>
+          <a:solidFill>
+            <a:srgbClr val="1F3A34"/>
+          </a:solidFill>
+          <a:ln/>
+        </p:spPr>
+        <p:txBody>
+          <a:bodyPr/>
+          <a:p/>
+        </p:txBody>
+      </p:sp>
+      <p:sp>
+        <p:nvSpPr>
+          <p:cNvPr id="87" name="" descr="{&quot;isTemplate&quot;:true,&quot;type&quot;:&quot;text&quot;}"/>
+          <p:cNvSpPr txBox="1"/>
+          <p:nvPr/>
+        </p:nvSpPr>
+        <p:spPr>
+          <a:xfrm rot="0" flipH="0" flipV="0">
+            <a:off x="914400" y="2295525"/>
+            <a:ext cx="10401300" cy="514350"/>
+          </a:xfrm>
+          <a:prstGeom prst="rect"/>
+        </p:spPr>
+        <p:txBody>
+          <a:bodyPr wrap="none" lIns="0" tIns="0" rIns="0" bIns="0"/>
+          <a:p>
+            <a:pPr>
+              <a:lnSpc>
+                <a:spcPct val="170000"/>
+              </a:lnSpc>
+            </a:pPr>
+            <a:r>
+              <a:rPr lang="zh-CN" sz="1950">
                 <a:solidFill>
                   <a:srgbClr val="1F3A34"/>
                 </a:solidFill>
                 <a:latin typeface="宋体"/>
                 <a:ea typeface="宋体"/>
               </a:rPr>
-              <a:t>这次第，怎一个愁字了得！</a:t>
-            </a:r>
-            <a:endParaRPr/>
-          </a:p>
-        </p:txBody>
-      </p:sp>
-      <p:sp>
-        <p:nvSpPr>
-          <p:cNvPr id="85" name=""/>
+              <a:t>许昂霄：此词颇带伧气，而昔人极口称之，殆不可解。</a:t>
+            </a:r>
+            <a:endParaRPr/>
+          </a:p>
+        </p:txBody>
+      </p:sp>
+      <p:sp>
+        <p:nvSpPr>
+          <p:cNvPr id="88" name=""/>
           <p:cNvSpPr/>
           <p:nvPr/>
         </p:nvSpPr>
         <p:spPr>
           <a:xfrm rot="0" flipH="0" flipV="0">
-            <a:off x="609600" y="2990850"/>
-            <a:ext cx="5372100" cy="1714500"/>
+            <a:off x="647700" y="3190875"/>
+            <a:ext cx="10972800" cy="933450"/>
           </a:xfrm>
           <a:prstGeom prst="rect">
             <a:avLst/>
           </a:prstGeom>
-          <a:ln w="12700">
-            <a:solidFill>
-              <a:srgbClr val="1F3A34">
-                <a:alpha val="35000"/>
-              </a:srgbClr>
-            </a:solidFill>
-            <a:prstDash val="solid"/>
-          </a:ln>
+          <a:solidFill>
+            <a:srgbClr val="1F3A34">
+              <a:alpha val="6000"/>
+            </a:srgbClr>
+          </a:solidFill>
+          <a:ln/>
         </p:spPr>
         <p:txBody>
           <a:bodyPr/>
@@ -3523,116 +3631,38 @@
       </p:sp>
       <p:sp>
         <p:nvSpPr>
-          <p:cNvPr id="86" name="" descr="{&quot;isTemplate&quot;:true,&quot;type&quot;:&quot;text&quot;}"/>
-          <p:cNvSpPr txBox="1"/>
-          <p:nvPr/>
-        </p:nvSpPr>
-        <p:spPr>
-          <a:xfrm rot="0" flipH="0" flipV="0">
-            <a:off x="838200" y="3495675"/>
-            <a:ext cx="4914900" cy="323850"/>
-          </a:xfrm>
-          <a:prstGeom prst="rect"/>
-        </p:spPr>
-        <p:txBody>
-          <a:bodyPr wrap="none" lIns="0" tIns="0" rIns="0" bIns="0"/>
-          <a:p>
-            <a:pPr>
-              <a:lnSpc>
-                <a:spcPct val="100000"/>
-              </a:lnSpc>
-            </a:pPr>
-            <a:r>
-              <a:rPr lang="zh-CN" sz="2100" b="1">
-                <a:solidFill>
-                  <a:srgbClr val="1F3A34"/>
-                </a:solidFill>
-                <a:latin typeface="宋体"/>
-                <a:ea typeface="宋体"/>
-              </a:rPr>
-              <a:t>读法</a:t>
-            </a:r>
-            <a:r>
-              <a:rPr lang="en-US" sz="2100" b="1">
-                <a:solidFill>
-                  <a:srgbClr val="1F3A34"/>
-                </a:solidFill>
-                <a:latin typeface="宋体"/>
-                <a:ea typeface="宋体"/>
-              </a:rPr>
-              <a:t xml:space="preserve"> A</a:t>
-            </a:r>
-            <a:r>
-              <a:rPr lang="zh-CN" sz="2100" b="1">
-                <a:solidFill>
-                  <a:srgbClr val="1F3A34"/>
-                </a:solidFill>
-                <a:latin typeface="宋体"/>
-                <a:ea typeface="宋体"/>
-              </a:rPr>
-              <a:t>：拖长</a:t>
-            </a:r>
-            <a:endParaRPr/>
-          </a:p>
-        </p:txBody>
-      </p:sp>
-      <p:sp>
-        <p:nvSpPr>
-          <p:cNvPr id="87" name="" descr="{&quot;isTemplate&quot;:true,&quot;type&quot;:&quot;text&quot;}"/>
-          <p:cNvSpPr txBox="1"/>
-          <p:nvPr/>
-        </p:nvSpPr>
-        <p:spPr>
-          <a:xfrm rot="0" flipH="0" flipV="0">
-            <a:off x="838200" y="3933825"/>
-            <a:ext cx="4914900" cy="276225"/>
-          </a:xfrm>
-          <a:prstGeom prst="rect"/>
-        </p:spPr>
-        <p:txBody>
-          <a:bodyPr wrap="none" lIns="0" tIns="0" rIns="0" bIns="0"/>
-          <a:p>
-            <a:pPr>
-              <a:lnSpc>
-                <a:spcPct val="100000"/>
-              </a:lnSpc>
-            </a:pPr>
-            <a:r>
-              <a:rPr lang="zh-CN" sz="1800">
-                <a:solidFill>
-                  <a:srgbClr val="6B6B6B"/>
-                </a:solidFill>
-                <a:latin typeface="宋体"/>
-                <a:ea typeface="宋体"/>
-              </a:rPr>
-              <a:t>把“了得”放开，声音散出去</a:t>
-            </a:r>
-            <a:endParaRPr/>
-          </a:p>
-        </p:txBody>
-      </p:sp>
-      <p:sp>
-        <p:nvSpPr>
-          <p:cNvPr id="88" name=""/>
+          <p:cNvPr id="89" name=""/>
           <p:cNvSpPr/>
           <p:nvPr/>
         </p:nvSpPr>
         <p:spPr>
           <a:xfrm rot="0" flipH="0" flipV="0">
-            <a:off x="6210300" y="2990850"/>
-            <a:ext cx="5372100" cy="1714500"/>
-          </a:xfrm>
-          <a:prstGeom prst="rect">
-            <a:avLst/>
-          </a:prstGeom>
-          <a:ln w="12700">
-            <a:solidFill>
-              <a:srgbClr val="B4552D">
-                <a:alpha val="50000"/>
-              </a:srgbClr>
-            </a:solidFill>
-            <a:prstDash val="solid"/>
-          </a:ln>
+            <a:off x="609600" y="3190875"/>
+            <a:ext cx="11010900" cy="933450"/>
+          </a:xfrm>
+          <a:custGeom>
+            <a:pathLst>
+              <a:path w="1156" h="98">
+                <a:moveTo>
+                  <a:pt x="0" y="0"/>
+                </a:moveTo>
+                <a:lnTo>
+                  <a:pt x="4" y="0"/>
+                </a:lnTo>
+                <a:lnTo>
+                  <a:pt x="4" y="98"/>
+                </a:lnTo>
+                <a:lnTo>
+                  <a:pt x="0" y="98"/>
+                </a:lnTo>
+                <a:close/>
+              </a:path>
+            </a:pathLst>
+          </a:custGeom>
+          <a:solidFill>
+            <a:srgbClr val="1F3A34"/>
+          </a:solidFill>
+          <a:ln/>
         </p:spPr>
         <p:txBody>
           <a:bodyPr/>
@@ -3641,14 +3671,89 @@
       </p:sp>
       <p:sp>
         <p:nvSpPr>
-          <p:cNvPr id="89" name="" descr="{&quot;isTemplate&quot;:true,&quot;type&quot;:&quot;text&quot;}"/>
-          <p:cNvSpPr txBox="1"/>
-          <p:nvPr/>
-        </p:nvSpPr>
-        <p:spPr>
-          <a:xfrm rot="0" flipH="0" flipV="0">
-            <a:off x="6438900" y="3495675"/>
-            <a:ext cx="4914900" cy="323850"/>
+          <p:cNvPr id="90" name="" descr="{&quot;isTemplate&quot;:true,&quot;type&quot;:&quot;text&quot;}"/>
+          <p:cNvSpPr txBox="1"/>
+          <p:nvPr/>
+        </p:nvSpPr>
+        <p:spPr>
+          <a:xfrm rot="0" flipH="0" flipV="0">
+            <a:off x="914400" y="3400425"/>
+            <a:ext cx="10401300" cy="514350"/>
+          </a:xfrm>
+          <a:prstGeom prst="rect"/>
+        </p:spPr>
+        <p:txBody>
+          <a:bodyPr wrap="none" lIns="0" tIns="0" rIns="0" bIns="0"/>
+          <a:p>
+            <a:pPr>
+              <a:lnSpc>
+                <a:spcPct val="170000"/>
+              </a:lnSpc>
+            </a:pPr>
+            <a:r>
+              <a:rPr lang="zh-CN" sz="1950">
+                <a:solidFill>
+                  <a:srgbClr val="1F3A34"/>
+                </a:solidFill>
+                <a:latin typeface="宋体"/>
+                <a:ea typeface="宋体"/>
+              </a:rPr>
+              <a:t>陈廷焯：此不过奇笔耳，并非高调。</a:t>
+            </a:r>
+            <a:endParaRPr/>
+          </a:p>
+        </p:txBody>
+      </p:sp>
+      <p:sp>
+        <p:nvSpPr>
+          <p:cNvPr id="91" name=""/>
+          <p:cNvSpPr/>
+          <p:nvPr/>
+        </p:nvSpPr>
+        <p:spPr>
+          <a:xfrm rot="0" flipH="0" flipV="0">
+            <a:off x="609600" y="4391025"/>
+            <a:ext cx="11010900" cy="695325"/>
+          </a:xfrm>
+          <a:custGeom>
+            <a:pathLst>
+              <a:path w="1156" h="73">
+                <a:moveTo>
+                  <a:pt x="0" y="0"/>
+                </a:moveTo>
+                <a:lnTo>
+                  <a:pt x="4" y="0"/>
+                </a:lnTo>
+                <a:lnTo>
+                  <a:pt x="4" y="73"/>
+                </a:lnTo>
+                <a:lnTo>
+                  <a:pt x="0" y="73"/>
+                </a:lnTo>
+                <a:close/>
+              </a:path>
+            </a:pathLst>
+          </a:custGeom>
+          <a:solidFill>
+            <a:srgbClr val="B4552D"/>
+          </a:solidFill>
+          <a:ln/>
+        </p:spPr>
+        <p:txBody>
+          <a:bodyPr/>
+          <a:p/>
+        </p:txBody>
+      </p:sp>
+      <p:sp>
+        <p:nvSpPr>
+          <p:cNvPr id="92" name="" descr="{&quot;isTemplate&quot;:true,&quot;type&quot;:&quot;text&quot;}"/>
+          <p:cNvSpPr txBox="1"/>
+          <p:nvPr/>
+        </p:nvSpPr>
+        <p:spPr>
+          <a:xfrm rot="0" flipH="0" flipV="0">
+            <a:off x="876300" y="4391025"/>
+            <a:ext cx="10706100" cy="323850"/>
           </a:xfrm>
           <a:prstGeom prst="rect"/>
         </p:spPr>
@@ -3668,42 +3773,22 @@
                 <a:latin typeface="宋体"/>
                 <a:ea typeface="宋体"/>
               </a:rPr>
-              <a:t>读法</a:t>
-            </a:r>
-            <a:r>
-              <a:rPr lang="en-US" sz="2100" b="1">
-                <a:solidFill>
-                  <a:srgbClr val="B4552D"/>
-                </a:solidFill>
-                <a:latin typeface="宋体"/>
-                <a:ea typeface="宋体"/>
-              </a:rPr>
-              <a:t xml:space="preserve"> B</a:t>
-            </a:r>
-            <a:r>
-              <a:rPr lang="zh-CN" sz="2100" b="1">
-                <a:solidFill>
-                  <a:srgbClr val="B4552D"/>
-                </a:solidFill>
-                <a:latin typeface="宋体"/>
-                <a:ea typeface="宋体"/>
-              </a:rPr>
-              <a:t>：收住</a:t>
-            </a:r>
-            <a:endParaRPr/>
-          </a:p>
-        </p:txBody>
-      </p:sp>
-      <p:sp>
-        <p:nvSpPr>
-          <p:cNvPr id="90" name="" descr="{&quot;isTemplate&quot;:true,&quot;type&quot;:&quot;text&quot;}"/>
-          <p:cNvSpPr txBox="1"/>
-          <p:nvPr/>
-        </p:nvSpPr>
-        <p:spPr>
-          <a:xfrm rot="0" flipH="0" flipV="0">
-            <a:off x="6438900" y="3933825"/>
-            <a:ext cx="4914900" cy="276225"/>
+              <a:t>你同意吗？举一句词为证。</a:t>
+            </a:r>
+            <a:endParaRPr/>
+          </a:p>
+        </p:txBody>
+      </p:sp>
+      <p:sp>
+        <p:nvSpPr>
+          <p:cNvPr id="93" name="" descr="{&quot;isTemplate&quot;:true,&quot;type&quot;:&quot;text&quot;}"/>
+          <p:cNvSpPr txBox="1"/>
+          <p:nvPr/>
+        </p:nvSpPr>
+        <p:spPr>
+          <a:xfrm rot="0" flipH="0" flipV="0">
+            <a:off x="876300" y="4810125"/>
+            <a:ext cx="10706100" cy="276225"/>
           </a:xfrm>
           <a:prstGeom prst="rect"/>
         </p:spPr>
@@ -3723,50 +3808,15 @@
                 <a:latin typeface="宋体"/>
                 <a:ea typeface="宋体"/>
               </a:rPr>
-              <a:t>把“得”压实，声音咽回去</a:t>
-            </a:r>
-            <a:endParaRPr/>
-          </a:p>
-        </p:txBody>
-      </p:sp>
-      <p:sp>
-        <p:nvSpPr>
-          <p:cNvPr id="91" name="" descr="{&quot;isTemplate&quot;:true,&quot;type&quot;:&quot;text&quot;}"/>
-          <p:cNvSpPr txBox="1"/>
-          <p:nvPr/>
-        </p:nvSpPr>
-        <p:spPr>
-          <a:xfrm rot="0" flipH="0" flipV="0">
-            <a:off x="609600" y="4933950"/>
-            <a:ext cx="10972800" cy="323850"/>
-          </a:xfrm>
-          <a:prstGeom prst="rect"/>
-        </p:spPr>
-        <p:txBody>
-          <a:bodyPr wrap="none" lIns="0" tIns="0" rIns="0" bIns="0"/>
-          <a:p>
-            <a:pPr>
-              <a:lnSpc>
-                <a:spcPct val="100000"/>
-              </a:lnSpc>
-            </a:pPr>
-            <a:r>
-              <a:rPr lang="zh-CN" sz="2100">
-                <a:solidFill>
-                  <a:srgbClr val="1F3A34"/>
-                </a:solidFill>
-                <a:latin typeface="宋体"/>
-                <a:ea typeface="宋体"/>
-              </a:rPr>
-              <a:t>选一种，说一句“为什么”。</a:t>
-            </a:r>
-            <a:endParaRPr/>
-          </a:p>
-        </p:txBody>
-      </p:sp>
-      <p:sp>
-        <p:nvSpPr>
-          <p:cNvPr id="92" name=""/>
+              <a:t>不举词句的表态，同意与不同意都不算。</a:t>
+            </a:r>
+            <a:endParaRPr/>
+          </a:p>
+        </p:txBody>
+      </p:sp>
+      <p:sp>
+        <p:nvSpPr>
+          <p:cNvPr id="94" name=""/>
           <p:cNvSpPr/>
           <p:nvPr/>
         </p:nvSpPr>
@@ -3808,7 +3858,7 @@
       </p:sp>
       <p:sp>
         <p:nvSpPr>
-          <p:cNvPr id="93" name="" descr="{&quot;isTemplate&quot;:true,&quot;type&quot;:&quot;text&quot;}"/>
+          <p:cNvPr id="95" name="" descr="{&quot;isTemplate&quot;:true,&quot;type&quot;:&quot;text&quot;}"/>
           <p:cNvSpPr txBox="1"/>
           <p:nvPr/>
         </p:nvSpPr>
@@ -3863,7 +3913,7 @@
       </p:sp>
       <p:sp>
         <p:nvSpPr>
-          <p:cNvPr id="94" name="" descr="{&quot;isTemplate&quot;:true,&quot;type&quot;:&quot;text&quot;}"/>
+          <p:cNvPr id="96" name="" descr="{&quot;isTemplate&quot;:true,&quot;type&quot;:&quot;text&quot;}"/>
           <p:cNvSpPr txBox="1"/>
           <p:nvPr/>
         </p:nvSpPr>
@@ -3906,7 +3956,7 @@
   <p:cSld>
     <p:spTree>
       <p:nvGrpSpPr>
-        <p:cNvPr id="95" name="" descr="&lt;Slide style={{ background: '#F5F1E6', padding: '48px 64px', fontFamily: '宋体' }}&gt;&#13;&#10;  &lt;Box style={{ flexDirection: 'row', justifyContent: 'space-between', alignItems: 'flex-end', height: 72 }}&gt;&#13;&#10;    &lt;Text style={{ fontSize: 40, fontWeight: 'bold', color: '#1F3A34', lineHeight: 1.2 }}&gt;板书：三次生长&lt;/Text&gt;&#13;&#10;    &lt;Text style={{ fontSize: 24, color: '#6B6B6B' }}&gt;环节六 · 小结&lt;/Text&gt;&#13;&#10;  &lt;/Box&gt;&#13;&#10;  &lt;Box style={{ height: 472, marginTop: 20, flexDirection: 'column' }}&gt;&#13;&#10;  &lt;Box style={{ height: 472, flexDirection: 'column', justifyContent: 'center', gap: 16 }}&gt;&#13;&#10;    &lt;Box style={{ flexDirection: 'row', gap: 16, height: 130 }}&gt;&#13;&#10;      &lt;Box style={{ flex: 1, background: 'rgba(31,58,52,0.06)', padding: 20 }}&gt;&#13;&#10;        &lt;Text style={{ fontSize: 24, color: '#6B6B6B' }}&gt;第一层&lt;/Text&gt;&#13;&#10;        &lt;Text style={{ fontSize: 28, color: '#1F3A34', marginTop: 6 }}&gt;找 → 找不到 → 连自己也没找回来&lt;/Text&gt;&#13;&#10;      &lt;/Box&gt;&#13;&#10;    &lt;/Box&gt;&#13;&#10;    &lt;Box style={{ flexDirection: 'row', gap: 16, height: 130 }}&gt;&#13;&#10;      &lt;Box style={{ flex: 1, background: 'rgba(31,58,52,0.07)', padding: 20 }}&gt;&#13;&#10;        &lt;Text style={{ fontSize: 24, color: '#6B6B6B' }}&gt;第二层 · 旧时&lt;/Text&gt;&#13;&#10;        &lt;Text style={{ fontSize: 28, color: '#1F3A34', marginTop: 6 }}&gt;淡酒 · 过雁（旧时相识）&lt;/Text&gt;&#13;&#10;      &lt;/Box&gt;&#13;&#10;      &lt;Box style={{ flex: 1, background: 'rgba(180,85,45,0.10)', padding: 20 }}&gt;&#13;&#10;        &lt;Text style={{ fontSize: 24, color: '#6B6B6B' }}&gt;第二层 · 如今&lt;/Text&gt;&#13;&#10;        &lt;Text style={{ fontSize: 28, color: '#1F3A34', marginTop: 6 }}&gt;黄花（有谁堪摘）· 梧桐 · 细雨&lt;/Text&gt;&#13;&#10;      &lt;/Box&gt;&#13;&#10;    &lt;/Box&gt;&#13;&#10;    &lt;Box style={{ height: 130, background: 'rgba(31,58,52,0.10)', justifyContent: 'center', paddingLeft: 20 }}&gt;&#13;&#10;      &lt;Text style={{ fontSize: 34, fontWeight: 'bold', color: '#B4552D' }}&gt;怎一个愁字了得&lt;/Text&gt;&#13;&#10;      &lt;Text style={{ fontSize: 24, color: '#1F3A34', marginTop: 6 }}&gt;不是说不出来，是九十七个字也说不完&lt;/Text&gt;&#13;&#10;    &lt;/Box&gt;&#13;&#10;  &lt;/Box&gt;&#13;&#10;  &lt;/Box&gt;&#13;&#10;  &lt;Box style={{ height: 40, marginTop: 12, borderTop: '1px solid rgba(31,58,52,0.2)', flexDirection: 'row', justifyContent: 'space-between', alignItems: 'center', paddingTop: 8 }}&gt;&#13;&#10;    &lt;Text style={{ fontSize: 24, color: '#6B6B6B' }}&gt;《声声慢》· 李清照&lt;/Text&gt;&#13;&#10;    &lt;Text style={{ fontSize: 24, color: '#B4552D' }}&gt;15/16&lt;/Text&gt;&#13;&#10;  &lt;/Box&gt;&#13;&#10;&lt;/Slide&gt;"/>
+        <p:cNvPr id="97" name="" descr="&lt;Slide style={{ background: '#F5F1E6', padding: '48px 64px', fontFamily: '宋体' }}&gt;&#13;&#10;  &lt;Box style={{ flexDirection: 'row', justifyContent: 'space-between', alignItems: 'flex-end', height: 72 }}&gt;&#13;&#10;    &lt;Text style={{ fontSize: 40, fontWeight: 'bold', color: '#1F3A34', lineHeight: 1.2 }}&gt;板书：三次生长&lt;/Text&gt;&#13;&#10;    &lt;Text style={{ fontSize: 24, color: '#6B6B6B' }}&gt;环节六 · 小结&lt;/Text&gt;&#13;&#10;  &lt;/Box&gt;&#13;&#10;  &lt;Box style={{ height: 472, marginTop: 20, flexDirection: 'column' }}&gt;&#13;&#10;  &lt;Box style={{ height: 472, flexDirection: 'column', justifyContent: 'center', gap: 16 }}&gt;&#13;&#10;    &lt;Box style={{ flexDirection: 'row', gap: 16, height: 130 }}&gt;&#13;&#10;      &lt;Box style={{ flex: 1, background: 'rgba(31,58,52,0.06)', padding: 20 }}&gt;&#13;&#10;        &lt;Text style={{ fontSize: 24, color: '#6B6B6B' }}&gt;一 · 由外入内&lt;/Text&gt;&#13;&#10;        &lt;Text style={{ fontSize: 26, color: '#1F3A34', marginTop: 6 }}&gt;冷冷（外）→ 清清（内）→ 戚戚（肠痛心碎）&lt;/Text&gt;&#13;&#10;      &lt;/Box&gt;&#13;&#10;    &lt;/Box&gt;&#13;&#10;    &lt;Box style={{ flexDirection: 'row', gap: 16, height: 130 }}&gt;&#13;&#10;      &lt;Box style={{ flex: 1, background: 'rgba(31,58,52,0.07)', padding: 20 }}&gt;&#13;&#10;        &lt;Text style={{ fontSize: 24, color: '#6B6B6B' }}&gt;二 · 传统的词&lt;/Text&gt;&#13;&#10;        &lt;Text style={{ fontSize: 26, color: '#1F3A34', marginTop: 6 }}&gt;雁 · 梧桐 · 黄花 → 转向如今&lt;/Text&gt;&#13;&#10;      &lt;/Box&gt;&#13;&#10;      &lt;Box style={{ flex: 1, background: 'rgba(180,85,45,0.10)', padding: 20 }}&gt;&#13;&#10;        &lt;Text style={{ fontSize: 24, color: '#6B6B6B' }}&gt;三 · 末句&lt;/Text&gt;&#13;&#10;        &lt;Text style={{ fontSize: 26, color: '#1F3A34', marginTop: 6 }}&gt;入声收住；有人说它伧气&lt;/Text&gt;&#13;&#10;      &lt;/Box&gt;&#13;&#10;    &lt;/Box&gt;&#13;&#10;    &lt;Box style={{ height: 90, background: 'rgba(31,58,52,0.10)', justifyContent: 'center', paddingLeft: 20 }}&gt;&#13;&#10;      &lt;Text style={{ fontSize: 30, fontWeight: 'bold', color: '#B4552D' }}&gt;怎一个愁字了得&lt;/Text&gt;&#13;&#10;    &lt;/Box&gt;&#13;&#10;  &lt;/Box&gt;&#13;&#10;  &lt;/Box&gt;&#13;&#10;  &lt;Box style={{ height: 40, marginTop: 12, borderTop: '1px solid rgba(31,58,52,0.2)', flexDirection: 'row', justifyContent: 'space-between', alignItems: 'center', paddingTop: 8 }}&gt;&#13;&#10;    &lt;Text style={{ fontSize: 24, color: '#6B6B6B' }}&gt;《声声慢》· 李清照&lt;/Text&gt;&#13;&#10;    &lt;Text style={{ fontSize: 24, color: '#B4552D' }}&gt;15/16&lt;/Text&gt;&#13;&#10;  &lt;/Box&gt;&#13;&#10;&lt;/Slide&gt;"/>
         <p:cNvGrpSpPr/>
         <p:nvPr/>
       </p:nvGrpSpPr>
@@ -3920,7 +3970,7 @@
       </p:grpSpPr>
       <p:sp>
         <p:nvSpPr>
-          <p:cNvPr id="96" name=""/>
+          <p:cNvPr id="98" name=""/>
           <p:cNvSpPr/>
           <p:nvPr/>
         </p:nvSpPr>
@@ -3944,7 +3994,7 @@
       </p:sp>
       <p:sp>
         <p:nvSpPr>
-          <p:cNvPr id="97" name="" descr="{&quot;isTemplate&quot;:true,&quot;type&quot;:&quot;text&quot;}"/>
+          <p:cNvPr id="99" name="" descr="{&quot;isTemplate&quot;:true,&quot;type&quot;:&quot;text&quot;}"/>
           <p:cNvSpPr txBox="1"/>
           <p:nvPr/>
         </p:nvSpPr>
@@ -3979,7 +4029,7 @@
       </p:sp>
       <p:sp>
         <p:nvSpPr>
-          <p:cNvPr id="98" name="" descr="{&quot;isTemplate&quot;:true,&quot;type&quot;:&quot;text&quot;}"/>
+          <p:cNvPr id="100" name="" descr="{&quot;isTemplate&quot;:true,&quot;type&quot;:&quot;text&quot;}"/>
           <p:cNvSpPr txBox="1"/>
           <p:nvPr/>
         </p:nvSpPr>
@@ -4034,13 +4084,13 @@
       </p:sp>
       <p:sp>
         <p:nvSpPr>
-          <p:cNvPr id="99" name=""/>
+          <p:cNvPr id="101" name=""/>
           <p:cNvSpPr/>
           <p:nvPr/>
         </p:nvSpPr>
         <p:spPr>
           <a:xfrm rot="0" flipH="0" flipV="0">
-            <a:off x="609600" y="1571625"/>
+            <a:off x="609600" y="1762125"/>
             <a:ext cx="10972800" cy="1238250"/>
           </a:xfrm>
           <a:prstGeom prst="rect">
@@ -4060,13 +4110,13 @@
       </p:sp>
       <p:sp>
         <p:nvSpPr>
-          <p:cNvPr id="100" name="" descr="{&quot;isTemplate&quot;:true,&quot;type&quot;:&quot;text&quot;}"/>
-          <p:cNvSpPr txBox="1"/>
-          <p:nvPr/>
-        </p:nvSpPr>
-        <p:spPr>
-          <a:xfrm rot="0" flipH="0" flipV="0">
-            <a:off x="800100" y="1762125"/>
+          <p:cNvPr id="102" name="" descr="{&quot;isTemplate&quot;:true,&quot;type&quot;:&quot;text&quot;}"/>
+          <p:cNvSpPr txBox="1"/>
+          <p:nvPr/>
+        </p:nvSpPr>
+        <p:spPr>
+          <a:xfrm rot="0" flipH="0" flipV="0">
+            <a:off x="800100" y="1952625"/>
             <a:ext cx="10591800" cy="276225"/>
           </a:xfrm>
           <a:prstGeom prst="rect"/>
@@ -4087,96 +4137,116 @@
                 <a:latin typeface="宋体"/>
                 <a:ea typeface="宋体"/>
               </a:rPr>
-              <a:t>第一层</a:t>
-            </a:r>
-            <a:endParaRPr/>
-          </a:p>
-        </p:txBody>
-      </p:sp>
-      <p:sp>
-        <p:nvSpPr>
-          <p:cNvPr id="101" name="" descr="{&quot;isTemplate&quot;:true,&quot;type&quot;:&quot;text&quot;}"/>
-          <p:cNvSpPr txBox="1"/>
-          <p:nvPr/>
-        </p:nvSpPr>
-        <p:spPr>
-          <a:xfrm rot="0" flipH="0" flipV="0">
-            <a:off x="800100" y="2095500"/>
-            <a:ext cx="10591800" cy="323850"/>
-          </a:xfrm>
-          <a:prstGeom prst="rect"/>
-        </p:spPr>
-        <p:txBody>
-          <a:bodyPr wrap="none" lIns="0" tIns="0" rIns="0" bIns="0"/>
-          <a:p>
-            <a:pPr>
-              <a:lnSpc>
-                <a:spcPct val="100000"/>
-              </a:lnSpc>
-            </a:pPr>
-            <a:r>
-              <a:rPr lang="zh-CN" sz="2100">
+              <a:t>一</a:t>
+            </a:r>
+            <a:r>
+              <a:rPr lang="en-US" sz="1800">
+                <a:solidFill>
+                  <a:srgbClr val="6B6B6B"/>
+                </a:solidFill>
+                <a:latin typeface="宋体"/>
+                <a:ea typeface="宋体"/>
+              </a:rPr>
+              <a:t xml:space="preserve"> · </a:t>
+            </a:r>
+            <a:r>
+              <a:rPr lang="zh-CN" sz="1800">
+                <a:solidFill>
+                  <a:srgbClr val="6B6B6B"/>
+                </a:solidFill>
+                <a:latin typeface="宋体"/>
+                <a:ea typeface="宋体"/>
+              </a:rPr>
+              <a:t>由外入内</a:t>
+            </a:r>
+            <a:endParaRPr/>
+          </a:p>
+        </p:txBody>
+      </p:sp>
+      <p:sp>
+        <p:nvSpPr>
+          <p:cNvPr id="103" name="" descr="{&quot;isTemplate&quot;:true,&quot;type&quot;:&quot;text&quot;}"/>
+          <p:cNvSpPr txBox="1"/>
+          <p:nvPr/>
+        </p:nvSpPr>
+        <p:spPr>
+          <a:xfrm rot="0" flipH="0" flipV="0">
+            <a:off x="800100" y="2286000"/>
+            <a:ext cx="10591800" cy="304800"/>
+          </a:xfrm>
+          <a:prstGeom prst="rect"/>
+        </p:spPr>
+        <p:txBody>
+          <a:bodyPr wrap="none" lIns="0" tIns="0" rIns="0" bIns="0"/>
+          <a:p>
+            <a:pPr>
+              <a:lnSpc>
+                <a:spcPct val="100000"/>
+              </a:lnSpc>
+            </a:pPr>
+            <a:r>
+              <a:rPr lang="zh-CN" sz="1950">
                 <a:solidFill>
                   <a:srgbClr val="1F3A34"/>
                 </a:solidFill>
                 <a:latin typeface="宋体"/>
                 <a:ea typeface="宋体"/>
               </a:rPr>
-              <a:t>找</a:t>
-            </a:r>
-            <a:r>
-              <a:rPr lang="en-US" sz="2100">
+              <a:t>冷冷（外）→</a:t>
+            </a:r>
+            <a:r>
+              <a:rPr lang="en-US" sz="1950">
                 <a:solidFill>
                   <a:srgbClr val="1F3A34"/>
                 </a:solidFill>
                 <a:latin typeface="宋体"/>
                 <a:ea typeface="宋体"/>
               </a:rPr>
-              <a:t xml:space="preserve"> → </a:t>
-            </a:r>
-            <a:r>
-              <a:rPr lang="zh-CN" sz="2100">
+              <a:t xml:space="preserve"> </a:t>
+            </a:r>
+            <a:r>
+              <a:rPr lang="zh-CN" sz="1950">
                 <a:solidFill>
                   <a:srgbClr val="1F3A34"/>
                 </a:solidFill>
                 <a:latin typeface="宋体"/>
                 <a:ea typeface="宋体"/>
               </a:rPr>
-              <a:t>找不到</a:t>
-            </a:r>
-            <a:r>
-              <a:rPr lang="en-US" sz="2100">
+              <a:t>清清（内）→</a:t>
+            </a:r>
+            <a:r>
+              <a:rPr lang="en-US" sz="1950">
                 <a:solidFill>
                   <a:srgbClr val="1F3A34"/>
                 </a:solidFill>
                 <a:latin typeface="宋体"/>
                 <a:ea typeface="宋体"/>
               </a:rPr>
-              <a:t xml:space="preserve"> → </a:t>
-            </a:r>
-            <a:r>
-              <a:rPr lang="zh-CN" sz="2100">
+              <a:t xml:space="preserve"> </a:t>
+            </a:r>
+            <a:r>
+              <a:rPr lang="zh-CN" sz="1950">
                 <a:solidFill>
                   <a:srgbClr val="1F3A34"/>
                 </a:solidFill>
                 <a:latin typeface="宋体"/>
                 <a:ea typeface="宋体"/>
               </a:rPr>
-              <a:t>连自己也没找回来</a:t>
-            </a:r>
-            <a:endParaRPr/>
-          </a:p>
-        </p:txBody>
-      </p:sp>
-      <p:sp>
-        <p:nvSpPr>
-          <p:cNvPr id="102" name=""/>
+              <a:t>戚戚（肠痛心碎）</a:t>
+            </a:r>
+            <a:endParaRPr/>
+          </a:p>
+        </p:txBody>
+      </p:sp>
+      <p:sp>
+        <p:nvSpPr>
+          <p:cNvPr id="104" name=""/>
           <p:cNvSpPr/>
           <p:nvPr/>
         </p:nvSpPr>
         <p:spPr>
           <a:xfrm rot="0" flipH="0" flipV="0">
-            <a:off x="609600" y="2962275"/>
+            <a:off x="609600" y="3152775"/>
             <a:ext cx="5410200" cy="1238250"/>
           </a:xfrm>
           <a:prstGeom prst="rect">
@@ -4196,13 +4266,13 @@
       </p:sp>
       <p:sp>
         <p:nvSpPr>
-          <p:cNvPr id="103" name="" descr="{&quot;isTemplate&quot;:true,&quot;type&quot;:&quot;text&quot;}"/>
-          <p:cNvSpPr txBox="1"/>
-          <p:nvPr/>
-        </p:nvSpPr>
-        <p:spPr>
-          <a:xfrm rot="0" flipH="0" flipV="0">
-            <a:off x="800100" y="3152775"/>
+          <p:cNvPr id="105" name="" descr="{&quot;isTemplate&quot;:true,&quot;type&quot;:&quot;text&quot;}"/>
+          <p:cNvSpPr txBox="1"/>
+          <p:nvPr/>
+        </p:nvSpPr>
+        <p:spPr>
+          <a:xfrm rot="0" flipH="0" flipV="0">
+            <a:off x="800100" y="3343275"/>
             <a:ext cx="5029200" cy="276225"/>
           </a:xfrm>
           <a:prstGeom prst="rect"/>
@@ -4223,7 +4293,7 @@
                 <a:latin typeface="宋体"/>
                 <a:ea typeface="宋体"/>
               </a:rPr>
-              <a:t>第二层</a:t>
+              <a:t>二</a:t>
             </a:r>
             <a:r>
               <a:rPr lang="en-US" sz="1800">
@@ -4243,45 +4313,45 @@
                 <a:latin typeface="宋体"/>
                 <a:ea typeface="宋体"/>
               </a:rPr>
-              <a:t>旧时</a:t>
-            </a:r>
-            <a:endParaRPr/>
-          </a:p>
-        </p:txBody>
-      </p:sp>
-      <p:sp>
-        <p:nvSpPr>
-          <p:cNvPr id="104" name="" descr="{&quot;isTemplate&quot;:true,&quot;type&quot;:&quot;text&quot;}"/>
-          <p:cNvSpPr txBox="1"/>
-          <p:nvPr/>
-        </p:nvSpPr>
-        <p:spPr>
-          <a:xfrm rot="0" flipH="0" flipV="0">
-            <a:off x="800100" y="3486150"/>
-            <a:ext cx="5029200" cy="323850"/>
-          </a:xfrm>
-          <a:prstGeom prst="rect"/>
-        </p:spPr>
-        <p:txBody>
-          <a:bodyPr wrap="none" lIns="0" tIns="0" rIns="0" bIns="0"/>
-          <a:p>
-            <a:pPr>
-              <a:lnSpc>
-                <a:spcPct val="100000"/>
-              </a:lnSpc>
-            </a:pPr>
-            <a:r>
-              <a:rPr lang="zh-CN" sz="2100">
+              <a:t>传统的词</a:t>
+            </a:r>
+            <a:endParaRPr/>
+          </a:p>
+        </p:txBody>
+      </p:sp>
+      <p:sp>
+        <p:nvSpPr>
+          <p:cNvPr id="106" name="" descr="{&quot;isTemplate&quot;:true,&quot;type&quot;:&quot;text&quot;}"/>
+          <p:cNvSpPr txBox="1"/>
+          <p:nvPr/>
+        </p:nvSpPr>
+        <p:spPr>
+          <a:xfrm rot="0" flipH="0" flipV="0">
+            <a:off x="800100" y="3676650"/>
+            <a:ext cx="5029200" cy="304800"/>
+          </a:xfrm>
+          <a:prstGeom prst="rect"/>
+        </p:spPr>
+        <p:txBody>
+          <a:bodyPr wrap="none" lIns="0" tIns="0" rIns="0" bIns="0"/>
+          <a:p>
+            <a:pPr>
+              <a:lnSpc>
+                <a:spcPct val="100000"/>
+              </a:lnSpc>
+            </a:pPr>
+            <a:r>
+              <a:rPr lang="zh-CN" sz="1950">
                 <a:solidFill>
                   <a:srgbClr val="1F3A34"/>
                 </a:solidFill>
                 <a:latin typeface="宋体"/>
                 <a:ea typeface="宋体"/>
               </a:rPr>
-              <a:t>淡酒</a:t>
-            </a:r>
-            <a:r>
-              <a:rPr lang="en-US" sz="2100">
+              <a:t>雁</a:t>
+            </a:r>
+            <a:r>
+              <a:rPr lang="en-US" sz="1950">
                 <a:solidFill>
                   <a:srgbClr val="1F3A34"/>
                 </a:solidFill>
@@ -4291,28 +4361,68 @@
               <a:t xml:space="preserve"> · </a:t>
             </a:r>
             <a:r>
-              <a:rPr lang="zh-CN" sz="2100">
+              <a:rPr lang="zh-CN" sz="1950">
                 <a:solidFill>
                   <a:srgbClr val="1F3A34"/>
                 </a:solidFill>
                 <a:latin typeface="宋体"/>
                 <a:ea typeface="宋体"/>
               </a:rPr>
-              <a:t>过雁（旧时相识）</a:t>
-            </a:r>
-            <a:endParaRPr/>
-          </a:p>
-        </p:txBody>
-      </p:sp>
-      <p:sp>
-        <p:nvSpPr>
-          <p:cNvPr id="105" name=""/>
+              <a:t>梧桐</a:t>
+            </a:r>
+            <a:r>
+              <a:rPr lang="en-US" sz="1950">
+                <a:solidFill>
+                  <a:srgbClr val="1F3A34"/>
+                </a:solidFill>
+                <a:latin typeface="宋体"/>
+                <a:ea typeface="宋体"/>
+              </a:rPr>
+              <a:t xml:space="preserve"> · </a:t>
+            </a:r>
+            <a:r>
+              <a:rPr lang="zh-CN" sz="1950">
+                <a:solidFill>
+                  <a:srgbClr val="1F3A34"/>
+                </a:solidFill>
+                <a:latin typeface="宋体"/>
+                <a:ea typeface="宋体"/>
+              </a:rPr>
+              <a:t>黄花</a:t>
+            </a:r>
+            <a:r>
+              <a:rPr lang="en-US" sz="1950">
+                <a:solidFill>
+                  <a:srgbClr val="1F3A34"/>
+                </a:solidFill>
+                <a:latin typeface="宋体"/>
+                <a:ea typeface="宋体"/>
+              </a:rPr>
+              <a:t xml:space="preserve"> → </a:t>
+            </a:r>
+            <a:r>
+              <a:rPr lang="zh-CN" sz="1950">
+                <a:solidFill>
+                  <a:srgbClr val="1F3A34"/>
+                </a:solidFill>
+                <a:latin typeface="宋体"/>
+                <a:ea typeface="宋体"/>
+              </a:rPr>
+              <a:t>转向如今</a:t>
+            </a:r>
+            <a:endParaRPr/>
+          </a:p>
+        </p:txBody>
+      </p:sp>
+      <p:sp>
+        <p:nvSpPr>
+          <p:cNvPr id="107" name=""/>
           <p:cNvSpPr/>
           <p:nvPr/>
         </p:nvSpPr>
         <p:spPr>
           <a:xfrm rot="0" flipH="0" flipV="0">
-            <a:off x="6172200" y="2962275"/>
+            <a:off x="6172200" y="3152775"/>
             <a:ext cx="5410200" cy="1238250"/>
           </a:xfrm>
           <a:prstGeom prst="rect">
@@ -4332,13 +4442,13 @@
       </p:sp>
       <p:sp>
         <p:nvSpPr>
-          <p:cNvPr id="106" name="" descr="{&quot;isTemplate&quot;:true,&quot;type&quot;:&quot;text&quot;}"/>
-          <p:cNvSpPr txBox="1"/>
-          <p:nvPr/>
-        </p:nvSpPr>
-        <p:spPr>
-          <a:xfrm rot="0" flipH="0" flipV="0">
-            <a:off x="6362700" y="3152775"/>
+          <p:cNvPr id="108" name="" descr="{&quot;isTemplate&quot;:true,&quot;type&quot;:&quot;text&quot;}"/>
+          <p:cNvSpPr txBox="1"/>
+          <p:nvPr/>
+        </p:nvSpPr>
+        <p:spPr>
+          <a:xfrm rot="0" flipH="0" flipV="0">
+            <a:off x="6362700" y="3343275"/>
             <a:ext cx="5029200" cy="276225"/>
           </a:xfrm>
           <a:prstGeom prst="rect"/>
@@ -4359,7 +4469,7 @@
                 <a:latin typeface="宋体"/>
                 <a:ea typeface="宋体"/>
               </a:rPr>
-              <a:t>第二层</a:t>
+              <a:t>三</a:t>
             </a:r>
             <a:r>
               <a:rPr lang="en-US" sz="1800">
@@ -4379,97 +4489,57 @@
                 <a:latin typeface="宋体"/>
                 <a:ea typeface="宋体"/>
               </a:rPr>
-              <a:t>如今</a:t>
-            </a:r>
-            <a:endParaRPr/>
-          </a:p>
-        </p:txBody>
-      </p:sp>
-      <p:sp>
-        <p:nvSpPr>
-          <p:cNvPr id="107" name="" descr="{&quot;isTemplate&quot;:true,&quot;type&quot;:&quot;text&quot;}"/>
-          <p:cNvSpPr txBox="1"/>
-          <p:nvPr/>
-        </p:nvSpPr>
-        <p:spPr>
-          <a:xfrm rot="0" flipH="0" flipV="0">
-            <a:off x="6362700" y="3486150"/>
-            <a:ext cx="5029200" cy="323850"/>
-          </a:xfrm>
-          <a:prstGeom prst="rect"/>
-        </p:spPr>
-        <p:txBody>
-          <a:bodyPr wrap="none" lIns="0" tIns="0" rIns="0" bIns="0"/>
-          <a:p>
-            <a:pPr>
-              <a:lnSpc>
-                <a:spcPct val="100000"/>
-              </a:lnSpc>
-            </a:pPr>
-            <a:r>
-              <a:rPr lang="zh-CN" sz="2100">
+              <a:t>末句</a:t>
+            </a:r>
+            <a:endParaRPr/>
+          </a:p>
+        </p:txBody>
+      </p:sp>
+      <p:sp>
+        <p:nvSpPr>
+          <p:cNvPr id="109" name="" descr="{&quot;isTemplate&quot;:true,&quot;type&quot;:&quot;text&quot;}"/>
+          <p:cNvSpPr txBox="1"/>
+          <p:nvPr/>
+        </p:nvSpPr>
+        <p:spPr>
+          <a:xfrm rot="0" flipH="0" flipV="0">
+            <a:off x="6362700" y="3676650"/>
+            <a:ext cx="5029200" cy="304800"/>
+          </a:xfrm>
+          <a:prstGeom prst="rect"/>
+        </p:spPr>
+        <p:txBody>
+          <a:bodyPr wrap="none" lIns="0" tIns="0" rIns="0" bIns="0"/>
+          <a:p>
+            <a:pPr>
+              <a:lnSpc>
+                <a:spcPct val="100000"/>
+              </a:lnSpc>
+            </a:pPr>
+            <a:r>
+              <a:rPr lang="zh-CN" sz="1950">
                 <a:solidFill>
                   <a:srgbClr val="1F3A34"/>
                 </a:solidFill>
                 <a:latin typeface="宋体"/>
                 <a:ea typeface="宋体"/>
               </a:rPr>
-              <a:t>黄花（有谁堪摘）·</a:t>
-            </a:r>
-            <a:r>
-              <a:rPr lang="en-US" sz="2100">
-                <a:solidFill>
-                  <a:srgbClr val="1F3A34"/>
-                </a:solidFill>
-                <a:latin typeface="宋体"/>
-                <a:ea typeface="宋体"/>
-              </a:rPr>
-              <a:t xml:space="preserve"> </a:t>
-            </a:r>
-            <a:r>
-              <a:rPr lang="zh-CN" sz="2100">
-                <a:solidFill>
-                  <a:srgbClr val="1F3A34"/>
-                </a:solidFill>
-                <a:latin typeface="宋体"/>
-                <a:ea typeface="宋体"/>
-              </a:rPr>
-              <a:t>梧桐</a:t>
-            </a:r>
-            <a:r>
-              <a:rPr lang="en-US" sz="2100">
-                <a:solidFill>
-                  <a:srgbClr val="1F3A34"/>
-                </a:solidFill>
-                <a:latin typeface="宋体"/>
-                <a:ea typeface="宋体"/>
-              </a:rPr>
-              <a:t xml:space="preserve"> · </a:t>
-            </a:r>
-            <a:r>
-              <a:rPr lang="zh-CN" sz="2100">
-                <a:solidFill>
-                  <a:srgbClr val="1F3A34"/>
-                </a:solidFill>
-                <a:latin typeface="宋体"/>
-                <a:ea typeface="宋体"/>
-              </a:rPr>
-              <a:t>细雨</a:t>
-            </a:r>
-            <a:endParaRPr/>
-          </a:p>
-        </p:txBody>
-      </p:sp>
-      <p:sp>
-        <p:nvSpPr>
-          <p:cNvPr id="108" name=""/>
+              <a:t>入声收住；有人说它伧气</a:t>
+            </a:r>
+            <a:endParaRPr/>
+          </a:p>
+        </p:txBody>
+      </p:sp>
+      <p:sp>
+        <p:nvSpPr>
+          <p:cNvPr id="110" name=""/>
           <p:cNvSpPr/>
           <p:nvPr/>
         </p:nvSpPr>
         <p:spPr>
           <a:xfrm rot="0" flipH="0" flipV="0">
-            <a:off x="609600" y="4352925"/>
-            <a:ext cx="10972800" cy="1238250"/>
+            <a:off x="609600" y="4543425"/>
+            <a:ext cx="10972800" cy="857250"/>
           </a:xfrm>
           <a:prstGeom prst="rect">
             <a:avLst/>
@@ -4488,27 +4558,27 @@
       </p:sp>
       <p:sp>
         <p:nvSpPr>
-          <p:cNvPr id="109" name="" descr="{&quot;isTemplate&quot;:true,&quot;type&quot;:&quot;text&quot;}"/>
-          <p:cNvSpPr txBox="1"/>
-          <p:nvPr/>
-        </p:nvSpPr>
-        <p:spPr>
-          <a:xfrm rot="0" flipH="0" flipV="0">
-            <a:off x="800100" y="4610100"/>
-            <a:ext cx="10782300" cy="390525"/>
-          </a:xfrm>
-          <a:prstGeom prst="rect"/>
-        </p:spPr>
-        <p:txBody>
-          <a:bodyPr wrap="none" lIns="0" tIns="0" rIns="0" bIns="0"/>
-          <a:p>
-            <a:pPr>
-              <a:lnSpc>
-                <a:spcPct val="100000"/>
-              </a:lnSpc>
-            </a:pPr>
-            <a:r>
-              <a:rPr lang="zh-CN" sz="2550" b="1">
+          <p:cNvPr id="111" name="" descr="{&quot;isTemplate&quot;:true,&quot;type&quot;:&quot;text&quot;}"/>
+          <p:cNvSpPr txBox="1"/>
+          <p:nvPr/>
+        </p:nvSpPr>
+        <p:spPr>
+          <a:xfrm rot="0" flipH="0" flipV="0">
+            <a:off x="800100" y="4800600"/>
+            <a:ext cx="10782300" cy="342900"/>
+          </a:xfrm>
+          <a:prstGeom prst="rect"/>
+        </p:spPr>
+        <p:txBody>
+          <a:bodyPr wrap="none" lIns="0" tIns="0" rIns="0" bIns="0"/>
+          <a:p>
+            <a:pPr>
+              <a:lnSpc>
+                <a:spcPct val="100000"/>
+              </a:lnSpc>
+            </a:pPr>
+            <a:r>
+              <a:rPr lang="zh-CN" sz="2250" b="1">
                 <a:solidFill>
                   <a:srgbClr val="B4552D"/>
                 </a:solidFill>
@@ -4523,42 +4593,7 @@
       </p:sp>
       <p:sp>
         <p:nvSpPr>
-          <p:cNvPr id="110" name="" descr="{&quot;isTemplate&quot;:true,&quot;type&quot;:&quot;text&quot;}"/>
-          <p:cNvSpPr txBox="1"/>
-          <p:nvPr/>
-        </p:nvSpPr>
-        <p:spPr>
-          <a:xfrm rot="0" flipH="0" flipV="0">
-            <a:off x="800100" y="5057775"/>
-            <a:ext cx="10782300" cy="276225"/>
-          </a:xfrm>
-          <a:prstGeom prst="rect"/>
-        </p:spPr>
-        <p:txBody>
-          <a:bodyPr wrap="none" lIns="0" tIns="0" rIns="0" bIns="0"/>
-          <a:p>
-            <a:pPr>
-              <a:lnSpc>
-                <a:spcPct val="100000"/>
-              </a:lnSpc>
-            </a:pPr>
-            <a:r>
-              <a:rPr lang="zh-CN" sz="1800">
-                <a:solidFill>
-                  <a:srgbClr val="1F3A34"/>
-                </a:solidFill>
-                <a:latin typeface="宋体"/>
-                <a:ea typeface="宋体"/>
-              </a:rPr>
-              <a:t>不是说不出来，是九十七个字也说不完</a:t>
-            </a:r>
-            <a:endParaRPr/>
-          </a:p>
-        </p:txBody>
-      </p:sp>
-      <p:sp>
-        <p:nvSpPr>
-          <p:cNvPr id="111" name=""/>
+          <p:cNvPr id="112" name=""/>
           <p:cNvSpPr/>
           <p:nvPr/>
         </p:nvSpPr>
@@ -4600,7 +4635,7 @@
       </p:sp>
       <p:sp>
         <p:nvSpPr>
-          <p:cNvPr id="112" name="" descr="{&quot;isTemplate&quot;:true,&quot;type&quot;:&quot;text&quot;}"/>
+          <p:cNvPr id="113" name="" descr="{&quot;isTemplate&quot;:true,&quot;type&quot;:&quot;text&quot;}"/>
           <p:cNvSpPr txBox="1"/>
           <p:nvPr/>
         </p:nvSpPr>
@@ -4655,7 +4690,7 @@
       </p:sp>
       <p:sp>
         <p:nvSpPr>
-          <p:cNvPr id="113" name="" descr="{&quot;isTemplate&quot;:true,&quot;type&quot;:&quot;text&quot;}"/>
+          <p:cNvPr id="114" name="" descr="{&quot;isTemplate&quot;:true,&quot;type&quot;:&quot;text&quot;}"/>
           <p:cNvSpPr txBox="1"/>
           <p:nvPr/>
         </p:nvSpPr>
@@ -4698,7 +4733,7 @@
   <p:cSld>
     <p:spTree>
       <p:nvGrpSpPr>
-        <p:cNvPr id="114" name="" descr="&lt;Slide style={{ background: '#F5F1E6', padding: '48px 64px', fontFamily: '宋体' }}&gt;&#13;&#10;  &lt;Box style={{ flexDirection: 'row', justifyContent: 'space-between', alignItems: 'flex-end', height: 72 }}&gt;&#13;&#10;    &lt;Text style={{ fontSize: 40, fontWeight: 'bold', color: '#1F3A34', lineHeight: 1.2 }}&gt;今天的出口&lt;/Text&gt;&#13;&#10;    &lt;Text style={{ fontSize: 24, color: '#6B6B6B' }}&gt;环节六 · 作业&lt;/Text&gt;&#13;&#10;  &lt;/Box&gt;&#13;&#10;  &lt;Box style={{ height: 472, marginTop: 20, flexDirection: 'column' }}&gt;&#13;&#10;  &lt;Box style={{ height: 472, flexDirection: 'column', justifyContent: 'center', gap: 20 }}&gt;&#13;&#10;    &lt;Box style={{ flexDirection: 'row', height: 110, alignItems: 'center', paddingLeft: 24, background: 'rgba(31,58,52,0.07)' }}&gt;&#13;&#10;      &lt;Text style={{ fontSize: 28, fontWeight: 'bold', color: '#1F3A34', width: 200 }}&gt;基础 · 必做&lt;/Text&gt;&#13;&#10;      &lt;Text style={{ fontSize: 28, color: '#1F3A34' }}&gt;给“梧桐更兼细雨”标停顿与重音，写一句理由&lt;/Text&gt;&#13;&#10;    &lt;/Box&gt;&#13;&#10;    &lt;Box style={{ flexDirection: 'row', height: 110, alignItems: 'center', paddingLeft: 24, background: 'rgba(31,58,52,0.07)' }}&gt;&#13;&#10;      &lt;Text style={{ fontSize: 28, fontWeight: 'bold', color: '#1F3A34', width: 200 }}&gt;提高 · 必做&lt;/Text&gt;&#13;&#10;      &lt;Text style={{ fontSize: 28, color: '#1F3A34' }}&gt;比《醉花阴》的“愁”，各举一句为证&lt;/Text&gt;&#13;&#10;    &lt;/Box&gt;&#13;&#10;    &lt;Box style={{ flexDirection: 'row', height: 110, alignItems: 'center', paddingLeft: 24, background: 'rgba(31,58,52,0.07)' }}&gt;&#13;&#10;      &lt;Text style={{ fontSize: 28, fontWeight: 'bold', color: '#B4552D', width: 200 }}&gt;拓展 · 选做&lt;/Text&gt;&#13;&#10;      &lt;Text style={{ fontSize: 28, color: '#1F3A34' }}&gt;找一句用叠词写失落的歌词，比一比&lt;/Text&gt;&#13;&#10;    &lt;/Box&gt;&#13;&#10;  &lt;/Box&gt;&#13;&#10;  &lt;/Box&gt;&#13;&#10;  &lt;Box style={{ height: 40, marginTop: 12, borderTop: '1px solid rgba(31,58,52,0.2)', flexDirection: 'row', justifyContent: 'space-between', alignItems: 'center', paddingTop: 8 }}&gt;&#13;&#10;    &lt;Text style={{ fontSize: 24, color: '#6B6B6B' }}&gt;《声声慢》· 李清照&lt;/Text&gt;&#13;&#10;    &lt;Text style={{ fontSize: 24, color: '#B4552D' }}&gt;16/16&lt;/Text&gt;&#13;&#10;  &lt;/Box&gt;&#13;&#10;&lt;/Slide&gt;"/>
+        <p:cNvPr id="115" name="" descr="&lt;Slide style={{ background: '#F5F1E6', padding: '48px 64px', fontFamily: '宋体' }}&gt;&#13;&#10;  &lt;Box style={{ flexDirection: 'row', justifyContent: 'space-between', alignItems: 'flex-end', height: 72 }}&gt;&#13;&#10;    &lt;Text style={{ fontSize: 40, fontWeight: 'bold', color: '#1F3A34', lineHeight: 1.2 }}&gt;今天的出口&lt;/Text&gt;&#13;&#10;    &lt;Text style={{ fontSize: 24, color: '#6B6B6B' }}&gt;环节六 · 作业&lt;/Text&gt;&#13;&#10;  &lt;/Box&gt;&#13;&#10;  &lt;Box style={{ height: 472, marginTop: 20, flexDirection: 'column' }}&gt;&#13;&#10;  &lt;Box style={{ height: 472, flexDirection: 'column', justifyContent: 'center', gap: 20 }}&gt;&#13;&#10;    &lt;Box style={{ flexDirection: 'row', height: 110, alignItems: 'center', paddingLeft: 24, background: 'rgba(31,58,52,0.07)' }}&gt;&#13;&#10;      &lt;Text style={{ fontSize: 28, fontWeight: 'bold', color: '#1F3A34', width: 200 }}&gt;基础 · 必做&lt;/Text&gt;&#13;&#10;      &lt;Text style={{ fontSize: 27, color: '#1F3A34' }}&gt;给“梧桐更兼细雨”标停顿与重音&lt;/Text&gt;&#13;&#10;    &lt;/Box&gt;&#13;&#10;    &lt;Box style={{ flexDirection: 'row', height: 110, alignItems: 'center', paddingLeft: 24, background: 'rgba(31,58,52,0.07)' }}&gt;&#13;&#10;      &lt;Text style={{ fontSize: 28, fontWeight: 'bold', color: '#1F3A34', width: 200 }}&gt;提高 · 必做&lt;/Text&gt;&#13;&#10;      &lt;Text style={{ fontSize: 27, color: '#1F3A34' }}&gt;用分层或语码分析《醉花阴》一处&lt;/Text&gt;&#13;&#10;    &lt;/Box&gt;&#13;&#10;    &lt;Box style={{ flexDirection: 'row', height: 110, alignItems: 'center', paddingLeft: 24, background: 'rgba(31,58,52,0.07)' }}&gt;&#13;&#10;      &lt;Text style={{ fontSize: 28, fontWeight: 'bold', color: '#B4552D', width: 200 }}&gt;拓展 · 选做&lt;/Text&gt;&#13;&#10;      &lt;Text style={{ fontSize: 27, color: '#1F3A34' }}&gt;找叠词歌词，比它有没有“由外入内”&lt;/Text&gt;&#13;&#10;    &lt;/Box&gt;&#13;&#10;  &lt;/Box&gt;&#13;&#10;  &lt;/Box&gt;&#13;&#10;  &lt;Box style={{ height: 40, marginTop: 12, borderTop: '1px solid rgba(31,58,52,0.2)', flexDirection: 'row', justifyContent: 'space-between', alignItems: 'center', paddingTop: 8 }}&gt;&#13;&#10;    &lt;Text style={{ fontSize: 24, color: '#6B6B6B' }}&gt;《声声慢》· 李清照&lt;/Text&gt;&#13;&#10;    &lt;Text style={{ fontSize: 24, color: '#B4552D' }}&gt;16/16&lt;/Text&gt;&#13;&#10;  &lt;/Box&gt;&#13;&#10;&lt;/Slide&gt;"/>
         <p:cNvGrpSpPr/>
         <p:nvPr/>
       </p:nvGrpSpPr>
@@ -4712,7 +4747,7 @@
       </p:grpSpPr>
       <p:sp>
         <p:nvSpPr>
-          <p:cNvPr id="115" name=""/>
+          <p:cNvPr id="116" name=""/>
           <p:cNvSpPr/>
           <p:nvPr/>
         </p:nvSpPr>
@@ -4736,7 +4771,7 @@
       </p:sp>
       <p:sp>
         <p:nvSpPr>
-          <p:cNvPr id="116" name="" descr="{&quot;isTemplate&quot;:true,&quot;type&quot;:&quot;text&quot;}"/>
+          <p:cNvPr id="117" name="" descr="{&quot;isTemplate&quot;:true,&quot;type&quot;:&quot;text&quot;}"/>
           <p:cNvSpPr txBox="1"/>
           <p:nvPr/>
         </p:nvSpPr>
@@ -4771,7 +4806,7 @@
       </p:sp>
       <p:sp>
         <p:nvSpPr>
-          <p:cNvPr id="117" name="" descr="{&quot;isTemplate&quot;:true,&quot;type&quot;:&quot;text&quot;}"/>
+          <p:cNvPr id="118" name="" descr="{&quot;isTemplate&quot;:true,&quot;type&quot;:&quot;text&quot;}"/>
           <p:cNvSpPr txBox="1"/>
           <p:nvPr/>
         </p:nvSpPr>
@@ -4826,7 +4861,7 @@
       </p:sp>
       <p:sp>
         <p:nvSpPr>
-          <p:cNvPr id="118" name=""/>
+          <p:cNvPr id="119" name=""/>
           <p:cNvSpPr/>
           <p:nvPr/>
         </p:nvSpPr>
@@ -4852,7 +4887,7 @@
       </p:sp>
       <p:sp>
         <p:nvSpPr>
-          <p:cNvPr id="119" name="" descr="{&quot;isTemplate&quot;:true,&quot;type&quot;:&quot;text&quot;}"/>
+          <p:cNvPr id="120" name="" descr="{&quot;isTemplate&quot;:true,&quot;type&quot;:&quot;text&quot;}"/>
           <p:cNvSpPr txBox="1"/>
           <p:nvPr/>
         </p:nvSpPr>
@@ -4907,42 +4942,42 @@
       </p:sp>
       <p:sp>
         <p:nvSpPr>
-          <p:cNvPr id="120" name="" descr="{&quot;isTemplate&quot;:true,&quot;type&quot;:&quot;text&quot;}"/>
-          <p:cNvSpPr txBox="1"/>
-          <p:nvPr/>
-        </p:nvSpPr>
-        <p:spPr>
-          <a:xfrm rot="0" flipH="0" flipV="0">
-            <a:off x="2743200" y="2181225"/>
-            <a:ext cx="5286375" cy="323850"/>
-          </a:xfrm>
-          <a:prstGeom prst="rect"/>
-        </p:spPr>
-        <p:txBody>
-          <a:bodyPr wrap="none" lIns="0" tIns="0" rIns="0" bIns="0"/>
-          <a:p>
-            <a:pPr>
-              <a:lnSpc>
-                <a:spcPct val="100000"/>
-              </a:lnSpc>
-            </a:pPr>
-            <a:r>
-              <a:rPr lang="zh-CN" sz="2100">
+          <p:cNvPr id="121" name="" descr="{&quot;isTemplate&quot;:true,&quot;type&quot;:&quot;text&quot;}"/>
+          <p:cNvSpPr txBox="1"/>
+          <p:nvPr/>
+        </p:nvSpPr>
+        <p:spPr>
+          <a:xfrm rot="0" flipH="0" flipV="0">
+            <a:off x="2743200" y="2190750"/>
+            <a:ext cx="3552825" cy="314325"/>
+          </a:xfrm>
+          <a:prstGeom prst="rect"/>
+        </p:spPr>
+        <p:txBody>
+          <a:bodyPr wrap="none" lIns="0" tIns="0" rIns="0" bIns="0"/>
+          <a:p>
+            <a:pPr>
+              <a:lnSpc>
+                <a:spcPct val="100000"/>
+              </a:lnSpc>
+            </a:pPr>
+            <a:r>
+              <a:rPr lang="zh-CN" sz="2025">
                 <a:solidFill>
                   <a:srgbClr val="1F3A34"/>
                 </a:solidFill>
                 <a:latin typeface="宋体"/>
                 <a:ea typeface="宋体"/>
               </a:rPr>
-              <a:t>给“梧桐更兼细雨”标停顿与重音，写一句理由</a:t>
-            </a:r>
-            <a:endParaRPr/>
-          </a:p>
-        </p:txBody>
-      </p:sp>
-      <p:sp>
-        <p:nvSpPr>
-          <p:cNvPr id="121" name=""/>
+              <a:t>给“梧桐更兼细雨”标停顿与重音</a:t>
+            </a:r>
+            <a:endParaRPr/>
+          </a:p>
+        </p:txBody>
+      </p:sp>
+      <p:sp>
+        <p:nvSpPr>
+          <p:cNvPr id="122" name=""/>
           <p:cNvSpPr/>
           <p:nvPr/>
         </p:nvSpPr>
@@ -4968,7 +5003,7 @@
       </p:sp>
       <p:sp>
         <p:nvSpPr>
-          <p:cNvPr id="122" name="" descr="{&quot;isTemplate&quot;:true,&quot;type&quot;:&quot;text&quot;}"/>
+          <p:cNvPr id="123" name="" descr="{&quot;isTemplate&quot;:true,&quot;type&quot;:&quot;text&quot;}"/>
           <p:cNvSpPr txBox="1"/>
           <p:nvPr/>
         </p:nvSpPr>
@@ -5023,42 +5058,42 @@
       </p:sp>
       <p:sp>
         <p:nvSpPr>
-          <p:cNvPr id="123" name="" descr="{&quot;isTemplate&quot;:true,&quot;type&quot;:&quot;text&quot;}"/>
-          <p:cNvSpPr txBox="1"/>
-          <p:nvPr/>
-        </p:nvSpPr>
-        <p:spPr>
-          <a:xfrm rot="0" flipH="0" flipV="0">
-            <a:off x="2743200" y="3419475"/>
-            <a:ext cx="4219575" cy="323850"/>
-          </a:xfrm>
-          <a:prstGeom prst="rect"/>
-        </p:spPr>
-        <p:txBody>
-          <a:bodyPr wrap="none" lIns="0" tIns="0" rIns="0" bIns="0"/>
-          <a:p>
-            <a:pPr>
-              <a:lnSpc>
-                <a:spcPct val="100000"/>
-              </a:lnSpc>
-            </a:pPr>
-            <a:r>
-              <a:rPr lang="zh-CN" sz="2100">
+          <p:cNvPr id="124" name="" descr="{&quot;isTemplate&quot;:true,&quot;type&quot;:&quot;text&quot;}"/>
+          <p:cNvSpPr txBox="1"/>
+          <p:nvPr/>
+        </p:nvSpPr>
+        <p:spPr>
+          <a:xfrm rot="0" flipH="0" flipV="0">
+            <a:off x="2743200" y="3429000"/>
+            <a:ext cx="3857625" cy="314325"/>
+          </a:xfrm>
+          <a:prstGeom prst="rect"/>
+        </p:spPr>
+        <p:txBody>
+          <a:bodyPr wrap="none" lIns="0" tIns="0" rIns="0" bIns="0"/>
+          <a:p>
+            <a:pPr>
+              <a:lnSpc>
+                <a:spcPct val="100000"/>
+              </a:lnSpc>
+            </a:pPr>
+            <a:r>
+              <a:rPr lang="zh-CN" sz="2025">
                 <a:solidFill>
                   <a:srgbClr val="1F3A34"/>
                 </a:solidFill>
                 <a:latin typeface="宋体"/>
                 <a:ea typeface="宋体"/>
               </a:rPr>
-              <a:t>比《醉花阴》的“愁”，各举一句为证</a:t>
-            </a:r>
-            <a:endParaRPr/>
-          </a:p>
-        </p:txBody>
-      </p:sp>
-      <p:sp>
-        <p:nvSpPr>
-          <p:cNvPr id="124" name=""/>
+              <a:t>用分层或语码分析《醉花阴》一处</a:t>
+            </a:r>
+            <a:endParaRPr/>
+          </a:p>
+        </p:txBody>
+      </p:sp>
+      <p:sp>
+        <p:nvSpPr>
+          <p:cNvPr id="125" name=""/>
           <p:cNvSpPr/>
           <p:nvPr/>
         </p:nvSpPr>
@@ -5084,7 +5119,7 @@
       </p:sp>
       <p:sp>
         <p:nvSpPr>
-          <p:cNvPr id="125" name="" descr="{&quot;isTemplate&quot;:true,&quot;type&quot;:&quot;text&quot;}"/>
+          <p:cNvPr id="126" name="" descr="{&quot;isTemplate&quot;:true,&quot;type&quot;:&quot;text&quot;}"/>
           <p:cNvSpPr txBox="1"/>
           <p:nvPr/>
         </p:nvSpPr>
@@ -5139,42 +5174,42 @@
       </p:sp>
       <p:sp>
         <p:nvSpPr>
-          <p:cNvPr id="126" name="" descr="{&quot;isTemplate&quot;:true,&quot;type&quot;:&quot;text&quot;}"/>
-          <p:cNvSpPr txBox="1"/>
-          <p:nvPr/>
-        </p:nvSpPr>
-        <p:spPr>
-          <a:xfrm rot="0" flipH="0" flipV="0">
-            <a:off x="2743200" y="4657725"/>
-            <a:ext cx="4267200" cy="323850"/>
-          </a:xfrm>
-          <a:prstGeom prst="rect"/>
-        </p:spPr>
-        <p:txBody>
-          <a:bodyPr wrap="none" lIns="0" tIns="0" rIns="0" bIns="0"/>
-          <a:p>
-            <a:pPr>
-              <a:lnSpc>
-                <a:spcPct val="100000"/>
-              </a:lnSpc>
-            </a:pPr>
-            <a:r>
-              <a:rPr lang="zh-CN" sz="2100">
+          <p:cNvPr id="127" name="" descr="{&quot;isTemplate&quot;:true,&quot;type&quot;:&quot;text&quot;}"/>
+          <p:cNvSpPr txBox="1"/>
+          <p:nvPr/>
+        </p:nvSpPr>
+        <p:spPr>
+          <a:xfrm rot="0" flipH="0" flipV="0">
+            <a:off x="2743200" y="4667250"/>
+            <a:ext cx="4067175" cy="314325"/>
+          </a:xfrm>
+          <a:prstGeom prst="rect"/>
+        </p:spPr>
+        <p:txBody>
+          <a:bodyPr wrap="none" lIns="0" tIns="0" rIns="0" bIns="0"/>
+          <a:p>
+            <a:pPr>
+              <a:lnSpc>
+                <a:spcPct val="100000"/>
+              </a:lnSpc>
+            </a:pPr>
+            <a:r>
+              <a:rPr lang="zh-CN" sz="2025">
                 <a:solidFill>
                   <a:srgbClr val="1F3A34"/>
                 </a:solidFill>
                 <a:latin typeface="宋体"/>
                 <a:ea typeface="宋体"/>
               </a:rPr>
-              <a:t>找一句用叠词写失落的歌词，比一比</a:t>
-            </a:r>
-            <a:endParaRPr/>
-          </a:p>
-        </p:txBody>
-      </p:sp>
-      <p:sp>
-        <p:nvSpPr>
-          <p:cNvPr id="127" name=""/>
+              <a:t>找叠词歌词，比它有没有“由外入内”</a:t>
+            </a:r>
+            <a:endParaRPr/>
+          </a:p>
+        </p:txBody>
+      </p:sp>
+      <p:sp>
+        <p:nvSpPr>
+          <p:cNvPr id="128" name=""/>
           <p:cNvSpPr/>
           <p:nvPr/>
         </p:nvSpPr>
@@ -5216,7 +5251,7 @@
       </p:sp>
       <p:sp>
         <p:nvSpPr>
-          <p:cNvPr id="128" name="" descr="{&quot;isTemplate&quot;:true,&quot;type&quot;:&quot;text&quot;}"/>
+          <p:cNvPr id="129" name="" descr="{&quot;isTemplate&quot;:true,&quot;type&quot;:&quot;text&quot;}"/>
           <p:cNvSpPr txBox="1"/>
           <p:nvPr/>
         </p:nvSpPr>
@@ -5271,7 +5306,7 @@
       </p:sp>
       <p:sp>
         <p:nvSpPr>
-          <p:cNvPr id="129" name="" descr="{&quot;isTemplate&quot;:true,&quot;type&quot;:&quot;text&quot;}"/>
+          <p:cNvPr id="130" name="" descr="{&quot;isTemplate&quot;:true,&quot;type&quot;:&quot;text&quot;}"/>
           <p:cNvSpPr txBox="1"/>
           <p:nvPr/>
         </p:nvSpPr>
@@ -5314,7 +5349,7 @@
   <p:cSld>
     <p:spTree>
       <p:nvGrpSpPr>
-        <p:cNvPr id="130" name="" descr="&lt;Slide style={{ background: '#F5F1E6', padding: '48px 64px', fontFamily: '宋体' }}&gt;&#13;&#10;  &lt;Box style={{ flexDirection: 'row', justifyContent: 'space-between', alignItems: 'flex-end', height: 72 }}&gt;&#13;&#10;    &lt;Text style={{ fontSize: 40, fontWeight: 'bold', color: '#1F3A34', lineHeight: 1.2 }}&gt;一次广播导赏&lt;/Text&gt;&#13;&#10;    &lt;Text style={{ fontSize: 24, color: '#6B6B6B' }}&gt;环节一 · 导入与诊断&lt;/Text&gt;&#13;&#10;  &lt;/Box&gt;&#13;&#10;  &lt;Box style={{ height: 472, marginTop: 20, flexDirection: 'column' }}&gt;&#13;&#10;  &lt;Box style={{ flexDirection: 'row', height: 472 }}&gt;&#13;&#10;    &lt;Box style={{ width: 620, paddingRight: 40, flexDirection: 'column', justifyContent: 'center' }}&gt;&#13;&#10;      &lt;Text style={{ fontSize: 28, color: '#1F3A34', lineHeight: 1.8 }}&gt;学校“词的声音”栏目要做一期朗读导赏。&lt;/Text&gt;&#13;&#10;      &lt;Text style={{ fontSize: 28, color: '#1F3A34', lineHeight: 1.8, marginTop: 24 }}&gt;导赏稿不能说“这首词很悲伤”，要说清：哪一句该怎么读，为什么这么读。&lt;/Text&gt;&#13;&#10;    &lt;/Box&gt;&#13;&#10;    &lt;Box style={{ flex: 1, background: 'rgba(31,58,52,0.06)', padding: 32, flexDirection: 'column', justifyContent: 'center' }}&gt;&#13;&#10;      &lt;Text style={{ fontSize: 28, fontWeight: 'bold', color: '#1F3A34' }}&gt;导赏稿要回答三件事&lt;/Text&gt;&#13;&#10;      &lt;Text style={{ fontSize: 28, color: '#1F3A34', lineHeight: 2, marginTop: 16 }}&gt;一、哪里放慢&lt;/Text&gt;&#13;&#10;      &lt;Text style={{ fontSize: 28, color: '#1F3A34', lineHeight: 2 }}&gt;二、哪里压住&lt;/Text&gt;&#13;&#10;      &lt;Text style={{ fontSize: 28, color: '#1F3A34', lineHeight: 2 }}&gt;三、末句怎么收&lt;/Text&gt;&#13;&#10;    &lt;/Box&gt;&#13;&#10;  &lt;/Box&gt;&#13;&#10;  &lt;/Box&gt;&#13;&#10;  &lt;Box style={{ height: 40, marginTop: 12, borderTop: '1px solid rgba(31,58,52,0.2)', flexDirection: 'row', justifyContent: 'space-between', alignItems: 'center', paddingTop: 8 }}&gt;&#13;&#10;    &lt;Text style={{ fontSize: 24, color: '#6B6B6B' }}&gt;《声声慢》· 李清照&lt;/Text&gt;&#13;&#10;    &lt;Text style={{ fontSize: 24, color: '#B4552D' }}&gt;02/16&lt;/Text&gt;&#13;&#10;  &lt;/Box&gt;&#13;&#10;&lt;/Slide&gt;"/>
+        <p:cNvPr id="131" name="" descr="&lt;Slide style={{ background: '#F5F1E6', padding: '48px 64px', fontFamily: '宋体' }}&gt;&#13;&#10;  &lt;Box style={{ flexDirection: 'row', justifyContent: 'space-between', alignItems: 'flex-end', height: 72 }}&gt;&#13;&#10;    &lt;Text style={{ fontSize: 40, fontWeight: 'bold', color: '#1F3A34', lineHeight: 1.2 }}&gt;一次广播导赏&lt;/Text&gt;&#13;&#10;    &lt;Text style={{ fontSize: 24, color: '#6B6B6B' }}&gt;环节一 · 导入&lt;/Text&gt;&#13;&#10;  &lt;/Box&gt;&#13;&#10;  &lt;Box style={{ height: 472, marginTop: 20, flexDirection: 'column' }}&gt;&#13;&#10;  &lt;Box style={{ flexDirection: 'row', height: 472 }}&gt;&#13;&#10;    &lt;Box style={{ width: 620, paddingRight: 40, flexDirection: 'column', justifyContent: 'center' }}&gt;&#13;&#10;      &lt;Text style={{ fontSize: 28, color: '#1F3A34', lineHeight: 1.8 }}&gt;学校“词的声音”栏目要做一期朗读导赏。&lt;/Text&gt;&#13;&#10;      &lt;Text style={{ fontSize: 28, color: '#1F3A34', lineHeight: 1.8, marginTop: 24 }}&gt;导赏稿不能说“这首词很悲伤”，要说清：哪一句该怎么读，为什么这么读。&lt;/Text&gt;&#13;&#10;    &lt;/Box&gt;&#13;&#10;    &lt;Box style={{ flex: 1, background: 'rgba(31,58,52,0.06)', padding: 32, flexDirection: 'column', justifyContent: 'center' }}&gt;&#13;&#10;      &lt;Text style={{ fontSize: 28, fontWeight: 'bold', color: '#1F3A34' }}&gt;导赏稿要回答三件事&lt;/Text&gt;&#13;&#10;      &lt;Text style={{ fontSize: 28, color: '#1F3A34', lineHeight: 2, marginTop: 16 }}&gt;一、它深了几层&lt;/Text&gt;&#13;&#10;      &lt;Text style={{ fontSize: 28, color: '#1F3A34', lineHeight: 2 }}&gt;二、这个词前人怎么写&lt;/Text&gt;&#13;&#10;      &lt;Text style={{ fontSize: 28, color: '#1F3A34', lineHeight: 2 }}&gt;三、有人说它不好，怎么看&lt;/Text&gt;&#13;&#10;    &lt;/Box&gt;&#13;&#10;  &lt;/Box&gt;&#13;&#10;  &lt;/Box&gt;&#13;&#10;  &lt;Box style={{ height: 40, marginTop: 12, borderTop: '1px solid rgba(31,58,52,0.2)', flexDirection: 'row', justifyContent: 'space-between', alignItems: 'center', paddingTop: 8 }}&gt;&#13;&#10;    &lt;Text style={{ fontSize: 24, color: '#6B6B6B' }}&gt;《声声慢》· 李清照&lt;/Text&gt;&#13;&#10;    &lt;Text style={{ fontSize: 24, color: '#B4552D' }}&gt;02/16&lt;/Text&gt;&#13;&#10;  &lt;/Box&gt;&#13;&#10;&lt;/Slide&gt;"/>
         <p:cNvGrpSpPr/>
         <p:nvPr/>
       </p:nvGrpSpPr>
@@ -5328,7 +5363,7 @@
       </p:grpSpPr>
       <p:sp>
         <p:nvSpPr>
-          <p:cNvPr id="131" name=""/>
+          <p:cNvPr id="132" name=""/>
           <p:cNvSpPr/>
           <p:nvPr/>
         </p:nvSpPr>
@@ -5352,7 +5387,7 @@
       </p:sp>
       <p:sp>
         <p:nvSpPr>
-          <p:cNvPr id="132" name="" descr="{&quot;isTemplate&quot;:true,&quot;type&quot;:&quot;text&quot;}"/>
+          <p:cNvPr id="133" name="" descr="{&quot;isTemplate&quot;:true,&quot;type&quot;:&quot;text&quot;}"/>
           <p:cNvSpPr txBox="1"/>
           <p:nvPr/>
         </p:nvSpPr>
@@ -5387,14 +5422,14 @@
       </p:sp>
       <p:sp>
         <p:nvSpPr>
-          <p:cNvPr id="133" name="" descr="{&quot;isTemplate&quot;:true,&quot;type&quot;:&quot;text&quot;}"/>
-          <p:cNvSpPr txBox="1"/>
-          <p:nvPr/>
-        </p:nvSpPr>
-        <p:spPr>
-          <a:xfrm rot="0" flipH="0" flipV="0">
-            <a:off x="9525000" y="866775"/>
-            <a:ext cx="2057400" cy="276225"/>
+          <p:cNvPr id="134" name="" descr="{&quot;isTemplate&quot;:true,&quot;type&quot;:&quot;text&quot;}"/>
+          <p:cNvSpPr txBox="1"/>
+          <p:nvPr/>
+        </p:nvSpPr>
+        <p:spPr>
+          <a:xfrm rot="0" flipH="0" flipV="0">
+            <a:off x="10210800" y="866775"/>
+            <a:ext cx="1371600" cy="276225"/>
           </a:xfrm>
           <a:prstGeom prst="rect"/>
         </p:spPr>
@@ -5434,15 +5469,15 @@
                 <a:latin typeface="宋体"/>
                 <a:ea typeface="宋体"/>
               </a:rPr>
-              <a:t>导入与诊断</a:t>
-            </a:r>
-            <a:endParaRPr/>
-          </a:p>
-        </p:txBody>
-      </p:sp>
-      <p:sp>
-        <p:nvSpPr>
-          <p:cNvPr id="134" name="" descr="{&quot;isTemplate&quot;:true,&quot;type&quot;:&quot;text&quot;}"/>
+              <a:t>导入</a:t>
+            </a:r>
+            <a:endParaRPr/>
+          </a:p>
+        </p:txBody>
+      </p:sp>
+      <p:sp>
+        <p:nvSpPr>
+          <p:cNvPr id="135" name="" descr="{&quot;isTemplate&quot;:true,&quot;type&quot;:&quot;text&quot;}"/>
           <p:cNvSpPr txBox="1"/>
           <p:nvPr/>
         </p:nvSpPr>
@@ -5477,7 +5512,7 @@
       </p:sp>
       <p:sp>
         <p:nvSpPr>
-          <p:cNvPr id="135" name="" descr="{&quot;isTemplate&quot;:true,&quot;type&quot;:&quot;text&quot;}"/>
+          <p:cNvPr id="136" name="" descr="{&quot;isTemplate&quot;:true,&quot;type&quot;:&quot;text&quot;}"/>
           <p:cNvSpPr txBox="1"/>
           <p:nvPr/>
         </p:nvSpPr>
@@ -5514,7 +5549,7 @@
       </p:sp>
       <p:sp>
         <p:nvSpPr>
-          <p:cNvPr id="136" name=""/>
+          <p:cNvPr id="137" name=""/>
           <p:cNvSpPr/>
           <p:nvPr/>
         </p:nvSpPr>
@@ -5540,7 +5575,7 @@
       </p:sp>
       <p:sp>
         <p:nvSpPr>
-          <p:cNvPr id="137" name="" descr="{&quot;isTemplate&quot;:true,&quot;type&quot;:&quot;text&quot;}"/>
+          <p:cNvPr id="138" name="" descr="{&quot;isTemplate&quot;:true,&quot;type&quot;:&quot;text&quot;}"/>
           <p:cNvSpPr txBox="1"/>
           <p:nvPr/>
         </p:nvSpPr>
@@ -5575,7 +5610,7 @@
       </p:sp>
       <p:sp>
         <p:nvSpPr>
-          <p:cNvPr id="138" name="" descr="{&quot;isTemplate&quot;:true,&quot;type&quot;:&quot;text&quot;}"/>
+          <p:cNvPr id="139" name="" descr="{&quot;isTemplate&quot;:true,&quot;type&quot;:&quot;text&quot;}"/>
           <p:cNvSpPr txBox="1"/>
           <p:nvPr/>
         </p:nvSpPr>
@@ -5602,15 +5637,15 @@
                 <a:latin typeface="宋体"/>
                 <a:ea typeface="宋体"/>
               </a:rPr>
-              <a:t>一、哪里放慢</a:t>
-            </a:r>
-            <a:endParaRPr/>
-          </a:p>
-        </p:txBody>
-      </p:sp>
-      <p:sp>
-        <p:nvSpPr>
-          <p:cNvPr id="139" name="" descr="{&quot;isTemplate&quot;:true,&quot;type&quot;:&quot;text&quot;}"/>
+              <a:t>一、它深了几层</a:t>
+            </a:r>
+            <a:endParaRPr/>
+          </a:p>
+        </p:txBody>
+      </p:sp>
+      <p:sp>
+        <p:nvSpPr>
+          <p:cNvPr id="140" name="" descr="{&quot;isTemplate&quot;:true,&quot;type&quot;:&quot;text&quot;}"/>
           <p:cNvSpPr txBox="1"/>
           <p:nvPr/>
         </p:nvSpPr>
@@ -5637,15 +5672,15 @@
                 <a:latin typeface="宋体"/>
                 <a:ea typeface="宋体"/>
               </a:rPr>
-              <a:t>二、哪里压住</a:t>
-            </a:r>
-            <a:endParaRPr/>
-          </a:p>
-        </p:txBody>
-      </p:sp>
-      <p:sp>
-        <p:nvSpPr>
-          <p:cNvPr id="140" name="" descr="{&quot;isTemplate&quot;:true,&quot;type&quot;:&quot;text&quot;}"/>
+              <a:t>二、这个词前人怎么写</a:t>
+            </a:r>
+            <a:endParaRPr/>
+          </a:p>
+        </p:txBody>
+      </p:sp>
+      <p:sp>
+        <p:nvSpPr>
+          <p:cNvPr id="141" name="" descr="{&quot;isTemplate&quot;:true,&quot;type&quot;:&quot;text&quot;}"/>
           <p:cNvSpPr txBox="1"/>
           <p:nvPr/>
         </p:nvSpPr>
@@ -5672,15 +5707,15 @@
                 <a:latin typeface="宋体"/>
                 <a:ea typeface="宋体"/>
               </a:rPr>
-              <a:t>三、末句怎么收</a:t>
-            </a:r>
-            <a:endParaRPr/>
-          </a:p>
-        </p:txBody>
-      </p:sp>
-      <p:sp>
-        <p:nvSpPr>
-          <p:cNvPr id="141" name=""/>
+              <a:t>三、有人说它不好，怎么看</a:t>
+            </a:r>
+            <a:endParaRPr/>
+          </a:p>
+        </p:txBody>
+      </p:sp>
+      <p:sp>
+        <p:nvSpPr>
+          <p:cNvPr id="142" name=""/>
           <p:cNvSpPr/>
           <p:nvPr/>
         </p:nvSpPr>
@@ -5722,7 +5757,7 @@
       </p:sp>
       <p:sp>
         <p:nvSpPr>
-          <p:cNvPr id="142" name="" descr="{&quot;isTemplate&quot;:true,&quot;type&quot;:&quot;text&quot;}"/>
+          <p:cNvPr id="143" name="" descr="{&quot;isTemplate&quot;:true,&quot;type&quot;:&quot;text&quot;}"/>
           <p:cNvSpPr txBox="1"/>
           <p:nvPr/>
         </p:nvSpPr>
@@ -5777,7 +5812,7 @@
       </p:sp>
       <p:sp>
         <p:nvSpPr>
-          <p:cNvPr id="143" name="" descr="{&quot;isTemplate&quot;:true,&quot;type&quot;:&quot;text&quot;}"/>
+          <p:cNvPr id="144" name="" descr="{&quot;isTemplate&quot;:true,&quot;type&quot;:&quot;text&quot;}"/>
           <p:cNvSpPr txBox="1"/>
           <p:nvPr/>
         </p:nvSpPr>
@@ -5820,7 +5855,7 @@
   <p:cSld>
     <p:spTree>
       <p:nvGrpSpPr>
-        <p:cNvPr id="144" name="" descr="&lt;Slide style={{ background: '#F5F1E6', padding: '48px 64px', fontFamily: '宋体' }}&gt;&#13;&#10;  &lt;Box style={{ flexDirection: 'row', justifyContent: 'space-between', alignItems: 'flex-end', height: 72 }}&gt;&#13;&#10;    &lt;Text style={{ fontSize: 40, fontWeight: 'bold', color: '#1F3A34', lineHeight: 1.2 }}&gt;三个词，三种直觉&lt;/Text&gt;&#13;&#10;    &lt;Text style={{ fontSize: 24, color: '#6B6B6B' }}&gt;环节一 · 导入与诊断&lt;/Text&gt;&#13;&#10;  &lt;/Box&gt;&#13;&#10;  &lt;Box style={{ height: 472, marginTop: 20, flexDirection: 'column' }}&gt;&#13;&#10;  &lt;Box style={{ flexDirection: 'row', gap: 24, height: 200 }}&gt;&#13;&#10;    &lt;Box style={{ flex: 1, background: 'rgba(31,58,52,0.06)', alignItems: 'center', justifyContent: 'center', flexDirection: 'column' }}&gt;&#13;&#10;      &lt;Text style={{ fontSize: 40, fontWeight: 'bold', color: '#1F3A34' }}&gt;梧桐&lt;/Text&gt;&#13;&#10;    &lt;/Box&gt;&#13;&#10;    &lt;Box style={{ flex: 1, background: 'rgba(31,58,52,0.06)', alignItems: 'center', justifyContent: 'center', flexDirection: 'column' }}&gt;&#13;&#10;      &lt;Text style={{ fontSize: 40, fontWeight: 'bold', color: '#1F3A34' }}&gt;细雨&lt;/Text&gt;&#13;&#10;    &lt;/Box&gt;&#13;&#10;    &lt;Box style={{ flex: 1, background: 'rgba(31,58,52,0.06)', alignItems: 'center', justifyContent: 'center', flexDirection: 'column' }}&gt;&#13;&#10;      &lt;Text style={{ fontSize: 40, fontWeight: 'bold', color: '#1F3A34' }}&gt;黄花&lt;/Text&gt;&#13;&#10;    &lt;/Box&gt;&#13;&#10;  &lt;/Box&gt;&#13;&#10;  &lt;Box style={{ marginTop: 28, borderLeft: '4px solid #B4552D', paddingLeft: 24, flexDirection: 'column' }}&gt;&#13;&#10;    &lt;Text style={{ fontSize: 28, color: '#1F3A34', lineHeight: 1.8 }}&gt;各写一个形容词，再圈出词里让你这么写的那个字。&lt;/Text&gt;&#13;&#10;    &lt;Text style={{ fontSize: 24, color: '#6B6B6B', marginTop: 12 }}&gt;写不出“哪个字”，先放着，这节课就是来解决它的。&lt;/Text&gt;&#13;&#10;  &lt;/Box&gt;&#13;&#10;  &lt;/Box&gt;&#13;&#10;  &lt;Box style={{ height: 40, marginTop: 12, borderTop: '1px solid rgba(31,58,52,0.2)', flexDirection: 'row', justifyContent: 'space-between', alignItems: 'center', paddingTop: 8 }}&gt;&#13;&#10;    &lt;Text style={{ fontSize: 24, color: '#6B6B6B' }}&gt;《声声慢》· 李清照&lt;/Text&gt;&#13;&#10;    &lt;Text style={{ fontSize: 24, color: '#B4552D' }}&gt;03/16&lt;/Text&gt;&#13;&#10;  &lt;/Box&gt;&#13;&#10;&lt;/Slide&gt;"/>
+        <p:cNvPr id="145" name="" descr="&lt;Slide style={{ background: '#F5F1E6', padding: '48px 64px', fontFamily: '宋体' }}&gt;&#13;&#10;  &lt;Box style={{ flexDirection: 'row', justifyContent: 'space-between', alignItems: 'flex-end', height: 72 }}&gt;&#13;&#10;    &lt;Text style={{ fontSize: 40, fontWeight: 'bold', color: '#1F3A34', lineHeight: 1.2 }}&gt;十四个字，好在哪&lt;/Text&gt;&#13;&#10;    &lt;Text style={{ fontSize: 24, color: '#6B6B6B' }}&gt;环节一 · 诊断&lt;/Text&gt;&#13;&#10;  &lt;/Box&gt;&#13;&#10;  &lt;Box style={{ height: 472, marginTop: 20, flexDirection: 'column' }}&gt;&#13;&#10;  &lt;Box style={{ height: 472, justifyContent: 'center', flexDirection: 'column' }}&gt;&#13;&#10;    &lt;Box style={{ padding: '32px 40px', background: 'rgba(31,58,52,0.05)' }}&gt;&#13;&#10;      &lt;Text style={{ fontSize: 34, color: '#1F3A34', lineHeight: 1.9, letterSpacing: 2 }}&gt;寻寻觅觅，冷冷清清，凄凄惨惨戚戚。&lt;/Text&gt;&#13;&#10;    &lt;/Box&gt;&#13;&#10;    &lt;Box style={{ marginTop: 32, borderLeft: '4px solid #B4552D', paddingLeft: 24 }}&gt;&#13;&#10;      &lt;Text style={{ fontSize: 28, color: '#1F3A34' }}&gt;这十四个字，好在哪？写一句你的答案。&lt;/Text&gt;&#13;&#10;      &lt;Text style={{ fontSize: 24, color: '#6B6B6B', marginTop: 12 }}&gt;答案会被原样抄在黑板上，这节课结束时再回头看。&lt;/Text&gt;&#13;&#10;    &lt;/Box&gt;&#13;&#10;  &lt;/Box&gt;&#13;&#10;  &lt;/Box&gt;&#13;&#10;  &lt;Box style={{ height: 40, marginTop: 12, borderTop: '1px solid rgba(31,58,52,0.2)', flexDirection: 'row', justifyContent: 'space-between', alignItems: 'center', paddingTop: 8 }}&gt;&#13;&#10;    &lt;Text style={{ fontSize: 24, color: '#6B6B6B' }}&gt;《声声慢》· 李清照&lt;/Text&gt;&#13;&#10;    &lt;Text style={{ fontSize: 24, color: '#B4552D' }}&gt;03/16&lt;/Text&gt;&#13;&#10;  &lt;/Box&gt;&#13;&#10;&lt;/Slide&gt;"/>
         <p:cNvGrpSpPr/>
         <p:nvPr/>
       </p:nvGrpSpPr>
@@ -5834,7 +5869,7 @@
       </p:grpSpPr>
       <p:sp>
         <p:nvSpPr>
-          <p:cNvPr id="145" name=""/>
+          <p:cNvPr id="146" name=""/>
           <p:cNvSpPr/>
           <p:nvPr/>
         </p:nvSpPr>
@@ -5858,7 +5893,7 @@
       </p:sp>
       <p:sp>
         <p:nvSpPr>
-          <p:cNvPr id="146" name="" descr="{&quot;isTemplate&quot;:true,&quot;type&quot;:&quot;text&quot;}"/>
+          <p:cNvPr id="147" name="" descr="{&quot;isTemplate&quot;:true,&quot;type&quot;:&quot;text&quot;}"/>
           <p:cNvSpPr txBox="1"/>
           <p:nvPr/>
         </p:nvSpPr>
@@ -5885,22 +5920,22 @@
                 <a:latin typeface="宋体"/>
                 <a:ea typeface="宋体"/>
               </a:rPr>
-              <a:t>三个词，三种直觉</a:t>
-            </a:r>
-            <a:endParaRPr/>
-          </a:p>
-        </p:txBody>
-      </p:sp>
-      <p:sp>
-        <p:nvSpPr>
-          <p:cNvPr id="147" name="" descr="{&quot;isTemplate&quot;:true,&quot;type&quot;:&quot;text&quot;}"/>
-          <p:cNvSpPr txBox="1"/>
-          <p:nvPr/>
-        </p:nvSpPr>
-        <p:spPr>
-          <a:xfrm rot="0" flipH="0" flipV="0">
-            <a:off x="9525000" y="866775"/>
-            <a:ext cx="2057400" cy="276225"/>
+              <a:t>十四个字，好在哪</a:t>
+            </a:r>
+            <a:endParaRPr/>
+          </a:p>
+        </p:txBody>
+      </p:sp>
+      <p:sp>
+        <p:nvSpPr>
+          <p:cNvPr id="148" name="" descr="{&quot;isTemplate&quot;:true,&quot;type&quot;:&quot;text&quot;}"/>
+          <p:cNvSpPr txBox="1"/>
+          <p:nvPr/>
+        </p:nvSpPr>
+        <p:spPr>
+          <a:xfrm rot="0" flipH="0" flipV="0">
+            <a:off x="10210800" y="866775"/>
+            <a:ext cx="1371600" cy="276225"/>
           </a:xfrm>
           <a:prstGeom prst="rect"/>
         </p:spPr>
@@ -5940,29 +5975,29 @@
                 <a:latin typeface="宋体"/>
                 <a:ea typeface="宋体"/>
               </a:rPr>
-              <a:t>导入与诊断</a:t>
-            </a:r>
-            <a:endParaRPr/>
-          </a:p>
-        </p:txBody>
-      </p:sp>
-      <p:sp>
-        <p:nvSpPr>
-          <p:cNvPr id="148" name=""/>
+              <a:t>诊断</a:t>
+            </a:r>
+            <a:endParaRPr/>
+          </a:p>
+        </p:txBody>
+      </p:sp>
+      <p:sp>
+        <p:nvSpPr>
+          <p:cNvPr id="149" name=""/>
           <p:cNvSpPr/>
           <p:nvPr/>
         </p:nvSpPr>
         <p:spPr>
           <a:xfrm rot="0" flipH="0" flipV="0">
-            <a:off x="609600" y="1333500"/>
-            <a:ext cx="3505200" cy="1905000"/>
+            <a:off x="609600" y="2400300"/>
+            <a:ext cx="10972800" cy="1352550"/>
           </a:xfrm>
           <a:prstGeom prst="rect">
             <a:avLst/>
           </a:prstGeom>
           <a:solidFill>
             <a:srgbClr val="1F3A34">
-              <a:alpha val="6000"/>
+              <a:alpha val="5000"/>
             </a:srgbClr>
           </a:solidFill>
           <a:ln/>
@@ -5974,175 +6009,53 @@
       </p:sp>
       <p:sp>
         <p:nvSpPr>
-          <p:cNvPr id="149" name="" descr="{&quot;isTemplate&quot;:true,&quot;type&quot;:&quot;text&quot;}"/>
-          <p:cNvSpPr txBox="1"/>
-          <p:nvPr/>
-        </p:nvSpPr>
-        <p:spPr>
-          <a:xfrm rot="0" flipH="0" flipV="0">
-            <a:off x="1981200" y="2057400"/>
-            <a:ext cx="762000" cy="457200"/>
-          </a:xfrm>
-          <a:prstGeom prst="rect"/>
-        </p:spPr>
-        <p:txBody>
-          <a:bodyPr wrap="none" lIns="0" tIns="0" rIns="0" bIns="0"/>
-          <a:p>
-            <a:pPr>
-              <a:lnSpc>
-                <a:spcPct val="100000"/>
-              </a:lnSpc>
-            </a:pPr>
-            <a:r>
-              <a:rPr lang="zh-CN" sz="3000" b="1">
+          <p:cNvPr id="150" name="" descr="{&quot;isTemplate&quot;:true,&quot;type&quot;:&quot;text&quot;}"/>
+          <p:cNvSpPr txBox="1"/>
+          <p:nvPr/>
+        </p:nvSpPr>
+        <p:spPr>
+          <a:xfrm rot="0" flipH="0" flipV="0">
+            <a:off x="990600" y="2705100"/>
+            <a:ext cx="10210800" cy="742950"/>
+          </a:xfrm>
+          <a:prstGeom prst="rect"/>
+        </p:spPr>
+        <p:txBody>
+          <a:bodyPr wrap="none" lIns="0" tIns="0" rIns="0" bIns="0"/>
+          <a:p>
+            <a:pPr>
+              <a:lnSpc>
+                <a:spcPct val="190000"/>
+              </a:lnSpc>
+            </a:pPr>
+            <a:r>
+              <a:rPr lang="zh-CN" sz="2550" spc="150">
                 <a:solidFill>
                   <a:srgbClr val="1F3A34"/>
                 </a:solidFill>
                 <a:latin typeface="宋体"/>
                 <a:ea typeface="宋体"/>
               </a:rPr>
-              <a:t>梧桐</a:t>
-            </a:r>
-            <a:endParaRPr/>
-          </a:p>
-        </p:txBody>
-      </p:sp>
-      <p:sp>
-        <p:nvSpPr>
-          <p:cNvPr id="150" name=""/>
+              <a:t>寻寻觅觅，冷冷清清，凄凄惨惨戚戚。</a:t>
+            </a:r>
+            <a:endParaRPr/>
+          </a:p>
+        </p:txBody>
+      </p:sp>
+      <p:sp>
+        <p:nvSpPr>
+          <p:cNvPr id="151" name=""/>
           <p:cNvSpPr/>
           <p:nvPr/>
         </p:nvSpPr>
         <p:spPr>
           <a:xfrm rot="0" flipH="0" flipV="0">
-            <a:off x="4343400" y="1333500"/>
-            <a:ext cx="3505200" cy="1905000"/>
-          </a:xfrm>
-          <a:prstGeom prst="rect">
-            <a:avLst/>
-          </a:prstGeom>
-          <a:solidFill>
-            <a:srgbClr val="1F3A34">
-              <a:alpha val="6000"/>
-            </a:srgbClr>
-          </a:solidFill>
-          <a:ln/>
-        </p:spPr>
-        <p:txBody>
-          <a:bodyPr/>
-          <a:p/>
-        </p:txBody>
-      </p:sp>
-      <p:sp>
-        <p:nvSpPr>
-          <p:cNvPr id="151" name="" descr="{&quot;isTemplate&quot;:true,&quot;type&quot;:&quot;text&quot;}"/>
-          <p:cNvSpPr txBox="1"/>
-          <p:nvPr/>
-        </p:nvSpPr>
-        <p:spPr>
-          <a:xfrm rot="0" flipH="0" flipV="0">
-            <a:off x="5715000" y="2057400"/>
-            <a:ext cx="762000" cy="457200"/>
-          </a:xfrm>
-          <a:prstGeom prst="rect"/>
-        </p:spPr>
-        <p:txBody>
-          <a:bodyPr wrap="none" lIns="0" tIns="0" rIns="0" bIns="0"/>
-          <a:p>
-            <a:pPr>
-              <a:lnSpc>
-                <a:spcPct val="100000"/>
-              </a:lnSpc>
-            </a:pPr>
-            <a:r>
-              <a:rPr lang="zh-CN" sz="3000" b="1">
-                <a:solidFill>
-                  <a:srgbClr val="1F3A34"/>
-                </a:solidFill>
-                <a:latin typeface="宋体"/>
-                <a:ea typeface="宋体"/>
-              </a:rPr>
-              <a:t>细雨</a:t>
-            </a:r>
-            <a:endParaRPr/>
-          </a:p>
-        </p:txBody>
-      </p:sp>
-      <p:sp>
-        <p:nvSpPr>
-          <p:cNvPr id="152" name=""/>
-          <p:cNvSpPr/>
-          <p:nvPr/>
-        </p:nvSpPr>
-        <p:spPr>
-          <a:xfrm rot="0" flipH="0" flipV="0">
-            <a:off x="8077200" y="1333500"/>
-            <a:ext cx="3505200" cy="1905000"/>
-          </a:xfrm>
-          <a:prstGeom prst="rect">
-            <a:avLst/>
-          </a:prstGeom>
-          <a:solidFill>
-            <a:srgbClr val="1F3A34">
-              <a:alpha val="6000"/>
-            </a:srgbClr>
-          </a:solidFill>
-          <a:ln/>
-        </p:spPr>
-        <p:txBody>
-          <a:bodyPr/>
-          <a:p/>
-        </p:txBody>
-      </p:sp>
-      <p:sp>
-        <p:nvSpPr>
-          <p:cNvPr id="153" name="" descr="{&quot;isTemplate&quot;:true,&quot;type&quot;:&quot;text&quot;}"/>
-          <p:cNvSpPr txBox="1"/>
-          <p:nvPr/>
-        </p:nvSpPr>
-        <p:spPr>
-          <a:xfrm rot="0" flipH="0" flipV="0">
-            <a:off x="9448800" y="2057400"/>
-            <a:ext cx="762000" cy="457200"/>
-          </a:xfrm>
-          <a:prstGeom prst="rect"/>
-        </p:spPr>
-        <p:txBody>
-          <a:bodyPr wrap="none" lIns="0" tIns="0" rIns="0" bIns="0"/>
-          <a:p>
-            <a:pPr>
-              <a:lnSpc>
-                <a:spcPct val="100000"/>
-              </a:lnSpc>
-            </a:pPr>
-            <a:r>
-              <a:rPr lang="zh-CN" sz="3000" b="1">
-                <a:solidFill>
-                  <a:srgbClr val="1F3A34"/>
-                </a:solidFill>
-                <a:latin typeface="宋体"/>
-                <a:ea typeface="宋体"/>
-              </a:rPr>
-              <a:t>黄花</a:t>
-            </a:r>
-            <a:endParaRPr/>
-          </a:p>
-        </p:txBody>
-      </p:sp>
-      <p:sp>
-        <p:nvSpPr>
-          <p:cNvPr id="154" name=""/>
-          <p:cNvSpPr/>
-          <p:nvPr/>
-        </p:nvSpPr>
-        <p:spPr>
-          <a:xfrm rot="0" flipH="0" flipV="0">
-            <a:off x="609600" y="3505200"/>
-            <a:ext cx="11010900" cy="971550"/>
+            <a:off x="609600" y="4057650"/>
+            <a:ext cx="11010900" cy="714375"/>
           </a:xfrm>
           <a:custGeom>
             <a:pathLst>
-              <a:path w="1156" h="102">
+              <a:path w="1156" h="75">
                 <a:moveTo>
                   <a:pt x="0" y="0"/>
                 </a:moveTo>
@@ -6150,10 +6063,10 @@
                   <a:pt x="4" y="0"/>
                 </a:lnTo>
                 <a:lnTo>
-                  <a:pt x="4" y="102"/>
+                  <a:pt x="4" y="75"/>
                 </a:lnTo>
                 <a:lnTo>
-                  <a:pt x="0" y="102"/>
+                  <a:pt x="0" y="75"/>
                 </a:lnTo>
                 <a:close/>
               </a:path>
@@ -6171,23 +6084,23 @@
       </p:sp>
       <p:sp>
         <p:nvSpPr>
-          <p:cNvPr id="155" name="" descr="{&quot;isTemplate&quot;:true,&quot;type&quot;:&quot;text&quot;}"/>
-          <p:cNvSpPr txBox="1"/>
-          <p:nvPr/>
-        </p:nvSpPr>
-        <p:spPr>
-          <a:xfrm rot="0" flipH="0" flipV="0">
-            <a:off x="876300" y="3505200"/>
-            <a:ext cx="10706100" cy="581025"/>
-          </a:xfrm>
-          <a:prstGeom prst="rect"/>
-        </p:spPr>
-        <p:txBody>
-          <a:bodyPr wrap="none" lIns="0" tIns="0" rIns="0" bIns="0"/>
-          <a:p>
-            <a:pPr>
-              <a:lnSpc>
-                <a:spcPct val="180000"/>
+          <p:cNvPr id="152" name="" descr="{&quot;isTemplate&quot;:true,&quot;type&quot;:&quot;text&quot;}"/>
+          <p:cNvSpPr txBox="1"/>
+          <p:nvPr/>
+        </p:nvSpPr>
+        <p:spPr>
+          <a:xfrm rot="0" flipH="0" flipV="0">
+            <a:off x="876300" y="4057650"/>
+            <a:ext cx="10706100" cy="323850"/>
+          </a:xfrm>
+          <a:prstGeom prst="rect"/>
+        </p:spPr>
+        <p:txBody>
+          <a:bodyPr wrap="none" lIns="0" tIns="0" rIns="0" bIns="0"/>
+          <a:p>
+            <a:pPr>
+              <a:lnSpc>
+                <a:spcPct val="100000"/>
               </a:lnSpc>
             </a:pPr>
             <a:r>
@@ -6198,21 +6111,21 @@
                 <a:latin typeface="宋体"/>
                 <a:ea typeface="宋体"/>
               </a:rPr>
-              <a:t>各写一个形容词，再圈出词里让你这么写的那个字。</a:t>
-            </a:r>
-            <a:endParaRPr/>
-          </a:p>
-        </p:txBody>
-      </p:sp>
-      <p:sp>
-        <p:nvSpPr>
-          <p:cNvPr id="156" name="" descr="{&quot;isTemplate&quot;:true,&quot;type&quot;:&quot;text&quot;}"/>
-          <p:cNvSpPr txBox="1"/>
-          <p:nvPr/>
-        </p:nvSpPr>
-        <p:spPr>
-          <a:xfrm rot="0" flipH="0" flipV="0">
-            <a:off x="876300" y="4200525"/>
+              <a:t>这十四个字，好在哪？写一句你的答案。</a:t>
+            </a:r>
+            <a:endParaRPr/>
+          </a:p>
+        </p:txBody>
+      </p:sp>
+      <p:sp>
+        <p:nvSpPr>
+          <p:cNvPr id="153" name="" descr="{&quot;isTemplate&quot;:true,&quot;type&quot;:&quot;text&quot;}"/>
+          <p:cNvSpPr txBox="1"/>
+          <p:nvPr/>
+        </p:nvSpPr>
+        <p:spPr>
+          <a:xfrm rot="0" flipH="0" flipV="0">
+            <a:off x="876300" y="4495800"/>
             <a:ext cx="10706100" cy="276225"/>
           </a:xfrm>
           <a:prstGeom prst="rect"/>
@@ -6233,15 +6146,15 @@
                 <a:latin typeface="宋体"/>
                 <a:ea typeface="宋体"/>
               </a:rPr>
-              <a:t>写不出“哪个字”，先放着，这节课就是来解决它的。</a:t>
-            </a:r>
-            <a:endParaRPr/>
-          </a:p>
-        </p:txBody>
-      </p:sp>
-      <p:sp>
-        <p:nvSpPr>
-          <p:cNvPr id="157" name=""/>
+              <a:t>答案会被原样抄在黑板上，这节课结束时再回头看。</a:t>
+            </a:r>
+            <a:endParaRPr/>
+          </a:p>
+        </p:txBody>
+      </p:sp>
+      <p:sp>
+        <p:nvSpPr>
+          <p:cNvPr id="154" name=""/>
           <p:cNvSpPr/>
           <p:nvPr/>
         </p:nvSpPr>
@@ -6283,7 +6196,7 @@
       </p:sp>
       <p:sp>
         <p:nvSpPr>
-          <p:cNvPr id="158" name="" descr="{&quot;isTemplate&quot;:true,&quot;type&quot;:&quot;text&quot;}"/>
+          <p:cNvPr id="155" name="" descr="{&quot;isTemplate&quot;:true,&quot;type&quot;:&quot;text&quot;}"/>
           <p:cNvSpPr txBox="1"/>
           <p:nvPr/>
         </p:nvSpPr>
@@ -6338,7 +6251,7 @@
       </p:sp>
       <p:sp>
         <p:nvSpPr>
-          <p:cNvPr id="159" name="" descr="{&quot;isTemplate&quot;:true,&quot;type&quot;:&quot;text&quot;}"/>
+          <p:cNvPr id="156" name="" descr="{&quot;isTemplate&quot;:true,&quot;type&quot;:&quot;text&quot;}"/>
           <p:cNvSpPr txBox="1"/>
           <p:nvPr/>
         </p:nvSpPr>
@@ -6381,7 +6294,7 @@
   <p:cSld>
     <p:spTree>
       <p:nvGrpSpPr>
-        <p:cNvPr id="160" name="" descr="&lt;Slide style={{ background: '#F5F1E6', padding: '48px 64px', fontFamily: '宋体' }}&gt;&#13;&#10;  &lt;Box style={{ flexDirection: 'row', justifyContent: 'space-between', alignItems: 'flex-end', height: 72 }}&gt;&#13;&#10;    &lt;Text style={{ fontSize: 44, fontWeight: 'bold', color: '#1F3A34', lineHeight: 1.2 }}&gt;一个“愁”字，够不够用&lt;/Text&gt;&#13;&#10;    &lt;Text style={{ fontSize: 24, color: '#6B6B6B' }}&gt;主问题&lt;/Text&gt;&#13;&#10;  &lt;/Box&gt;&#13;&#10;  &lt;Box style={{ height: 472, marginTop: 20, flexDirection: 'column' }}&gt;&#13;&#10;  &lt;Box style={{ height: 472, justifyContent: 'center', flexDirection: 'column' }}&gt;&#13;&#10;    &lt;Text style={{ fontSize: 56, fontWeight: 'bold', color: '#1F3A34', lineHeight: 1.5 }}&gt;全词只写一个“愁”，&lt;/Text&gt;&#13;&#10;    &lt;Text style={{ fontSize: 56, fontWeight: 'bold', color: '#1F3A34', lineHeight: 1.5 }}&gt;为什么结尾说“怎一个愁字了得”？&lt;/Text&gt;&#13;&#10;    &lt;Text style={{ fontSize: 24, color: '#6B6B6B', marginTop: 40 }}&gt;这个问题，全课只答一次。&lt;/Text&gt;&#13;&#10;  &lt;/Box&gt;&#13;&#10;  &lt;/Box&gt;&#13;&#10;  &lt;Box style={{ height: 40, marginTop: 12, borderTop: '1px solid rgba(31,58,52,0.2)', flexDirection: 'row', justifyContent: 'space-between', alignItems: 'center', paddingTop: 8 }}&gt;&#13;&#10;    &lt;Text style={{ fontSize: 24, color: '#6B6B6B' }}&gt;《声声慢》· 李清照&lt;/Text&gt;&#13;&#10;    &lt;Text style={{ fontSize: 24, color: '#B4552D' }}&gt;04/16&lt;/Text&gt;&#13;&#10;  &lt;/Box&gt;&#13;&#10;&lt;/Slide&gt;"/>
+        <p:cNvPr id="157" name="" descr="&lt;Slide style={{ background: '#F5F1E6', padding: '48px 64px', fontFamily: '宋体' }}&gt;&#13;&#10;  &lt;Box style={{ flexDirection: 'row', justifyContent: 'space-between', alignItems: 'flex-end', height: 72 }}&gt;&#13;&#10;    &lt;Text style={{ fontSize: 44, fontWeight: 'bold', color: '#1F3A34', lineHeight: 1.2 }}&gt;一个“愁”字，够不够用&lt;/Text&gt;&#13;&#10;    &lt;Text style={{ fontSize: 24, color: '#6B6B6B' }}&gt;主问题&lt;/Text&gt;&#13;&#10;  &lt;/Box&gt;&#13;&#10;  &lt;Box style={{ height: 472, marginTop: 20, flexDirection: 'column' }}&gt;&#13;&#10;  &lt;Box style={{ height: 472, justifyContent: 'center', flexDirection: 'column' }}&gt;&#13;&#10;    &lt;Text style={{ fontSize: 44, fontWeight: 'bold', color: '#1F3A34', lineHeight: 1.5 }}&gt;全词只写一个“愁”，&lt;/Text&gt;&#13;&#10;    &lt;Text style={{ fontSize: 44, fontWeight: 'bold', color: '#1F3A34', lineHeight: 1.5 }}&gt;为什么结尾说“怎一个愁字了得”？&lt;/Text&gt;&#13;&#10;    &lt;Text style={{ fontSize: 24, color: '#6B6B6B', marginTop: 40 }}&gt;这个问题，全课只答一次。&lt;/Text&gt;&#13;&#10;  &lt;/Box&gt;&#13;&#10;  &lt;/Box&gt;&#13;&#10;  &lt;Box style={{ height: 40, marginTop: 12, borderTop: '1px solid rgba(31,58,52,0.2)', flexDirection: 'row', justifyContent: 'space-between', alignItems: 'center', paddingTop: 8 }}&gt;&#13;&#10;    &lt;Text style={{ fontSize: 24, color: '#6B6B6B' }}&gt;《声声慢》· 李清照&lt;/Text&gt;&#13;&#10;    &lt;Text style={{ fontSize: 24, color: '#B4552D' }}&gt;04/16&lt;/Text&gt;&#13;&#10;  &lt;/Box&gt;&#13;&#10;&lt;/Slide&gt;"/>
         <p:cNvGrpSpPr/>
         <p:nvPr/>
       </p:nvGrpSpPr>
@@ -6395,7 +6308,7 @@
       </p:grpSpPr>
       <p:sp>
         <p:nvSpPr>
-          <p:cNvPr id="161" name=""/>
+          <p:cNvPr id="158" name=""/>
           <p:cNvSpPr/>
           <p:nvPr/>
         </p:nvSpPr>
@@ -6419,7 +6332,7 @@
       </p:sp>
       <p:sp>
         <p:nvSpPr>
-          <p:cNvPr id="162" name="" descr="{&quot;isTemplate&quot;:true,&quot;type&quot;:&quot;text&quot;}"/>
+          <p:cNvPr id="159" name="" descr="{&quot;isTemplate&quot;:true,&quot;type&quot;:&quot;text&quot;}"/>
           <p:cNvSpPr txBox="1"/>
           <p:nvPr/>
         </p:nvSpPr>
@@ -6454,7 +6367,7 @@
       </p:sp>
       <p:sp>
         <p:nvSpPr>
-          <p:cNvPr id="163" name="" descr="{&quot;isTemplate&quot;:true,&quot;type&quot;:&quot;text&quot;}"/>
+          <p:cNvPr id="160" name="" descr="{&quot;isTemplate&quot;:true,&quot;type&quot;:&quot;text&quot;}"/>
           <p:cNvSpPr txBox="1"/>
           <p:nvPr/>
         </p:nvSpPr>
@@ -6489,14 +6402,14 @@
       </p:sp>
       <p:sp>
         <p:nvSpPr>
-          <p:cNvPr id="164" name="" descr="{&quot;isTemplate&quot;:true,&quot;type&quot;:&quot;text&quot;}"/>
-          <p:cNvSpPr txBox="1"/>
-          <p:nvPr/>
-        </p:nvSpPr>
-        <p:spPr>
-          <a:xfrm rot="0" flipH="0" flipV="0">
-            <a:off x="609600" y="2295525"/>
-            <a:ext cx="10972800" cy="962025"/>
+          <p:cNvPr id="161" name="" descr="{&quot;isTemplate&quot;:true,&quot;type&quot;:&quot;text&quot;}"/>
+          <p:cNvSpPr txBox="1"/>
+          <p:nvPr/>
+        </p:nvSpPr>
+        <p:spPr>
+          <a:xfrm rot="0" flipH="0" flipV="0">
+            <a:off x="609600" y="2495550"/>
+            <a:ext cx="10972800" cy="762000"/>
           </a:xfrm>
           <a:prstGeom prst="rect"/>
         </p:spPr>
@@ -6509,7 +6422,7 @@
               </a:lnSpc>
             </a:pPr>
             <a:r>
-              <a:rPr lang="zh-CN" sz="4200" b="1">
+              <a:rPr lang="zh-CN" sz="3300" b="1">
                 <a:solidFill>
                   <a:srgbClr val="1F3A34"/>
                 </a:solidFill>
@@ -6524,14 +6437,14 @@
       </p:sp>
       <p:sp>
         <p:nvSpPr>
-          <p:cNvPr id="165" name="" descr="{&quot;isTemplate&quot;:true,&quot;type&quot;:&quot;text&quot;}"/>
+          <p:cNvPr id="162" name="" descr="{&quot;isTemplate&quot;:true,&quot;type&quot;:&quot;text&quot;}"/>
           <p:cNvSpPr txBox="1"/>
           <p:nvPr/>
         </p:nvSpPr>
         <p:spPr>
           <a:xfrm rot="0" flipH="0" flipV="0">
             <a:off x="609600" y="3257550"/>
-            <a:ext cx="10972800" cy="962025"/>
+            <a:ext cx="10972800" cy="762000"/>
           </a:xfrm>
           <a:prstGeom prst="rect"/>
         </p:spPr>
@@ -6544,7 +6457,7 @@
               </a:lnSpc>
             </a:pPr>
             <a:r>
-              <a:rPr lang="zh-CN" sz="4200" b="1">
+              <a:rPr lang="zh-CN" sz="3300" b="1">
                 <a:solidFill>
                   <a:srgbClr val="1F3A34"/>
                 </a:solidFill>
@@ -6559,13 +6472,13 @@
       </p:sp>
       <p:sp>
         <p:nvSpPr>
-          <p:cNvPr id="166" name="" descr="{&quot;isTemplate&quot;:true,&quot;type&quot;:&quot;text&quot;}"/>
-          <p:cNvSpPr txBox="1"/>
-          <p:nvPr/>
-        </p:nvSpPr>
-        <p:spPr>
-          <a:xfrm rot="0" flipH="0" flipV="0">
-            <a:off x="609600" y="4600575"/>
+          <p:cNvPr id="163" name="" descr="{&quot;isTemplate&quot;:true,&quot;type&quot;:&quot;text&quot;}"/>
+          <p:cNvSpPr txBox="1"/>
+          <p:nvPr/>
+        </p:nvSpPr>
+        <p:spPr>
+          <a:xfrm rot="0" flipH="0" flipV="0">
+            <a:off x="609600" y="4400550"/>
             <a:ext cx="10972800" cy="276225"/>
           </a:xfrm>
           <a:prstGeom prst="rect"/>
@@ -6594,7 +6507,7 @@
       </p:sp>
       <p:sp>
         <p:nvSpPr>
-          <p:cNvPr id="167" name=""/>
+          <p:cNvPr id="164" name=""/>
           <p:cNvSpPr/>
           <p:nvPr/>
         </p:nvSpPr>
@@ -6636,7 +6549,7 @@
       </p:sp>
       <p:sp>
         <p:nvSpPr>
-          <p:cNvPr id="168" name="" descr="{&quot;isTemplate&quot;:true,&quot;type&quot;:&quot;text&quot;}"/>
+          <p:cNvPr id="165" name="" descr="{&quot;isTemplate&quot;:true,&quot;type&quot;:&quot;text&quot;}"/>
           <p:cNvSpPr txBox="1"/>
           <p:nvPr/>
         </p:nvSpPr>
@@ -6691,7 +6604,7 @@
       </p:sp>
       <p:sp>
         <p:nvSpPr>
-          <p:cNvPr id="169" name="" descr="{&quot;isTemplate&quot;:true,&quot;type&quot;:&quot;text&quot;}"/>
+          <p:cNvPr id="166" name="" descr="{&quot;isTemplate&quot;:true,&quot;type&quot;:&quot;text&quot;}"/>
           <p:cNvSpPr txBox="1"/>
           <p:nvPr/>
         </p:nvSpPr>
@@ -6734,7 +6647,7 @@
   <p:cSld>
     <p:spTree>
       <p:nvGrpSpPr>
-        <p:cNvPr id="170" name="" descr="&lt;Slide style={{ background: '#F5F1E6', padding: '48px 64px', fontFamily: '宋体' }}&gt;&#13;&#10;  &lt;Box style={{ flexDirection: 'row', justifyContent: 'space-between', alignItems: 'flex-end', height: 72 }}&gt;&#13;&#10;    &lt;Text style={{ fontSize: 40, fontWeight: 'bold', color: '#1F3A34', lineHeight: 1.2 }}&gt;任务一：十四字怎么走&lt;/Text&gt;&#13;&#10;    &lt;Text style={{ fontSize: 24, color: '#6B6B6B' }}&gt;环节二 · 任务一&lt;/Text&gt;&#13;&#10;  &lt;/Box&gt;&#13;&#10;  &lt;Box style={{ height: 472, marginTop: 20, flexDirection: 'column' }}&gt;&#13;&#10;  &lt;Box style={{ marginTop: 40, padding: '36px 40px', background: 'rgba(31,58,52,0.05)', flexDirection: 'column' }}&gt;&#13;&#10;    &lt;Text style={{ fontSize: 34, color: '#1F3A34', lineHeight: 2.1, letterSpacing: 2 }}&gt;寻寻觅觅，冷冷清清，凄凄惨惨戚戚。&lt;/Text&gt;&#13;&#10;  &lt;/Box&gt;&#13;&#10;  &lt;Box style={{ marginTop: 32, flexDirection: 'row', alignItems: 'center' }}&gt;&#13;&#10;    &lt;Text style={{ fontSize: 28, color: '#1F3A34' }}&gt;先读一遍，数一数你在哪里停过。&lt;/Text&gt;&#13;&#10;  &lt;/Box&gt;&#13;&#10;  &lt;/Box&gt;&#13;&#10;  &lt;Box style={{ height: 40, marginTop: 12, borderTop: '1px solid rgba(31,58,52,0.2)', flexDirection: 'row', justifyContent: 'space-between', alignItems: 'center', paddingTop: 8 }}&gt;&#13;&#10;    &lt;Text style={{ fontSize: 24, color: '#6B6B6B' }}&gt;《声声慢》· 李清照&lt;/Text&gt;&#13;&#10;    &lt;Text style={{ fontSize: 24, color: '#B4552D' }}&gt;05/16&lt;/Text&gt;&#13;&#10;  &lt;/Box&gt;&#13;&#10;&lt;/Slide&gt;"/>
+        <p:cNvPr id="167" name="" descr="&lt;Slide style={{ background: '#F5F1E6', padding: '48px 64px', fontFamily: '宋体' }}&gt;&#13;&#10;  &lt;Box style={{ flexDirection: 'row', justifyContent: 'space-between', alignItems: 'flex-end', height: 72 }}&gt;&#13;&#10;    &lt;Text style={{ fontSize: 40, fontWeight: 'bold', color: '#1F3A34', lineHeight: 1.2 }}&gt;任务一：十四字怎么走&lt;/Text&gt;&#13;&#10;    &lt;Text style={{ fontSize: 24, color: '#6B6B6B' }}&gt;环节二 · 任务一&lt;/Text&gt;&#13;&#10;  &lt;/Box&gt;&#13;&#10;  &lt;Box style={{ height: 472, marginTop: 20, flexDirection: 'column' }}&gt;&#13;&#10;  &lt;Box style={{ marginTop: 40, padding: '36px 40px', background: 'rgba(31,58,52,0.05)' }}&gt;&#13;&#10;    &lt;Text style={{ fontSize: 34, color: '#1F3A34', lineHeight: 2.1, letterSpacing: 2 }}&gt;寻寻觅觅，冷冷清清，凄凄惨惨戚戚。&lt;/Text&gt;&#13;&#10;  &lt;/Box&gt;&#13;&#10;  &lt;Box style={{ marginTop: 32 }}&gt;&#13;&#10;    &lt;Text style={{ fontSize: 28, color: '#1F3A34' }}&gt;先读一遍，数一数你在哪里停过。&lt;/Text&gt;&#13;&#10;  &lt;/Box&gt;&#13;&#10;  &lt;/Box&gt;&#13;&#10;  &lt;Box style={{ height: 40, marginTop: 12, borderTop: '1px solid rgba(31,58,52,0.2)', flexDirection: 'row', justifyContent: 'space-between', alignItems: 'center', paddingTop: 8 }}&gt;&#13;&#10;    &lt;Text style={{ fontSize: 24, color: '#6B6B6B' }}&gt;《声声慢》· 李清照&lt;/Text&gt;&#13;&#10;    &lt;Text style={{ fontSize: 24, color: '#B4552D' }}&gt;05/16&lt;/Text&gt;&#13;&#10;  &lt;/Box&gt;&#13;&#10;&lt;/Slide&gt;"/>
         <p:cNvGrpSpPr/>
         <p:nvPr/>
       </p:nvGrpSpPr>
@@ -6748,7 +6661,7 @@
       </p:grpSpPr>
       <p:sp>
         <p:nvSpPr>
-          <p:cNvPr id="171" name=""/>
+          <p:cNvPr id="168" name=""/>
           <p:cNvSpPr/>
           <p:nvPr/>
         </p:nvSpPr>
@@ -6772,7 +6685,7 @@
       </p:sp>
       <p:sp>
         <p:nvSpPr>
-          <p:cNvPr id="172" name="" descr="{&quot;isTemplate&quot;:true,&quot;type&quot;:&quot;text&quot;}"/>
+          <p:cNvPr id="169" name="" descr="{&quot;isTemplate&quot;:true,&quot;type&quot;:&quot;text&quot;}"/>
           <p:cNvSpPr txBox="1"/>
           <p:nvPr/>
         </p:nvSpPr>
@@ -6807,7 +6720,7 @@
       </p:sp>
       <p:sp>
         <p:nvSpPr>
-          <p:cNvPr id="173" name="" descr="{&quot;isTemplate&quot;:true,&quot;type&quot;:&quot;text&quot;}"/>
+          <p:cNvPr id="170" name="" descr="{&quot;isTemplate&quot;:true,&quot;type&quot;:&quot;text&quot;}"/>
           <p:cNvSpPr txBox="1"/>
           <p:nvPr/>
         </p:nvSpPr>
@@ -6862,7 +6775,7 @@
       </p:sp>
       <p:sp>
         <p:nvSpPr>
-          <p:cNvPr id="174" name=""/>
+          <p:cNvPr id="171" name=""/>
           <p:cNvSpPr/>
           <p:nvPr/>
         </p:nvSpPr>
@@ -6888,7 +6801,7 @@
       </p:sp>
       <p:sp>
         <p:nvSpPr>
-          <p:cNvPr id="175" name="" descr="{&quot;isTemplate&quot;:true,&quot;type&quot;:&quot;text&quot;}"/>
+          <p:cNvPr id="172" name="" descr="{&quot;isTemplate&quot;:true,&quot;type&quot;:&quot;text&quot;}"/>
           <p:cNvSpPr txBox="1"/>
           <p:nvPr/>
         </p:nvSpPr>
@@ -6923,14 +6836,14 @@
       </p:sp>
       <p:sp>
         <p:nvSpPr>
-          <p:cNvPr id="176" name="" descr="{&quot;isTemplate&quot;:true,&quot;type&quot;:&quot;text&quot;}"/>
+          <p:cNvPr id="173" name="" descr="{&quot;isTemplate&quot;:true,&quot;type&quot;:&quot;text&quot;}"/>
           <p:cNvSpPr txBox="1"/>
           <p:nvPr/>
         </p:nvSpPr>
         <p:spPr>
           <a:xfrm rot="0" flipH="0" flipV="0">
             <a:off x="609600" y="3524250"/>
-            <a:ext cx="4000500" cy="323850"/>
+            <a:ext cx="10972800" cy="323850"/>
           </a:xfrm>
           <a:prstGeom prst="rect"/>
         </p:spPr>
@@ -6958,7 +6871,7 @@
       </p:sp>
       <p:sp>
         <p:nvSpPr>
-          <p:cNvPr id="177" name=""/>
+          <p:cNvPr id="174" name=""/>
           <p:cNvSpPr/>
           <p:nvPr/>
         </p:nvSpPr>
@@ -7000,7 +6913,7 @@
       </p:sp>
       <p:sp>
         <p:nvSpPr>
-          <p:cNvPr id="178" name="" descr="{&quot;isTemplate&quot;:true,&quot;type&quot;:&quot;text&quot;}"/>
+          <p:cNvPr id="175" name="" descr="{&quot;isTemplate&quot;:true,&quot;type&quot;:&quot;text&quot;}"/>
           <p:cNvSpPr txBox="1"/>
           <p:nvPr/>
         </p:nvSpPr>
@@ -7055,7 +6968,7 @@
       </p:sp>
       <p:sp>
         <p:nvSpPr>
-          <p:cNvPr id="179" name="" descr="{&quot;isTemplate&quot;:true,&quot;type&quot;:&quot;text&quot;}"/>
+          <p:cNvPr id="176" name="" descr="{&quot;isTemplate&quot;:true,&quot;type&quot;:&quot;text&quot;}"/>
           <p:cNvSpPr txBox="1"/>
           <p:nvPr/>
         </p:nvSpPr>
@@ -7098,7 +7011,7 @@
   <p:cSld>
     <p:spTree>
       <p:nvGrpSpPr>
-        <p:cNvPr id="180" name="" descr="&lt;Slide style={{ background: '#F5F1E6', padding: '48px 64px', fontFamily: '宋体' }}&gt;&#13;&#10;  &lt;Box style={{ flexDirection: 'row', justifyContent: 'space-between', alignItems: 'flex-end', height: 72 }}&gt;&#13;&#10;    &lt;Text style={{ fontSize: 40, fontWeight: 'bold', color: '#1F3A34', lineHeight: 1.2 }}&gt;标一动，标一态&lt;/Text&gt;&#13;&#10;    &lt;Text style={{ fontSize: 24, color: '#6B6B6B' }}&gt;环节二 · 任务一&lt;/Text&gt;&#13;&#10;  &lt;/Box&gt;&#13;&#10;  &lt;Box style={{ height: 472, marginTop: 20, flexDirection: 'column' }}&gt;&#13;&#10;  &lt;Box style={{ flexDirection: 'row', height: 472 }}&gt;&#13;&#10;    &lt;Box style={{ width: 420, paddingRight: 40, flexDirection: 'column', justifyContent: 'center' }}&gt;&#13;&#10;      &lt;Text style={{ fontSize: 28, color: '#1F3A34', lineHeight: 1.9 }}&gt;给十四个字逐个标注：&lt;/Text&gt;&#13;&#10;      &lt;Text style={{ fontSize: 28, fontWeight: 'bold', color: '#B4552D', lineHeight: 1.9 }}&gt;写“找”的动作，还是“找不到”的状态？&lt;/Text&gt;&#13;&#10;      &lt;Text style={{ fontSize: 24, color: '#6B6B6B', marginTop: 20, lineHeight: 1.7 }}&gt;标完再读一遍，听听语速有没有变。&lt;/Text&gt;&#13;&#10;    &lt;/Box&gt;&#13;&#10;    &lt;Box style={{ flex: 1, flexDirection: 'column', justifyContent: 'center' }}&gt;&#13;&#10;      &lt;Box style={{ flexDirection: 'row', gap: 10 }}&gt;&#13;&#10;        &lt;Box style={{ width: 52, height: 150, border: '1px solid rgba(31,58,52,0.35)', alignItems: 'center', justifyContent: 'flex-start', paddingTop: 12 }}&gt;&#13;&#10;          &lt;Text style={{ fontSize: 28, color: '#1F3A34' }}&gt;寻&lt;/Text&gt;&#13;&#10;        &lt;/Box&gt;&lt;Box style={{ width: 52, height: 150, border: '1px solid rgba(31,58,52,0.35)', alignItems: 'center', justifyContent: 'flex-start', paddingTop: 12 }}&gt;&#13;&#10;          &lt;Text style={{ fontSize: 28, color: '#1F3A34' }}&gt;寻&lt;/Text&gt;&#13;&#10;        &lt;/Box&gt;&lt;Box style={{ width: 52, height: 150, border: '1px solid rgba(31,58,52,0.35)', alignItems: 'center', justifyContent: 'flex-start', paddingTop: 12 }}&gt;&#13;&#10;          &lt;Text style={{ fontSize: 28, color: '#1F3A34' }}&gt;觅&lt;/Text&gt;&#13;&#10;        &lt;/Box&gt;&lt;Box style={{ width: 52, height: 150, border: '1px solid rgba(31,58,52,0.35)', alignItems: 'center', justifyContent: 'flex-start', paddingTop: 12 }}&gt;&#13;&#10;          &lt;Text style={{ fontSize: 28, color: '#1F3A34' }}&gt;觅&lt;/Text&gt;&#13;&#10;        &lt;/Box&gt;&lt;Box style={{ width: 52, height: 150, border: '1px solid rgba(31,58,52,0.35)', alignItems: 'center', justifyContent: 'flex-start', paddingTop: 12 }}&gt;&#13;&#10;          &lt;Text style={{ fontSize: 28, color: '#1F3A34' }}&gt;冷&lt;/Text&gt;&#13;&#10;        &lt;/Box&gt;&lt;Box style={{ width: 52, height: 150, border: '1px solid rgba(31,58,52,0.35)', alignItems: 'center', justifyContent: 'flex-start', paddingTop: 12 }}&gt;&#13;&#10;          &lt;Text style={{ fontSize: 28, color: '#1F3A34' }}&gt;冷&lt;/Text&gt;&#13;&#10;        &lt;/Box&gt;&lt;Box style={{ width: 52, height: 150, border: '1px solid rgba(31,58,52,0.35)', alignItems: 'center', justifyContent: 'flex-start', paddingTop: 12 }}&gt;&#13;&#10;          &lt;Text style={{ fontSize: 28, color: '#1F3A34' }}&gt;清&lt;/Text&gt;&#13;&#10;        &lt;/Box&gt;&lt;Box style={{ width: 52, height: 150, border: '1px solid rgba(31,58,52,0.35)', alignItems: 'center', justifyContent: 'flex-start', paddingTop: 12 }}&gt;&#13;&#10;          &lt;Text style={{ fontSize: 28, color: '#1F3A34' }}&gt;清&lt;/Text&gt;&#13;&#10;        &lt;/Box&gt;&#13;&#10;      &lt;/Box&gt;&#13;&#10;      &lt;Box style={{ flexDirection: 'row', gap: 10, marginTop: 14 }}&gt;&#13;&#10;        &lt;Box style={{ width: 52, height: 150, border: '1px solid rgba(31,58,52,0.35)', alignItems: 'center', justifyContent: 'flex-start', paddingTop: 12 }}&gt;&#13;&#10;          &lt;Text style={{ fontSize: 28, color: '#1F3A34' }}&gt;凄&lt;/Text&gt;&#13;&#10;        &lt;/Box&gt;&lt;Box style={{ width: 52, height: 150, border: '1px solid rgba(31,58,52,0.35)', alignItems: 'center', justifyContent: 'flex-start', paddingTop: 12 }}&gt;&#13;&#10;          &lt;Text style={{ fontSize: 28, color: '#1F3A34' }}&gt;凄&lt;/Text&gt;&#13;&#10;        &lt;/Box&gt;&lt;Box style={{ width: 52, height: 150, border: '1px solid rgba(31,58,52,0.35)', alignItems: 'center', justifyContent: 'flex-start', paddingTop: 12 }}&gt;&#13;&#10;          &lt;Text style={{ fontSize: 28, color: '#1F3A34' }}&gt;惨&lt;/Text&gt;&#13;&#10;        &lt;/Box&gt;&lt;Box style={{ width: 52, height: 150, border: '1px solid rgba(31,58,52,0.35)', alignItems: 'center', justifyContent: 'flex-start', paddingTop: 12 }}&gt;&#13;&#10;          &lt;Text style={{ fontSize: 28, color: '#1F3A34' }}&gt;惨&lt;/Text&gt;&#13;&#10;        &lt;/Box&gt;&lt;Box style={{ width: 52, height: 150, border: '1px solid rgba(31,58,52,0.35)', alignItems: 'center', justifyContent: 'flex-start', paddingTop: 12 }}&gt;&#13;&#10;          &lt;Text style={{ fontSize: 28, color: '#1F3A34' }}&gt;戚&lt;/Text&gt;&#13;&#10;        &lt;/Box&gt;&lt;Box style={{ width: 52, height: 150, border: '1px solid rgba(31,58,52,0.35)', alignItems: 'center', justifyContent: 'flex-start', paddingTop: 12 }}&gt;&#13;&#10;          &lt;Text style={{ fontSize: 28, color: '#1F3A34' }}&gt;戚&lt;/Text&gt;&#13;&#10;        &lt;/Box&gt;&#13;&#10;      &lt;/Box&gt;&#13;&#10;      &lt;Text style={{ fontSize: 24, color: '#6B6B6B', marginTop: 20 }}&gt;每格一个字；下面留白处写“动”或“态”。&lt;/Text&gt;&#13;&#10;    &lt;/Box&gt;&#13;&#10;  &lt;/Box&gt;&#13;&#10;  &lt;/Box&gt;&#13;&#10;  &lt;Box style={{ height: 40, marginTop: 12, borderTop: '1px solid rgba(31,58,52,0.2)', flexDirection: 'row', justifyContent: 'space-between', alignItems: 'center', paddingTop: 8 }}&gt;&#13;&#10;    &lt;Text style={{ fontSize: 24, color: '#6B6B6B' }}&gt;《声声慢》· 李清照&lt;/Text&gt;&#13;&#10;    &lt;Text style={{ fontSize: 24, color: '#B4552D' }}&gt;06/16&lt;/Text&gt;&#13;&#10;  &lt;/Box&gt;&#13;&#10;&lt;/Slide&gt;"/>
+        <p:cNvPr id="177" name="" descr="&lt;Slide style={{ background: '#F5F1E6', padding: '48px 64px', fontFamily: '宋体' }}&gt;&#13;&#10;  &lt;Box style={{ flexDirection: 'row', justifyContent: 'space-between', alignItems: 'flex-end', height: 72 }}&gt;&#13;&#10;    &lt;Text style={{ fontSize: 40, fontWeight: 'bold', color: '#1F3A34', lineHeight: 1.2 }}&gt;由外，还是由内&lt;/Text&gt;&#13;&#10;    &lt;Text style={{ fontSize: 24, color: '#6B6B6B' }}&gt;环节二 · 任务一&lt;/Text&gt;&#13;&#10;  &lt;/Box&gt;&#13;&#10;  &lt;Box style={{ height: 472, marginTop: 20, flexDirection: 'column' }}&gt;&#13;&#10;  &lt;Box style={{ flexDirection: 'row', height: 472 }}&gt;&#13;&#10;    &lt;Box style={{ width: 420, paddingRight: 40, flexDirection: 'column', justifyContent: 'center' }}&gt;&#13;&#10;      &lt;Text style={{ fontSize: 28, color: '#1F3A34', lineHeight: 1.9 }}&gt;这十四个字，是从&lt;/Text&gt;&#13;&#10;      &lt;Text style={{ fontSize: 28, fontWeight: 'bold', color: '#B4552D', lineHeight: 1.9 }}&gt;外面&lt;/Text&gt;&#13;&#10;      &lt;Text style={{ fontSize: 28, color: '#1F3A34', lineHeight: 1.9 }}&gt;走到了&lt;/Text&gt;&#13;&#10;      &lt;Text style={{ fontSize: 28, fontWeight: 'bold', color: '#B4552D', lineHeight: 1.9 }}&gt;心里&lt;/Text&gt;&#13;&#10;      &lt;Text style={{ fontSize: 28, color: '#1F3A34', lineHeight: 1.9 }}&gt;吗？在哪一个字上拐的弯？&lt;/Text&gt;&#13;&#10;    &lt;/Box&gt;&#13;&#10;    &lt;Box style={{ flex: 1, flexDirection: 'column', justifyContent: 'center' }}&gt;&#13;&#10;      &lt;Box style={{ flexDirection: 'row', gap: 10 }}&gt;&#13;&#10;        &lt;Box style={{ width: 58, height: 150, border: '1px solid rgba(31,58,52,0.35)', alignItems: 'center', justifyContent: 'flex-start', paddingTop: 12 }}&gt;&#13;&#10;          &lt;Text style={{ fontSize: 28, color: '#1F3A34' }}&gt;寻&lt;/Text&gt;&#13;&#10;        &lt;/Box&gt;&lt;Box style={{ width: 58, height: 150, border: '1px solid rgba(31,58,52,0.35)', alignItems: 'center', justifyContent: 'flex-start', paddingTop: 12 }}&gt;&#13;&#10;          &lt;Text style={{ fontSize: 28, color: '#1F3A34' }}&gt;寻&lt;/Text&gt;&#13;&#10;        &lt;/Box&gt;&lt;Box style={{ width: 58, height: 150, border: '1px solid rgba(31,58,52,0.35)', alignItems: 'center', justifyContent: 'flex-start', paddingTop: 12 }}&gt;&#13;&#10;          &lt;Text style={{ fontSize: 28, color: '#1F3A34' }}&gt;觅&lt;/Text&gt;&#13;&#10;        &lt;/Box&gt;&lt;Box style={{ width: 58, height: 150, border: '1px solid rgba(31,58,52,0.35)', alignItems: 'center', justifyContent: 'flex-start', paddingTop: 12 }}&gt;&#13;&#10;          &lt;Text style={{ fontSize: 28, color: '#1F3A34' }}&gt;觅&lt;/Text&gt;&#13;&#10;        &lt;/Box&gt;&lt;Box style={{ width: 58, height: 150, border: '1px solid rgba(31,58,52,0.35)', alignItems: 'center', justifyContent: 'flex-start', paddingTop: 12 }}&gt;&#13;&#10;          &lt;Text style={{ fontSize: 28, color: '#1F3A34' }}&gt;冷&lt;/Text&gt;&#13;&#10;        &lt;/Box&gt;&lt;Box style={{ width: 58, height: 150, border: '1px solid rgba(31,58,52,0.35)', alignItems: 'center', justifyContent: 'flex-start', paddingTop: 12 }}&gt;&#13;&#10;          &lt;Text style={{ fontSize: 28, color: '#1F3A34' }}&gt;冷&lt;/Text&gt;&#13;&#10;        &lt;/Box&gt;&lt;Box style={{ width: 58, height: 150, border: '1px solid rgba(31,58,52,0.35)', alignItems: 'center', justifyContent: 'flex-start', paddingTop: 12 }}&gt;&#13;&#10;          &lt;Text style={{ fontSize: 28, color: '#1F3A34' }}&gt;清&lt;/Text&gt;&#13;&#10;        &lt;/Box&gt;&lt;Box style={{ width: 58, height: 150, border: '1px solid rgba(31,58,52,0.35)', alignItems: 'center', justifyContent: 'flex-start', paddingTop: 12 }}&gt;&#13;&#10;          &lt;Text style={{ fontSize: 28, color: '#1F3A34' }}&gt;清&lt;/Text&gt;&#13;&#10;        &lt;/Box&gt;&#13;&#10;      &lt;/Box&gt;&#13;&#10;      &lt;Box style={{ flexDirection: 'row', gap: 10, marginTop: 14 }}&gt;&#13;&#10;        &lt;Box style={{ width: 58, height: 150, border: '1px solid rgba(31,58,52,0.35)', alignItems: 'center', justifyContent: 'flex-start', paddingTop: 12 }}&gt;&#13;&#10;          &lt;Text style={{ fontSize: 28, color: '#1F3A34' }}&gt;凄&lt;/Text&gt;&#13;&#10;        &lt;/Box&gt;&lt;Box style={{ width: 58, height: 150, border: '1px solid rgba(31,58,52,0.35)', alignItems: 'center', justifyContent: 'flex-start', paddingTop: 12 }}&gt;&#13;&#10;          &lt;Text style={{ fontSize: 28, color: '#1F3A34' }}&gt;凄&lt;/Text&gt;&#13;&#10;        &lt;/Box&gt;&lt;Box style={{ width: 58, height: 150, border: '1px solid rgba(31,58,52,0.35)', alignItems: 'center', justifyContent: 'flex-start', paddingTop: 12 }}&gt;&#13;&#10;          &lt;Text style={{ fontSize: 28, color: '#1F3A34' }}&gt;惨&lt;/Text&gt;&#13;&#10;        &lt;/Box&gt;&lt;Box style={{ width: 58, height: 150, border: '1px solid rgba(31,58,52,0.35)', alignItems: 'center', justifyContent: 'flex-start', paddingTop: 12 }}&gt;&#13;&#10;          &lt;Text style={{ fontSize: 28, color: '#1F3A34' }}&gt;惨&lt;/Text&gt;&#13;&#10;        &lt;/Box&gt;&lt;Box style={{ width: 58, height: 150, border: '1px solid rgba(31,58,52,0.35)', alignItems: 'center', justifyContent: 'flex-start', paddingTop: 12 }}&gt;&#13;&#10;          &lt;Text style={{ fontSize: 28, color: '#1F3A34' }}&gt;戚&lt;/Text&gt;&#13;&#10;        &lt;/Box&gt;&lt;Box style={{ width: 58, height: 150, border: '1px solid rgba(31,58,52,0.35)', alignItems: 'center', justifyContent: 'flex-start', paddingTop: 12 }}&gt;&#13;&#10;          &lt;Text style={{ fontSize: 28, color: '#1F3A34' }}&gt;戚&lt;/Text&gt;&#13;&#10;        &lt;/Box&gt;&#13;&#10;      &lt;/Box&gt;&#13;&#10;      &lt;Text style={{ fontSize: 24, color: '#6B6B6B', marginTop: 20 }}&gt;在拐弯的那个字下面画一道线。&lt;/Text&gt;&#13;&#10;    &lt;/Box&gt;&#13;&#10;  &lt;/Box&gt;&#13;&#10;  &lt;/Box&gt;&#13;&#10;  &lt;Box style={{ height: 40, marginTop: 12, borderTop: '1px solid rgba(31,58,52,0.2)', flexDirection: 'row', justifyContent: 'space-between', alignItems: 'center', paddingTop: 8 }}&gt;&#13;&#10;    &lt;Text style={{ fontSize: 24, color: '#6B6B6B' }}&gt;《声声慢》· 李清照&lt;/Text&gt;&#13;&#10;    &lt;Text style={{ fontSize: 24, color: '#B4552D' }}&gt;06/16&lt;/Text&gt;&#13;&#10;  &lt;/Box&gt;&#13;&#10;&lt;/Slide&gt;"/>
         <p:cNvGrpSpPr/>
         <p:nvPr/>
       </p:nvGrpSpPr>
@@ -7112,7 +7025,7 @@
       </p:grpSpPr>
       <p:sp>
         <p:nvSpPr>
-          <p:cNvPr id="181" name=""/>
+          <p:cNvPr id="178" name=""/>
           <p:cNvSpPr/>
           <p:nvPr/>
         </p:nvSpPr>
@@ -7136,7 +7049,7 @@
       </p:sp>
       <p:sp>
         <p:nvSpPr>
-          <p:cNvPr id="182" name="" descr="{&quot;isTemplate&quot;:true,&quot;type&quot;:&quot;text&quot;}"/>
+          <p:cNvPr id="179" name="" descr="{&quot;isTemplate&quot;:true,&quot;type&quot;:&quot;text&quot;}"/>
           <p:cNvSpPr txBox="1"/>
           <p:nvPr/>
         </p:nvSpPr>
@@ -7163,15 +7076,15 @@
                 <a:latin typeface="宋体"/>
                 <a:ea typeface="宋体"/>
               </a:rPr>
-              <a:t>标一动，标一态</a:t>
-            </a:r>
-            <a:endParaRPr/>
-          </a:p>
-        </p:txBody>
-      </p:sp>
-      <p:sp>
-        <p:nvSpPr>
-          <p:cNvPr id="183" name="" descr="{&quot;isTemplate&quot;:true,&quot;type&quot;:&quot;text&quot;}"/>
+              <a:t>由外，还是由内</a:t>
+            </a:r>
+            <a:endParaRPr/>
+          </a:p>
+        </p:txBody>
+      </p:sp>
+      <p:sp>
+        <p:nvSpPr>
+          <p:cNvPr id="180" name="" descr="{&quot;isTemplate&quot;:true,&quot;type&quot;:&quot;text&quot;}"/>
           <p:cNvSpPr txBox="1"/>
           <p:nvPr/>
         </p:nvSpPr>
@@ -7226,13 +7139,118 @@
       </p:sp>
       <p:sp>
         <p:nvSpPr>
+          <p:cNvPr id="181" name="" descr="{&quot;isTemplate&quot;:true,&quot;type&quot;:&quot;text&quot;}"/>
+          <p:cNvSpPr txBox="1"/>
+          <p:nvPr/>
+        </p:nvSpPr>
+        <p:spPr>
+          <a:xfrm rot="0" flipH="0" flipV="0">
+            <a:off x="609600" y="2057400"/>
+            <a:ext cx="3619500" cy="609600"/>
+          </a:xfrm>
+          <a:prstGeom prst="rect"/>
+        </p:spPr>
+        <p:txBody>
+          <a:bodyPr wrap="none" lIns="0" tIns="0" rIns="0" bIns="0"/>
+          <a:p>
+            <a:pPr>
+              <a:lnSpc>
+                <a:spcPct val="190000"/>
+              </a:lnSpc>
+            </a:pPr>
+            <a:r>
+              <a:rPr lang="zh-CN" sz="2100">
+                <a:solidFill>
+                  <a:srgbClr val="1F3A34"/>
+                </a:solidFill>
+                <a:latin typeface="宋体"/>
+                <a:ea typeface="宋体"/>
+              </a:rPr>
+              <a:t>这十四个字，是从</a:t>
+            </a:r>
+            <a:endParaRPr/>
+          </a:p>
+        </p:txBody>
+      </p:sp>
+      <p:sp>
+        <p:nvSpPr>
+          <p:cNvPr id="182" name="" descr="{&quot;isTemplate&quot;:true,&quot;type&quot;:&quot;text&quot;}"/>
+          <p:cNvSpPr txBox="1"/>
+          <p:nvPr/>
+        </p:nvSpPr>
+        <p:spPr>
+          <a:xfrm rot="0" flipH="0" flipV="0">
+            <a:off x="609600" y="2667000"/>
+            <a:ext cx="3619500" cy="609600"/>
+          </a:xfrm>
+          <a:prstGeom prst="rect"/>
+        </p:spPr>
+        <p:txBody>
+          <a:bodyPr wrap="none" lIns="0" tIns="0" rIns="0" bIns="0"/>
+          <a:p>
+            <a:pPr>
+              <a:lnSpc>
+                <a:spcPct val="190000"/>
+              </a:lnSpc>
+            </a:pPr>
+            <a:r>
+              <a:rPr lang="zh-CN" sz="2100" b="1">
+                <a:solidFill>
+                  <a:srgbClr val="B4552D"/>
+                </a:solidFill>
+                <a:latin typeface="宋体"/>
+                <a:ea typeface="宋体"/>
+              </a:rPr>
+              <a:t>外面</a:t>
+            </a:r>
+            <a:endParaRPr/>
+          </a:p>
+        </p:txBody>
+      </p:sp>
+      <p:sp>
+        <p:nvSpPr>
+          <p:cNvPr id="183" name="" descr="{&quot;isTemplate&quot;:true,&quot;type&quot;:&quot;text&quot;}"/>
+          <p:cNvSpPr txBox="1"/>
+          <p:nvPr/>
+        </p:nvSpPr>
+        <p:spPr>
+          <a:xfrm rot="0" flipH="0" flipV="0">
+            <a:off x="609600" y="3276600"/>
+            <a:ext cx="3619500" cy="609600"/>
+          </a:xfrm>
+          <a:prstGeom prst="rect"/>
+        </p:spPr>
+        <p:txBody>
+          <a:bodyPr wrap="none" lIns="0" tIns="0" rIns="0" bIns="0"/>
+          <a:p>
+            <a:pPr>
+              <a:lnSpc>
+                <a:spcPct val="190000"/>
+              </a:lnSpc>
+            </a:pPr>
+            <a:r>
+              <a:rPr lang="zh-CN" sz="2100">
+                <a:solidFill>
+                  <a:srgbClr val="1F3A34"/>
+                </a:solidFill>
+                <a:latin typeface="宋体"/>
+                <a:ea typeface="宋体"/>
+              </a:rPr>
+              <a:t>走到了</a:t>
+            </a:r>
+            <a:endParaRPr/>
+          </a:p>
+        </p:txBody>
+      </p:sp>
+      <p:sp>
+        <p:nvSpPr>
           <p:cNvPr id="184" name="" descr="{&quot;isTemplate&quot;:true,&quot;type&quot;:&quot;text&quot;}"/>
           <p:cNvSpPr txBox="1"/>
           <p:nvPr/>
         </p:nvSpPr>
         <p:spPr>
           <a:xfrm rot="0" flipH="0" flipV="0">
-            <a:off x="609600" y="2105025"/>
+            <a:off x="609600" y="3886200"/>
             <a:ext cx="3619500" cy="609600"/>
           </a:xfrm>
           <a:prstGeom prst="rect"/>
@@ -7246,6 +7264,41 @@
               </a:lnSpc>
             </a:pPr>
             <a:r>
+              <a:rPr lang="zh-CN" sz="2100" b="1">
+                <a:solidFill>
+                  <a:srgbClr val="B4552D"/>
+                </a:solidFill>
+                <a:latin typeface="宋体"/>
+                <a:ea typeface="宋体"/>
+              </a:rPr>
+              <a:t>心里</a:t>
+            </a:r>
+            <a:endParaRPr/>
+          </a:p>
+        </p:txBody>
+      </p:sp>
+      <p:sp>
+        <p:nvSpPr>
+          <p:cNvPr id="185" name="" descr="{&quot;isTemplate&quot;:true,&quot;type&quot;:&quot;text&quot;}"/>
+          <p:cNvSpPr txBox="1"/>
+          <p:nvPr/>
+        </p:nvSpPr>
+        <p:spPr>
+          <a:xfrm rot="0" flipH="0" flipV="0">
+            <a:off x="609600" y="4495800"/>
+            <a:ext cx="3619500" cy="609600"/>
+          </a:xfrm>
+          <a:prstGeom prst="rect"/>
+        </p:spPr>
+        <p:txBody>
+          <a:bodyPr wrap="none" lIns="0" tIns="0" rIns="0" bIns="0"/>
+          <a:p>
+            <a:pPr>
+              <a:lnSpc>
+                <a:spcPct val="190000"/>
+              </a:lnSpc>
+            </a:pPr>
+            <a:r>
               <a:rPr lang="zh-CN" sz="2100">
                 <a:solidFill>
                   <a:srgbClr val="1F3A34"/>
@@ -7253,96 +7306,22 @@
                 <a:latin typeface="宋体"/>
                 <a:ea typeface="宋体"/>
               </a:rPr>
-              <a:t>给十四个字逐个标注：</a:t>
-            </a:r>
-            <a:endParaRPr/>
-          </a:p>
-        </p:txBody>
-      </p:sp>
-      <p:sp>
-        <p:nvSpPr>
-          <p:cNvPr id="185" name="" descr="{&quot;isTemplate&quot;:true,&quot;type&quot;:&quot;text&quot;}"/>
-          <p:cNvSpPr txBox="1"/>
-          <p:nvPr/>
-        </p:nvSpPr>
-        <p:spPr>
-          <a:xfrm rot="0" flipH="0" flipV="0">
-            <a:off x="609600" y="2714625"/>
-            <a:ext cx="3619500" cy="1219200"/>
-          </a:xfrm>
-          <a:prstGeom prst="rect"/>
-        </p:spPr>
-        <p:txBody>
-          <a:bodyPr wrap="square" lIns="0" tIns="0" rIns="0" bIns="0">
-            <a:normAutofit/>
-          </a:bodyPr>
-          <a:p>
-            <a:pPr>
-              <a:lnSpc>
-                <a:spcPct val="190000"/>
-              </a:lnSpc>
-            </a:pPr>
-            <a:r>
-              <a:rPr lang="zh-CN" sz="2100" b="1">
-                <a:solidFill>
-                  <a:srgbClr val="B4552D"/>
-                </a:solidFill>
-                <a:latin typeface="宋体"/>
-                <a:ea typeface="宋体"/>
-              </a:rPr>
-              <a:t>写“找”的动作，还是“找不到”的状态？</a:t>
-            </a:r>
-            <a:endParaRPr/>
-          </a:p>
-        </p:txBody>
-      </p:sp>
-      <p:sp>
-        <p:nvSpPr>
-          <p:cNvPr id="186" name="" descr="{&quot;isTemplate&quot;:true,&quot;type&quot;:&quot;text&quot;}"/>
-          <p:cNvSpPr txBox="1"/>
-          <p:nvPr/>
-        </p:nvSpPr>
-        <p:spPr>
-          <a:xfrm rot="0" flipH="0" flipV="0">
-            <a:off x="609600" y="4124325"/>
-            <a:ext cx="3619500" cy="933450"/>
-          </a:xfrm>
-          <a:prstGeom prst="rect"/>
-        </p:spPr>
-        <p:txBody>
-          <a:bodyPr wrap="square" lIns="0" tIns="0" rIns="0" bIns="0">
-            <a:normAutofit/>
-          </a:bodyPr>
-          <a:p>
-            <a:pPr>
-              <a:lnSpc>
-                <a:spcPct val="170000"/>
-              </a:lnSpc>
-            </a:pPr>
-            <a:r>
-              <a:rPr lang="zh-CN" sz="1800">
-                <a:solidFill>
-                  <a:srgbClr val="6B6B6B"/>
-                </a:solidFill>
-                <a:latin typeface="宋体"/>
-                <a:ea typeface="宋体"/>
-              </a:rPr>
-              <a:t>标完再读一遍，听听语速有没有变。</a:t>
-            </a:r>
-            <a:endParaRPr/>
-          </a:p>
-        </p:txBody>
-      </p:sp>
-      <p:sp>
-        <p:nvSpPr>
-          <p:cNvPr id="187" name=""/>
+              <a:t>吗？在哪一个字上拐的弯？</a:t>
+            </a:r>
+            <a:endParaRPr/>
+          </a:p>
+        </p:txBody>
+      </p:sp>
+      <p:sp>
+        <p:nvSpPr>
+          <p:cNvPr id="186" name=""/>
           <p:cNvSpPr/>
           <p:nvPr/>
         </p:nvSpPr>
         <p:spPr>
           <a:xfrm rot="0" flipH="0" flipV="0">
             <a:off x="4610100" y="1857375"/>
-            <a:ext cx="495300" cy="1428750"/>
+            <a:ext cx="552450" cy="1428750"/>
           </a:xfrm>
           <a:prstGeom prst="rect">
             <a:avLst/>
@@ -7363,13 +7342,13 @@
       </p:sp>
       <p:sp>
         <p:nvSpPr>
-          <p:cNvPr id="188" name="" descr="{&quot;isTemplate&quot;:true,&quot;type&quot;:&quot;text&quot;}"/>
-          <p:cNvSpPr txBox="1"/>
-          <p:nvPr/>
-        </p:nvSpPr>
-        <p:spPr>
-          <a:xfrm rot="0" flipH="0" flipV="0">
-            <a:off x="4724400" y="1971675"/>
+          <p:cNvPr id="187" name="" descr="{&quot;isTemplate&quot;:true,&quot;type&quot;:&quot;text&quot;}"/>
+          <p:cNvSpPr txBox="1"/>
+          <p:nvPr/>
+        </p:nvSpPr>
+        <p:spPr>
+          <a:xfrm rot="0" flipH="0" flipV="0">
+            <a:off x="4752975" y="1971675"/>
             <a:ext cx="266700" cy="323850"/>
           </a:xfrm>
           <a:prstGeom prst="rect"/>
@@ -7398,14 +7377,14 @@
       </p:sp>
       <p:sp>
         <p:nvSpPr>
-          <p:cNvPr id="189" name=""/>
+          <p:cNvPr id="188" name=""/>
           <p:cNvSpPr/>
           <p:nvPr/>
         </p:nvSpPr>
         <p:spPr>
           <a:xfrm rot="0" flipH="0" flipV="0">
-            <a:off x="5200650" y="1857375"/>
-            <a:ext cx="495300" cy="1428750"/>
+            <a:off x="5257800" y="1857375"/>
+            <a:ext cx="552450" cy="1428750"/>
           </a:xfrm>
           <a:prstGeom prst="rect">
             <a:avLst/>
@@ -7426,13 +7405,13 @@
       </p:sp>
       <p:sp>
         <p:nvSpPr>
-          <p:cNvPr id="190" name="" descr="{&quot;isTemplate&quot;:true,&quot;type&quot;:&quot;text&quot;}"/>
-          <p:cNvSpPr txBox="1"/>
-          <p:nvPr/>
-        </p:nvSpPr>
-        <p:spPr>
-          <a:xfrm rot="0" flipH="0" flipV="0">
-            <a:off x="5314950" y="1971675"/>
+          <p:cNvPr id="189" name="" descr="{&quot;isTemplate&quot;:true,&quot;type&quot;:&quot;text&quot;}"/>
+          <p:cNvSpPr txBox="1"/>
+          <p:nvPr/>
+        </p:nvSpPr>
+        <p:spPr>
+          <a:xfrm rot="0" flipH="0" flipV="0">
+            <a:off x="5400675" y="1971675"/>
             <a:ext cx="266700" cy="323850"/>
           </a:xfrm>
           <a:prstGeom prst="rect"/>
@@ -7461,14 +7440,14 @@
       </p:sp>
       <p:sp>
         <p:nvSpPr>
-          <p:cNvPr id="191" name=""/>
+          <p:cNvPr id="190" name=""/>
           <p:cNvSpPr/>
           <p:nvPr/>
         </p:nvSpPr>
         <p:spPr>
           <a:xfrm rot="0" flipH="0" flipV="0">
-            <a:off x="5791200" y="1857375"/>
-            <a:ext cx="495300" cy="1428750"/>
+            <a:off x="5905500" y="1857375"/>
+            <a:ext cx="552450" cy="1428750"/>
           </a:xfrm>
           <a:prstGeom prst="rect">
             <a:avLst/>
@@ -7489,13 +7468,13 @@
       </p:sp>
       <p:sp>
         <p:nvSpPr>
-          <p:cNvPr id="192" name="" descr="{&quot;isTemplate&quot;:true,&quot;type&quot;:&quot;text&quot;}"/>
-          <p:cNvSpPr txBox="1"/>
-          <p:nvPr/>
-        </p:nvSpPr>
-        <p:spPr>
-          <a:xfrm rot="0" flipH="0" flipV="0">
-            <a:off x="5905500" y="1971675"/>
+          <p:cNvPr id="191" name="" descr="{&quot;isTemplate&quot;:true,&quot;type&quot;:&quot;text&quot;}"/>
+          <p:cNvSpPr txBox="1"/>
+          <p:nvPr/>
+        </p:nvSpPr>
+        <p:spPr>
+          <a:xfrm rot="0" flipH="0" flipV="0">
+            <a:off x="6048375" y="1971675"/>
             <a:ext cx="266700" cy="323850"/>
           </a:xfrm>
           <a:prstGeom prst="rect"/>
@@ -7524,14 +7503,14 @@
       </p:sp>
       <p:sp>
         <p:nvSpPr>
-          <p:cNvPr id="193" name=""/>
+          <p:cNvPr id="192" name=""/>
           <p:cNvSpPr/>
           <p:nvPr/>
         </p:nvSpPr>
         <p:spPr>
           <a:xfrm rot="0" flipH="0" flipV="0">
-            <a:off x="6381750" y="1857375"/>
-            <a:ext cx="495300" cy="1428750"/>
+            <a:off x="6553200" y="1857375"/>
+            <a:ext cx="552450" cy="1428750"/>
           </a:xfrm>
           <a:prstGeom prst="rect">
             <a:avLst/>
@@ -7552,13 +7531,13 @@
       </p:sp>
       <p:sp>
         <p:nvSpPr>
-          <p:cNvPr id="194" name="" descr="{&quot;isTemplate&quot;:true,&quot;type&quot;:&quot;text&quot;}"/>
-          <p:cNvSpPr txBox="1"/>
-          <p:nvPr/>
-        </p:nvSpPr>
-        <p:spPr>
-          <a:xfrm rot="0" flipH="0" flipV="0">
-            <a:off x="6496050" y="1971675"/>
+          <p:cNvPr id="193" name="" descr="{&quot;isTemplate&quot;:true,&quot;type&quot;:&quot;text&quot;}"/>
+          <p:cNvSpPr txBox="1"/>
+          <p:nvPr/>
+        </p:nvSpPr>
+        <p:spPr>
+          <a:xfrm rot="0" flipH="0" flipV="0">
+            <a:off x="6696075" y="1971675"/>
             <a:ext cx="266700" cy="323850"/>
           </a:xfrm>
           <a:prstGeom prst="rect"/>
@@ -7587,14 +7566,14 @@
       </p:sp>
       <p:sp>
         <p:nvSpPr>
-          <p:cNvPr id="195" name=""/>
+          <p:cNvPr id="194" name=""/>
           <p:cNvSpPr/>
           <p:nvPr/>
         </p:nvSpPr>
         <p:spPr>
           <a:xfrm rot="0" flipH="0" flipV="0">
-            <a:off x="6972300" y="1857375"/>
-            <a:ext cx="495300" cy="1428750"/>
+            <a:off x="7200900" y="1857375"/>
+            <a:ext cx="552450" cy="1428750"/>
           </a:xfrm>
           <a:prstGeom prst="rect">
             <a:avLst/>
@@ -7615,13 +7594,13 @@
       </p:sp>
       <p:sp>
         <p:nvSpPr>
-          <p:cNvPr id="196" name="" descr="{&quot;isTemplate&quot;:true,&quot;type&quot;:&quot;text&quot;}"/>
-          <p:cNvSpPr txBox="1"/>
-          <p:nvPr/>
-        </p:nvSpPr>
-        <p:spPr>
-          <a:xfrm rot="0" flipH="0" flipV="0">
-            <a:off x="7086600" y="1971675"/>
+          <p:cNvPr id="195" name="" descr="{&quot;isTemplate&quot;:true,&quot;type&quot;:&quot;text&quot;}"/>
+          <p:cNvSpPr txBox="1"/>
+          <p:nvPr/>
+        </p:nvSpPr>
+        <p:spPr>
+          <a:xfrm rot="0" flipH="0" flipV="0">
+            <a:off x="7343775" y="1971675"/>
             <a:ext cx="266700" cy="323850"/>
           </a:xfrm>
           <a:prstGeom prst="rect"/>
@@ -7650,14 +7629,14 @@
       </p:sp>
       <p:sp>
         <p:nvSpPr>
-          <p:cNvPr id="197" name=""/>
+          <p:cNvPr id="196" name=""/>
           <p:cNvSpPr/>
           <p:nvPr/>
         </p:nvSpPr>
         <p:spPr>
           <a:xfrm rot="0" flipH="0" flipV="0">
-            <a:off x="7562850" y="1857375"/>
-            <a:ext cx="495300" cy="1428750"/>
+            <a:off x="7848600" y="1857375"/>
+            <a:ext cx="552450" cy="1428750"/>
           </a:xfrm>
           <a:prstGeom prst="rect">
             <a:avLst/>
@@ -7678,13 +7657,13 @@
       </p:sp>
       <p:sp>
         <p:nvSpPr>
-          <p:cNvPr id="198" name="" descr="{&quot;isTemplate&quot;:true,&quot;type&quot;:&quot;text&quot;}"/>
-          <p:cNvSpPr txBox="1"/>
-          <p:nvPr/>
-        </p:nvSpPr>
-        <p:spPr>
-          <a:xfrm rot="0" flipH="0" flipV="0">
-            <a:off x="7677150" y="1971675"/>
+          <p:cNvPr id="197" name="" descr="{&quot;isTemplate&quot;:true,&quot;type&quot;:&quot;text&quot;}"/>
+          <p:cNvSpPr txBox="1"/>
+          <p:nvPr/>
+        </p:nvSpPr>
+        <p:spPr>
+          <a:xfrm rot="0" flipH="0" flipV="0">
+            <a:off x="7991475" y="1971675"/>
             <a:ext cx="266700" cy="323850"/>
           </a:xfrm>
           <a:prstGeom prst="rect"/>
@@ -7713,14 +7692,14 @@
       </p:sp>
       <p:sp>
         <p:nvSpPr>
-          <p:cNvPr id="199" name=""/>
+          <p:cNvPr id="198" name=""/>
           <p:cNvSpPr/>
           <p:nvPr/>
         </p:nvSpPr>
         <p:spPr>
           <a:xfrm rot="0" flipH="0" flipV="0">
-            <a:off x="8153400" y="1857375"/>
-            <a:ext cx="495300" cy="1428750"/>
+            <a:off x="8496300" y="1857375"/>
+            <a:ext cx="552450" cy="1428750"/>
           </a:xfrm>
           <a:prstGeom prst="rect">
             <a:avLst/>
@@ -7741,13 +7720,13 @@
       </p:sp>
       <p:sp>
         <p:nvSpPr>
-          <p:cNvPr id="200" name="" descr="{&quot;isTemplate&quot;:true,&quot;type&quot;:&quot;text&quot;}"/>
-          <p:cNvSpPr txBox="1"/>
-          <p:nvPr/>
-        </p:nvSpPr>
-        <p:spPr>
-          <a:xfrm rot="0" flipH="0" flipV="0">
-            <a:off x="8267700" y="1971675"/>
+          <p:cNvPr id="199" name="" descr="{&quot;isTemplate&quot;:true,&quot;type&quot;:&quot;text&quot;}"/>
+          <p:cNvSpPr txBox="1"/>
+          <p:nvPr/>
+        </p:nvSpPr>
+        <p:spPr>
+          <a:xfrm rot="0" flipH="0" flipV="0">
+            <a:off x="8639175" y="1971675"/>
             <a:ext cx="266700" cy="323850"/>
           </a:xfrm>
           <a:prstGeom prst="rect"/>
@@ -7776,14 +7755,14 @@
       </p:sp>
       <p:sp>
         <p:nvSpPr>
-          <p:cNvPr id="201" name=""/>
+          <p:cNvPr id="200" name=""/>
           <p:cNvSpPr/>
           <p:nvPr/>
         </p:nvSpPr>
         <p:spPr>
           <a:xfrm rot="0" flipH="0" flipV="0">
-            <a:off x="8743950" y="1857375"/>
-            <a:ext cx="495300" cy="1428750"/>
+            <a:off x="9144000" y="1857375"/>
+            <a:ext cx="552450" cy="1428750"/>
           </a:xfrm>
           <a:prstGeom prst="rect">
             <a:avLst/>
@@ -7804,13 +7783,13 @@
       </p:sp>
       <p:sp>
         <p:nvSpPr>
-          <p:cNvPr id="202" name="" descr="{&quot;isTemplate&quot;:true,&quot;type&quot;:&quot;text&quot;}"/>
-          <p:cNvSpPr txBox="1"/>
-          <p:nvPr/>
-        </p:nvSpPr>
-        <p:spPr>
-          <a:xfrm rot="0" flipH="0" flipV="0">
-            <a:off x="8858250" y="1971675"/>
+          <p:cNvPr id="201" name="" descr="{&quot;isTemplate&quot;:true,&quot;type&quot;:&quot;text&quot;}"/>
+          <p:cNvSpPr txBox="1"/>
+          <p:nvPr/>
+        </p:nvSpPr>
+        <p:spPr>
+          <a:xfrm rot="0" flipH="0" flipV="0">
+            <a:off x="9286875" y="1971675"/>
             <a:ext cx="266700" cy="323850"/>
           </a:xfrm>
           <a:prstGeom prst="rect"/>
@@ -7839,14 +7818,14 @@
       </p:sp>
       <p:sp>
         <p:nvSpPr>
-          <p:cNvPr id="203" name=""/>
+          <p:cNvPr id="202" name=""/>
           <p:cNvSpPr/>
           <p:nvPr/>
         </p:nvSpPr>
         <p:spPr>
           <a:xfrm rot="0" flipH="0" flipV="0">
             <a:off x="4610100" y="3419475"/>
-            <a:ext cx="495300" cy="1428750"/>
+            <a:ext cx="552450" cy="1428750"/>
           </a:xfrm>
           <a:prstGeom prst="rect">
             <a:avLst/>
@@ -7867,13 +7846,13 @@
       </p:sp>
       <p:sp>
         <p:nvSpPr>
-          <p:cNvPr id="204" name="" descr="{&quot;isTemplate&quot;:true,&quot;type&quot;:&quot;text&quot;}"/>
-          <p:cNvSpPr txBox="1"/>
-          <p:nvPr/>
-        </p:nvSpPr>
-        <p:spPr>
-          <a:xfrm rot="0" flipH="0" flipV="0">
-            <a:off x="4724400" y="3533775"/>
+          <p:cNvPr id="203" name="" descr="{&quot;isTemplate&quot;:true,&quot;type&quot;:&quot;text&quot;}"/>
+          <p:cNvSpPr txBox="1"/>
+          <p:nvPr/>
+        </p:nvSpPr>
+        <p:spPr>
+          <a:xfrm rot="0" flipH="0" flipV="0">
+            <a:off x="4752975" y="3533775"/>
             <a:ext cx="266700" cy="323850"/>
           </a:xfrm>
           <a:prstGeom prst="rect"/>
@@ -7902,14 +7881,14 @@
       </p:sp>
       <p:sp>
         <p:nvSpPr>
-          <p:cNvPr id="205" name=""/>
+          <p:cNvPr id="204" name=""/>
           <p:cNvSpPr/>
           <p:nvPr/>
         </p:nvSpPr>
         <p:spPr>
           <a:xfrm rot="0" flipH="0" flipV="0">
-            <a:off x="5200650" y="3419475"/>
-            <a:ext cx="495300" cy="1428750"/>
+            <a:off x="5257800" y="3419475"/>
+            <a:ext cx="552450" cy="1428750"/>
           </a:xfrm>
           <a:prstGeom prst="rect">
             <a:avLst/>
@@ -7930,13 +7909,13 @@
       </p:sp>
       <p:sp>
         <p:nvSpPr>
-          <p:cNvPr id="206" name="" descr="{&quot;isTemplate&quot;:true,&quot;type&quot;:&quot;text&quot;}"/>
-          <p:cNvSpPr txBox="1"/>
-          <p:nvPr/>
-        </p:nvSpPr>
-        <p:spPr>
-          <a:xfrm rot="0" flipH="0" flipV="0">
-            <a:off x="5314950" y="3533775"/>
+          <p:cNvPr id="205" name="" descr="{&quot;isTemplate&quot;:true,&quot;type&quot;:&quot;text&quot;}"/>
+          <p:cNvSpPr txBox="1"/>
+          <p:nvPr/>
+        </p:nvSpPr>
+        <p:spPr>
+          <a:xfrm rot="0" flipH="0" flipV="0">
+            <a:off x="5400675" y="3533775"/>
             <a:ext cx="266700" cy="323850"/>
           </a:xfrm>
           <a:prstGeom prst="rect"/>
@@ -7965,14 +7944,14 @@
       </p:sp>
       <p:sp>
         <p:nvSpPr>
-          <p:cNvPr id="207" name=""/>
+          <p:cNvPr id="206" name=""/>
           <p:cNvSpPr/>
           <p:nvPr/>
         </p:nvSpPr>
         <p:spPr>
           <a:xfrm rot="0" flipH="0" flipV="0">
-            <a:off x="5791200" y="3419475"/>
-            <a:ext cx="495300" cy="1428750"/>
+            <a:off x="5905500" y="3419475"/>
+            <a:ext cx="552450" cy="1428750"/>
           </a:xfrm>
           <a:prstGeom prst="rect">
             <a:avLst/>
@@ -7993,13 +7972,13 @@
       </p:sp>
       <p:sp>
         <p:nvSpPr>
-          <p:cNvPr id="208" name="" descr="{&quot;isTemplate&quot;:true,&quot;type&quot;:&quot;text&quot;}"/>
-          <p:cNvSpPr txBox="1"/>
-          <p:nvPr/>
-        </p:nvSpPr>
-        <p:spPr>
-          <a:xfrm rot="0" flipH="0" flipV="0">
-            <a:off x="5905500" y="3533775"/>
+          <p:cNvPr id="207" name="" descr="{&quot;isTemplate&quot;:true,&quot;type&quot;:&quot;text&quot;}"/>
+          <p:cNvSpPr txBox="1"/>
+          <p:nvPr/>
+        </p:nvSpPr>
+        <p:spPr>
+          <a:xfrm rot="0" flipH="0" flipV="0">
+            <a:off x="6048375" y="3533775"/>
             <a:ext cx="266700" cy="323850"/>
           </a:xfrm>
           <a:prstGeom prst="rect"/>
@@ -8028,14 +8007,14 @@
       </p:sp>
       <p:sp>
         <p:nvSpPr>
-          <p:cNvPr id="209" name=""/>
+          <p:cNvPr id="208" name=""/>
           <p:cNvSpPr/>
           <p:nvPr/>
         </p:nvSpPr>
         <p:spPr>
           <a:xfrm rot="0" flipH="0" flipV="0">
-            <a:off x="6381750" y="3419475"/>
-            <a:ext cx="495300" cy="1428750"/>
+            <a:off x="6553200" y="3419475"/>
+            <a:ext cx="552450" cy="1428750"/>
           </a:xfrm>
           <a:prstGeom prst="rect">
             <a:avLst/>
@@ -8056,13 +8035,13 @@
       </p:sp>
       <p:sp>
         <p:nvSpPr>
-          <p:cNvPr id="210" name="" descr="{&quot;isTemplate&quot;:true,&quot;type&quot;:&quot;text&quot;}"/>
-          <p:cNvSpPr txBox="1"/>
-          <p:nvPr/>
-        </p:nvSpPr>
-        <p:spPr>
-          <a:xfrm rot="0" flipH="0" flipV="0">
-            <a:off x="6496050" y="3533775"/>
+          <p:cNvPr id="209" name="" descr="{&quot;isTemplate&quot;:true,&quot;type&quot;:&quot;text&quot;}"/>
+          <p:cNvSpPr txBox="1"/>
+          <p:nvPr/>
+        </p:nvSpPr>
+        <p:spPr>
+          <a:xfrm rot="0" flipH="0" flipV="0">
+            <a:off x="6696075" y="3533775"/>
             <a:ext cx="266700" cy="323850"/>
           </a:xfrm>
           <a:prstGeom prst="rect"/>
@@ -8091,14 +8070,14 @@
       </p:sp>
       <p:sp>
         <p:nvSpPr>
-          <p:cNvPr id="211" name=""/>
+          <p:cNvPr id="210" name=""/>
           <p:cNvSpPr/>
           <p:nvPr/>
         </p:nvSpPr>
         <p:spPr>
           <a:xfrm rot="0" flipH="0" flipV="0">
-            <a:off x="6972300" y="3419475"/>
-            <a:ext cx="495300" cy="1428750"/>
+            <a:off x="7200900" y="3419475"/>
+            <a:ext cx="552450" cy="1428750"/>
           </a:xfrm>
           <a:prstGeom prst="rect">
             <a:avLst/>
@@ -8119,13 +8098,13 @@
       </p:sp>
       <p:sp>
         <p:nvSpPr>
-          <p:cNvPr id="212" name="" descr="{&quot;isTemplate&quot;:true,&quot;type&quot;:&quot;text&quot;}"/>
-          <p:cNvSpPr txBox="1"/>
-          <p:nvPr/>
-        </p:nvSpPr>
-        <p:spPr>
-          <a:xfrm rot="0" flipH="0" flipV="0">
-            <a:off x="7086600" y="3533775"/>
+          <p:cNvPr id="211" name="" descr="{&quot;isTemplate&quot;:true,&quot;type&quot;:&quot;text&quot;}"/>
+          <p:cNvSpPr txBox="1"/>
+          <p:nvPr/>
+        </p:nvSpPr>
+        <p:spPr>
+          <a:xfrm rot="0" flipH="0" flipV="0">
+            <a:off x="7343775" y="3533775"/>
             <a:ext cx="266700" cy="323850"/>
           </a:xfrm>
           <a:prstGeom prst="rect"/>
@@ -8154,14 +8133,14 @@
       </p:sp>
       <p:sp>
         <p:nvSpPr>
-          <p:cNvPr id="213" name=""/>
+          <p:cNvPr id="212" name=""/>
           <p:cNvSpPr/>
           <p:nvPr/>
         </p:nvSpPr>
         <p:spPr>
           <a:xfrm rot="0" flipH="0" flipV="0">
-            <a:off x="7562850" y="3419475"/>
-            <a:ext cx="495300" cy="1428750"/>
+            <a:off x="7848600" y="3419475"/>
+            <a:ext cx="552450" cy="1428750"/>
           </a:xfrm>
           <a:prstGeom prst="rect">
             <a:avLst/>
@@ -8182,42 +8161,42 @@
       </p:sp>
       <p:sp>
         <p:nvSpPr>
+          <p:cNvPr id="213" name="" descr="{&quot;isTemplate&quot;:true,&quot;type&quot;:&quot;text&quot;}"/>
+          <p:cNvSpPr txBox="1"/>
+          <p:nvPr/>
+        </p:nvSpPr>
+        <p:spPr>
+          <a:xfrm rot="0" flipH="0" flipV="0">
+            <a:off x="7991475" y="3533775"/>
+            <a:ext cx="266700" cy="323850"/>
+          </a:xfrm>
+          <a:prstGeom prst="rect"/>
+        </p:spPr>
+        <p:txBody>
+          <a:bodyPr wrap="none" lIns="0" tIns="0" rIns="0" bIns="0"/>
+          <a:p>
+            <a:pPr>
+              <a:lnSpc>
+                <a:spcPct val="100000"/>
+              </a:lnSpc>
+            </a:pPr>
+            <a:r>
+              <a:rPr lang="zh-CN" sz="2100">
+                <a:solidFill>
+                  <a:srgbClr val="1F3A34"/>
+                </a:solidFill>
+                <a:latin typeface="宋体"/>
+                <a:ea typeface="宋体"/>
+              </a:rPr>
+              <a:t>戚</a:t>
+            </a:r>
+            <a:endParaRPr/>
+          </a:p>
+        </p:txBody>
+      </p:sp>
+      <p:sp>
+        <p:nvSpPr>
           <p:cNvPr id="214" name="" descr="{&quot;isTemplate&quot;:true,&quot;type&quot;:&quot;text&quot;}"/>
-          <p:cNvSpPr txBox="1"/>
-          <p:nvPr/>
-        </p:nvSpPr>
-        <p:spPr>
-          <a:xfrm rot="0" flipH="0" flipV="0">
-            <a:off x="7677150" y="3533775"/>
-            <a:ext cx="266700" cy="323850"/>
-          </a:xfrm>
-          <a:prstGeom prst="rect"/>
-        </p:spPr>
-        <p:txBody>
-          <a:bodyPr wrap="none" lIns="0" tIns="0" rIns="0" bIns="0"/>
-          <a:p>
-            <a:pPr>
-              <a:lnSpc>
-                <a:spcPct val="100000"/>
-              </a:lnSpc>
-            </a:pPr>
-            <a:r>
-              <a:rPr lang="zh-CN" sz="2100">
-                <a:solidFill>
-                  <a:srgbClr val="1F3A34"/>
-                </a:solidFill>
-                <a:latin typeface="宋体"/>
-                <a:ea typeface="宋体"/>
-              </a:rPr>
-              <a:t>戚</a:t>
-            </a:r>
-            <a:endParaRPr/>
-          </a:p>
-        </p:txBody>
-      </p:sp>
-      <p:sp>
-        <p:nvSpPr>
-          <p:cNvPr id="215" name="" descr="{&quot;isTemplate&quot;:true,&quot;type&quot;:&quot;text&quot;}"/>
           <p:cNvSpPr txBox="1"/>
           <p:nvPr/>
         </p:nvSpPr>
@@ -8244,15 +8223,15 @@
                 <a:latin typeface="宋体"/>
                 <a:ea typeface="宋体"/>
               </a:rPr>
-              <a:t>每格一个字；下面留白处写“动”或“态”。</a:t>
-            </a:r>
-            <a:endParaRPr/>
-          </a:p>
-        </p:txBody>
-      </p:sp>
-      <p:sp>
-        <p:nvSpPr>
-          <p:cNvPr id="216" name=""/>
+              <a:t>在拐弯的那个字下面画一道线。</a:t>
+            </a:r>
+            <a:endParaRPr/>
+          </a:p>
+        </p:txBody>
+      </p:sp>
+      <p:sp>
+        <p:nvSpPr>
+          <p:cNvPr id="215" name=""/>
           <p:cNvSpPr/>
           <p:nvPr/>
         </p:nvSpPr>
@@ -8294,7 +8273,7 @@
       </p:sp>
       <p:sp>
         <p:nvSpPr>
-          <p:cNvPr id="217" name="" descr="{&quot;isTemplate&quot;:true,&quot;type&quot;:&quot;text&quot;}"/>
+          <p:cNvPr id="216" name="" descr="{&quot;isTemplate&quot;:true,&quot;type&quot;:&quot;text&quot;}"/>
           <p:cNvSpPr txBox="1"/>
           <p:nvPr/>
         </p:nvSpPr>
@@ -8349,7 +8328,7 @@
       </p:sp>
       <p:sp>
         <p:nvSpPr>
-          <p:cNvPr id="218" name="" descr="{&quot;isTemplate&quot;:true,&quot;type&quot;:&quot;text&quot;}"/>
+          <p:cNvPr id="217" name="" descr="{&quot;isTemplate&quot;:true,&quot;type&quot;:&quot;text&quot;}"/>
           <p:cNvSpPr txBox="1"/>
           <p:nvPr/>
         </p:nvSpPr>
@@ -8392,7 +8371,7 @@
   <p:cSld>
     <p:spTree>
       <p:nvGrpSpPr>
-        <p:cNvPr id="219" name="" descr="&lt;Slide style={{ background: '#F5F1E6', padding: '48px 64px', fontFamily: '宋体' }}&gt;&#13;&#10;  &lt;Box style={{ flexDirection: 'row', justifyContent: 'space-between', alignItems: 'flex-end', height: 72 }}&gt;&#13;&#10;    &lt;Text style={{ fontSize: 40, fontWeight: 'bold', color: '#1F3A34', lineHeight: 1.2 }}&gt;从“找”到“找不到”&lt;/Text&gt;&#13;&#10;    &lt;Text style={{ fontSize: 24, color: '#6B6B6B' }}&gt;环节二 · 任务一&lt;/Text&gt;&#13;&#10;  &lt;/Box&gt;&#13;&#10;  &lt;Box style={{ height: 472, marginTop: 20, flexDirection: 'column' }}&gt;&#13;&#10;  &lt;Box style={{ height: 472, flexDirection: 'column', justifyContent: 'center', gap: 24 }}&gt;&#13;&#10;    &lt;Box style={{ height: 120, background: 'rgba(31,58,52,0.06)', flexDirection: 'row', alignItems: 'center', paddingLeft: 32 }}&gt;&#13;&#10;      &lt;Text style={{ fontSize: 34, fontWeight: 'bold', color: '#1F3A34' }}&gt;寻寻觅觅&lt;/Text&gt;&#13;&#10;      &lt;Text style={{ fontSize: 28, color: '#6B6B6B', marginLeft: 24 }}&gt;找 —— 而且是找了很久&lt;/Text&gt;&#13;&#10;    &lt;/Box&gt;&#13;&#10;    &lt;Box style={{ height: 120, background: 'rgba(31,58,52,0.09)', flexDirection: 'row', alignItems: 'center', paddingLeft: 32 }}&gt;&#13;&#10;      &lt;Text style={{ fontSize: 34, fontWeight: 'bold', color: '#1F3A34' }}&gt;冷冷清清&lt;/Text&gt;&#13;&#10;      &lt;Text style={{ fontSize: 28, color: '#6B6B6B', marginLeft: 24 }}&gt;找不到 —— 屋子空，人也空&lt;/Text&gt;&#13;&#10;    &lt;/Box&gt;&#13;&#10;    &lt;Box style={{ height: 120, background: 'rgba(180,85,45,0.12)', flexDirection: 'row', alignItems: 'center', paddingLeft: 32 }}&gt;&#13;&#10;      &lt;Text style={{ fontSize: 34, fontWeight: 'bold', color: '#B4552D' }}&gt;凄凄惨惨戚戚&lt;/Text&gt;&#13;&#10;      &lt;Text style={{ fontSize: 28, color: '#1F3A34', marginLeft: 24 }}&gt;连自己也没找回来&lt;/Text&gt;&#13;&#10;    &lt;/Box&gt;&#13;&#10;  &lt;/Box&gt;&#13;&#10;  &lt;/Box&gt;&#13;&#10;  &lt;Box style={{ height: 40, marginTop: 12, borderTop: '1px solid rgba(31,58,52,0.2)', flexDirection: 'row', justifyContent: 'space-between', alignItems: 'center', paddingTop: 8 }}&gt;&#13;&#10;    &lt;Text style={{ fontSize: 24, color: '#6B6B6B' }}&gt;《声声慢》· 李清照&lt;/Text&gt;&#13;&#10;    &lt;Text style={{ fontSize: 24, color: '#B4552D' }}&gt;07/16&lt;/Text&gt;&#13;&#10;  &lt;/Box&gt;&#13;&#10;&lt;/Slide&gt;"/>
+        <p:cNvPr id="218" name="" descr="&lt;Slide style={{ background: '#F5F1E6', padding: '48px 64px', fontFamily: '宋体' }}&gt;&#13;&#10;  &lt;Box style={{ flexDirection: 'row', justifyContent: 'space-between', alignItems: 'flex-end', height: 72 }}&gt;&#13;&#10;    &lt;Text style={{ fontSize: 40, fontWeight: 'bold', color: '#1F3A34', lineHeight: 1.2 }}&gt;冷冷与清清，能不能换&lt;/Text&gt;&#13;&#10;    &lt;Text style={{ fontSize: 24, color: '#6B6B6B' }}&gt;环节二 · 任务一&lt;/Text&gt;&#13;&#10;  &lt;/Box&gt;&#13;&#10;  &lt;Box style={{ height: 472, marginTop: 20, flexDirection: 'column' }}&gt;&#13;&#10;  &lt;Box style={{ height: 472, flexDirection: 'column', justifyContent: 'center', gap: 20 }}&gt;&#13;&#10;    &lt;Box style={{ height: 110, background: 'rgba(31,58,52,0.06)', justifyContent: 'center', paddingLeft: 28 }}&gt;&#13;&#10;      &lt;Text style={{ fontSize: 28, color: '#1F3A34' }}&gt;寻寻（不信）→ 觅觅（细察）→ 确认“真个去矣”&lt;/Text&gt;&#13;&#10;    &lt;/Box&gt;&#13;&#10;    &lt;Box style={{ height: 110, background: 'rgba(31,58,52,0.09)', justifyContent: 'center', paddingLeft: 28 }}&gt;&#13;&#10;      &lt;Text style={{ fontSize: 28, fontWeight: 'bold', color: '#1F3A34' }}&gt;冷冷（外）　→　清清（内）&lt;/Text&gt;&#13;&#10;    &lt;/Box&gt;&#13;&#10;    &lt;Box style={{ height: 110, background: 'rgba(180,85,45,0.12)', justifyContent: 'center', paddingLeft: 28 }}&gt;&#13;&#10;      &lt;Text style={{ fontSize: 28, color: '#B4552D' }}&gt;凄凄 → 惨惨 → 戚戚：凝于心 → 不堪任 → 肠痛心碎&lt;/Text&gt;&#13;&#10;    &lt;/Box&gt;&#13;&#10;    &lt;Text style={{ fontSize: 24, color: '#6B6B6B' }}&gt;把“冷冷”挪到“清清”下面：由外入内这一层就断了。&lt;/Text&gt;&#13;&#10;  &lt;/Box&gt;&#13;&#10;  &lt;/Box&gt;&#13;&#10;  &lt;Box style={{ height: 40, marginTop: 12, borderTop: '1px solid rgba(31,58,52,0.2)', flexDirection: 'row', justifyContent: 'space-between', alignItems: 'center', paddingTop: 8 }}&gt;&#13;&#10;    &lt;Text style={{ fontSize: 24, color: '#6B6B6B' }}&gt;《声声慢》· 李清照&lt;/Text&gt;&#13;&#10;    &lt;Text style={{ fontSize: 24, color: '#B4552D' }}&gt;07/16&lt;/Text&gt;&#13;&#10;  &lt;/Box&gt;&#13;&#10;&lt;/Slide&gt;"/>
         <p:cNvGrpSpPr/>
         <p:nvPr/>
       </p:nvGrpSpPr>
@@ -8406,7 +8385,7 @@
       </p:grpSpPr>
       <p:sp>
         <p:nvSpPr>
-          <p:cNvPr id="220" name=""/>
+          <p:cNvPr id="219" name=""/>
           <p:cNvSpPr/>
           <p:nvPr/>
         </p:nvSpPr>
@@ -8430,42 +8409,42 @@
       </p:sp>
       <p:sp>
         <p:nvSpPr>
+          <p:cNvPr id="220" name="" descr="{&quot;isTemplate&quot;:true,&quot;type&quot;:&quot;text&quot;}"/>
+          <p:cNvSpPr txBox="1"/>
+          <p:nvPr/>
+        </p:nvSpPr>
+        <p:spPr>
+          <a:xfrm rot="0" flipH="0" flipV="0">
+            <a:off x="609600" y="590550"/>
+            <a:ext cx="3810000" cy="552450"/>
+          </a:xfrm>
+          <a:prstGeom prst="rect"/>
+        </p:spPr>
+        <p:txBody>
+          <a:bodyPr wrap="none" lIns="0" tIns="0" rIns="0" bIns="0"/>
+          <a:p>
+            <a:pPr>
+              <a:lnSpc>
+                <a:spcPct val="120000"/>
+              </a:lnSpc>
+            </a:pPr>
+            <a:r>
+              <a:rPr lang="zh-CN" sz="3000" b="1">
+                <a:solidFill>
+                  <a:srgbClr val="1F3A34"/>
+                </a:solidFill>
+                <a:latin typeface="宋体"/>
+                <a:ea typeface="宋体"/>
+              </a:rPr>
+              <a:t>冷冷与清清，能不能换</a:t>
+            </a:r>
+            <a:endParaRPr/>
+          </a:p>
+        </p:txBody>
+      </p:sp>
+      <p:sp>
+        <p:nvSpPr>
           <p:cNvPr id="221" name="" descr="{&quot;isTemplate&quot;:true,&quot;type&quot;:&quot;text&quot;}"/>
-          <p:cNvSpPr txBox="1"/>
-          <p:nvPr/>
-        </p:nvSpPr>
-        <p:spPr>
-          <a:xfrm rot="0" flipH="0" flipV="0">
-            <a:off x="609600" y="590550"/>
-            <a:ext cx="3038475" cy="552450"/>
-          </a:xfrm>
-          <a:prstGeom prst="rect"/>
-        </p:spPr>
-        <p:txBody>
-          <a:bodyPr wrap="none" lIns="0" tIns="0" rIns="0" bIns="0"/>
-          <a:p>
-            <a:pPr>
-              <a:lnSpc>
-                <a:spcPct val="120000"/>
-              </a:lnSpc>
-            </a:pPr>
-            <a:r>
-              <a:rPr lang="zh-CN" sz="3000" b="1">
-                <a:solidFill>
-                  <a:srgbClr val="1F3A34"/>
-                </a:solidFill>
-                <a:latin typeface="宋体"/>
-                <a:ea typeface="宋体"/>
-              </a:rPr>
-              <a:t>从“找”到“找不到”</a:t>
-            </a:r>
-            <a:endParaRPr/>
-          </a:p>
-        </p:txBody>
-      </p:sp>
-      <p:sp>
-        <p:nvSpPr>
-          <p:cNvPr id="222" name="" descr="{&quot;isTemplate&quot;:true,&quot;type&quot;:&quot;text&quot;}"/>
           <p:cNvSpPr txBox="1"/>
           <p:nvPr/>
         </p:nvSpPr>
@@ -8520,14 +8499,14 @@
       </p:sp>
       <p:sp>
         <p:nvSpPr>
-          <p:cNvPr id="223" name=""/>
+          <p:cNvPr id="222" name=""/>
           <p:cNvSpPr/>
           <p:nvPr/>
         </p:nvSpPr>
         <p:spPr>
           <a:xfrm rot="0" flipH="0" flipV="0">
-            <a:off x="609600" y="1638300"/>
-            <a:ext cx="10972800" cy="1143000"/>
+            <a:off x="609600" y="1590675"/>
+            <a:ext cx="10972800" cy="1047750"/>
           </a:xfrm>
           <a:prstGeom prst="rect">
             <a:avLst/>
@@ -8546,104 +8525,89 @@
       </p:sp>
       <p:sp>
         <p:nvSpPr>
-          <p:cNvPr id="224" name="" descr="{&quot;isTemplate&quot;:true,&quot;type&quot;:&quot;text&quot;}"/>
-          <p:cNvSpPr txBox="1"/>
-          <p:nvPr/>
-        </p:nvSpPr>
-        <p:spPr>
-          <a:xfrm rot="0" flipH="0" flipV="0">
-            <a:off x="914400" y="2019300"/>
-            <a:ext cx="1295400" cy="390525"/>
-          </a:xfrm>
-          <a:prstGeom prst="rect"/>
-        </p:spPr>
-        <p:txBody>
-          <a:bodyPr wrap="none" lIns="0" tIns="0" rIns="0" bIns="0"/>
-          <a:p>
-            <a:pPr>
-              <a:lnSpc>
-                <a:spcPct val="100000"/>
-              </a:lnSpc>
-            </a:pPr>
-            <a:r>
-              <a:rPr lang="zh-CN" sz="2550" b="1">
+          <p:cNvPr id="223" name="" descr="{&quot;isTemplate&quot;:true,&quot;type&quot;:&quot;text&quot;}"/>
+          <p:cNvSpPr txBox="1"/>
+          <p:nvPr/>
+        </p:nvSpPr>
+        <p:spPr>
+          <a:xfrm rot="0" flipH="0" flipV="0">
+            <a:off x="876300" y="1952625"/>
+            <a:ext cx="10706100" cy="323850"/>
+          </a:xfrm>
+          <a:prstGeom prst="rect"/>
+        </p:spPr>
+        <p:txBody>
+          <a:bodyPr wrap="none" lIns="0" tIns="0" rIns="0" bIns="0"/>
+          <a:p>
+            <a:pPr>
+              <a:lnSpc>
+                <a:spcPct val="100000"/>
+              </a:lnSpc>
+            </a:pPr>
+            <a:r>
+              <a:rPr lang="zh-CN" sz="2100">
                 <a:solidFill>
                   <a:srgbClr val="1F3A34"/>
                 </a:solidFill>
                 <a:latin typeface="宋体"/>
                 <a:ea typeface="宋体"/>
               </a:rPr>
-              <a:t>寻寻觅觅</a:t>
-            </a:r>
-            <a:endParaRPr/>
-          </a:p>
-        </p:txBody>
-      </p:sp>
-      <p:sp>
-        <p:nvSpPr>
-          <p:cNvPr id="225" name="" descr="{&quot;isTemplate&quot;:true,&quot;type&quot;:&quot;text&quot;}"/>
-          <p:cNvSpPr txBox="1"/>
-          <p:nvPr/>
-        </p:nvSpPr>
-        <p:spPr>
-          <a:xfrm rot="0" flipH="0" flipV="0">
-            <a:off x="2438400" y="2047875"/>
-            <a:ext cx="2790825" cy="323850"/>
-          </a:xfrm>
-          <a:prstGeom prst="rect"/>
-        </p:spPr>
-        <p:txBody>
-          <a:bodyPr wrap="none" lIns="0" tIns="0" rIns="0" bIns="0"/>
-          <a:p>
-            <a:pPr>
-              <a:lnSpc>
-                <a:spcPct val="100000"/>
-              </a:lnSpc>
-            </a:pPr>
+              <a:t>寻寻（不信）→</a:t>
+            </a:r>
+            <a:r>
+              <a:rPr lang="en-US" sz="2100">
+                <a:solidFill>
+                  <a:srgbClr val="1F3A34"/>
+                </a:solidFill>
+                <a:latin typeface="宋体"/>
+                <a:ea typeface="宋体"/>
+              </a:rPr>
+              <a:t xml:space="preserve"> </a:t>
+            </a:r>
             <a:r>
               <a:rPr lang="zh-CN" sz="2100">
                 <a:solidFill>
-                  <a:srgbClr val="6B6B6B"/>
-                </a:solidFill>
-                <a:latin typeface="宋体"/>
-                <a:ea typeface="宋体"/>
-              </a:rPr>
-              <a:t>找</a:t>
+                  <a:srgbClr val="1F3A34"/>
+                </a:solidFill>
+                <a:latin typeface="宋体"/>
+                <a:ea typeface="宋体"/>
+              </a:rPr>
+              <a:t>觅觅（细察）→</a:t>
             </a:r>
             <a:r>
               <a:rPr lang="en-US" sz="2100">
                 <a:solidFill>
-                  <a:srgbClr val="6B6B6B"/>
-                </a:solidFill>
-                <a:latin typeface="宋体"/>
-                <a:ea typeface="宋体"/>
-              </a:rPr>
-              <a:t xml:space="preserve"> —— </a:t>
+                  <a:srgbClr val="1F3A34"/>
+                </a:solidFill>
+                <a:latin typeface="宋体"/>
+                <a:ea typeface="宋体"/>
+              </a:rPr>
+              <a:t xml:space="preserve"> </a:t>
             </a:r>
             <a:r>
               <a:rPr lang="zh-CN" sz="2100">
                 <a:solidFill>
-                  <a:srgbClr val="6B6B6B"/>
-                </a:solidFill>
-                <a:latin typeface="宋体"/>
-                <a:ea typeface="宋体"/>
-              </a:rPr>
-              <a:t>而且是找了很久</a:t>
-            </a:r>
-            <a:endParaRPr/>
-          </a:p>
-        </p:txBody>
-      </p:sp>
-      <p:sp>
-        <p:nvSpPr>
-          <p:cNvPr id="226" name=""/>
+                  <a:srgbClr val="1F3A34"/>
+                </a:solidFill>
+                <a:latin typeface="宋体"/>
+                <a:ea typeface="宋体"/>
+              </a:rPr>
+              <a:t>确认“真个去矣”</a:t>
+            </a:r>
+            <a:endParaRPr/>
+          </a:p>
+        </p:txBody>
+      </p:sp>
+      <p:sp>
+        <p:nvSpPr>
+          <p:cNvPr id="224" name=""/>
           <p:cNvSpPr/>
           <p:nvPr/>
         </p:nvSpPr>
         <p:spPr>
           <a:xfrm rot="0" flipH="0" flipV="0">
-            <a:off x="609600" y="3009900"/>
-            <a:ext cx="10972800" cy="1143000"/>
+            <a:off x="609600" y="2828925"/>
+            <a:ext cx="10972800" cy="1047750"/>
           </a:xfrm>
           <a:prstGeom prst="rect">
             <a:avLst/>
@@ -8662,104 +8626,49 @@
       </p:sp>
       <p:sp>
         <p:nvSpPr>
-          <p:cNvPr id="227" name="" descr="{&quot;isTemplate&quot;:true,&quot;type&quot;:&quot;text&quot;}"/>
-          <p:cNvSpPr txBox="1"/>
-          <p:nvPr/>
-        </p:nvSpPr>
-        <p:spPr>
-          <a:xfrm rot="0" flipH="0" flipV="0">
-            <a:off x="914400" y="3390900"/>
-            <a:ext cx="1295400" cy="390525"/>
-          </a:xfrm>
-          <a:prstGeom prst="rect"/>
-        </p:spPr>
-        <p:txBody>
-          <a:bodyPr wrap="none" lIns="0" tIns="0" rIns="0" bIns="0"/>
-          <a:p>
-            <a:pPr>
-              <a:lnSpc>
-                <a:spcPct val="100000"/>
-              </a:lnSpc>
-            </a:pPr>
-            <a:r>
-              <a:rPr lang="zh-CN" sz="2550" b="1">
+          <p:cNvPr id="225" name="" descr="{&quot;isTemplate&quot;:true,&quot;type&quot;:&quot;text&quot;}"/>
+          <p:cNvSpPr txBox="1"/>
+          <p:nvPr/>
+        </p:nvSpPr>
+        <p:spPr>
+          <a:xfrm rot="0" flipH="0" flipV="0">
+            <a:off x="876300" y="3190875"/>
+            <a:ext cx="10706100" cy="323850"/>
+          </a:xfrm>
+          <a:prstGeom prst="rect"/>
+        </p:spPr>
+        <p:txBody>
+          <a:bodyPr wrap="none" lIns="0" tIns="0" rIns="0" bIns="0"/>
+          <a:p>
+            <a:pPr>
+              <a:lnSpc>
+                <a:spcPct val="100000"/>
+              </a:lnSpc>
+            </a:pPr>
+            <a:r>
+              <a:rPr lang="zh-CN" sz="2100" b="1">
                 <a:solidFill>
                   <a:srgbClr val="1F3A34"/>
                 </a:solidFill>
                 <a:latin typeface="宋体"/>
                 <a:ea typeface="宋体"/>
               </a:rPr>
-              <a:t>冷冷清清</a:t>
-            </a:r>
-            <a:endParaRPr/>
-          </a:p>
-        </p:txBody>
-      </p:sp>
-      <p:sp>
-        <p:nvSpPr>
-          <p:cNvPr id="228" name="" descr="{&quot;isTemplate&quot;:true,&quot;type&quot;:&quot;text&quot;}"/>
-          <p:cNvSpPr txBox="1"/>
-          <p:nvPr/>
-        </p:nvSpPr>
-        <p:spPr>
-          <a:xfrm rot="0" flipH="0" flipV="0">
-            <a:off x="2438400" y="3419475"/>
-            <a:ext cx="3324225" cy="323850"/>
-          </a:xfrm>
-          <a:prstGeom prst="rect"/>
-        </p:spPr>
-        <p:txBody>
-          <a:bodyPr wrap="none" lIns="0" tIns="0" rIns="0" bIns="0"/>
-          <a:p>
-            <a:pPr>
-              <a:lnSpc>
-                <a:spcPct val="100000"/>
-              </a:lnSpc>
-            </a:pPr>
-            <a:r>
-              <a:rPr lang="zh-CN" sz="2100">
-                <a:solidFill>
-                  <a:srgbClr val="6B6B6B"/>
-                </a:solidFill>
-                <a:latin typeface="宋体"/>
-                <a:ea typeface="宋体"/>
-              </a:rPr>
-              <a:t>找不到</a:t>
-            </a:r>
-            <a:r>
-              <a:rPr lang="en-US" sz="2100">
-                <a:solidFill>
-                  <a:srgbClr val="6B6B6B"/>
-                </a:solidFill>
-                <a:latin typeface="宋体"/>
-                <a:ea typeface="宋体"/>
-              </a:rPr>
-              <a:t xml:space="preserve"> —— </a:t>
-            </a:r>
-            <a:r>
-              <a:rPr lang="zh-CN" sz="2100">
-                <a:solidFill>
-                  <a:srgbClr val="6B6B6B"/>
-                </a:solidFill>
-                <a:latin typeface="宋体"/>
-                <a:ea typeface="宋体"/>
-              </a:rPr>
-              <a:t>屋子空，人也空</a:t>
-            </a:r>
-            <a:endParaRPr/>
-          </a:p>
-        </p:txBody>
-      </p:sp>
-      <p:sp>
-        <p:nvSpPr>
-          <p:cNvPr id="229" name=""/>
+              <a:t>冷冷（外）　→　清清（内）</a:t>
+            </a:r>
+            <a:endParaRPr/>
+          </a:p>
+        </p:txBody>
+      </p:sp>
+      <p:sp>
+        <p:nvSpPr>
+          <p:cNvPr id="226" name=""/>
           <p:cNvSpPr/>
           <p:nvPr/>
         </p:nvSpPr>
         <p:spPr>
           <a:xfrm rot="0" flipH="0" flipV="0">
-            <a:off x="609600" y="4381500"/>
-            <a:ext cx="10972800" cy="1143000"/>
+            <a:off x="609600" y="4067175"/>
+            <a:ext cx="10972800" cy="1047750"/>
           </a:xfrm>
           <a:prstGeom prst="rect">
             <a:avLst/>
@@ -8778,77 +8687,157 @@
       </p:sp>
       <p:sp>
         <p:nvSpPr>
-          <p:cNvPr id="230" name="" descr="{&quot;isTemplate&quot;:true,&quot;type&quot;:&quot;text&quot;}"/>
-          <p:cNvSpPr txBox="1"/>
-          <p:nvPr/>
-        </p:nvSpPr>
-        <p:spPr>
-          <a:xfrm rot="0" flipH="0" flipV="0">
-            <a:off x="914400" y="4762500"/>
-            <a:ext cx="1943100" cy="390525"/>
-          </a:xfrm>
-          <a:prstGeom prst="rect"/>
-        </p:spPr>
-        <p:txBody>
-          <a:bodyPr wrap="none" lIns="0" tIns="0" rIns="0" bIns="0"/>
-          <a:p>
-            <a:pPr>
-              <a:lnSpc>
-                <a:spcPct val="100000"/>
-              </a:lnSpc>
-            </a:pPr>
-            <a:r>
-              <a:rPr lang="zh-CN" sz="2550" b="1">
+          <p:cNvPr id="227" name="" descr="{&quot;isTemplate&quot;:true,&quot;type&quot;:&quot;text&quot;}"/>
+          <p:cNvSpPr txBox="1"/>
+          <p:nvPr/>
+        </p:nvSpPr>
+        <p:spPr>
+          <a:xfrm rot="0" flipH="0" flipV="0">
+            <a:off x="876300" y="4429125"/>
+            <a:ext cx="10706100" cy="323850"/>
+          </a:xfrm>
+          <a:prstGeom prst="rect"/>
+        </p:spPr>
+        <p:txBody>
+          <a:bodyPr wrap="none" lIns="0" tIns="0" rIns="0" bIns="0"/>
+          <a:p>
+            <a:pPr>
+              <a:lnSpc>
+                <a:spcPct val="100000"/>
+              </a:lnSpc>
+            </a:pPr>
+            <a:r>
+              <a:rPr lang="zh-CN" sz="2100">
                 <a:solidFill>
                   <a:srgbClr val="B4552D"/>
                 </a:solidFill>
                 <a:latin typeface="宋体"/>
                 <a:ea typeface="宋体"/>
               </a:rPr>
-              <a:t>凄凄惨惨戚戚</a:t>
-            </a:r>
-            <a:endParaRPr/>
-          </a:p>
-        </p:txBody>
-      </p:sp>
-      <p:sp>
-        <p:nvSpPr>
-          <p:cNvPr id="231" name="" descr="{&quot;isTemplate&quot;:true,&quot;type&quot;:&quot;text&quot;}"/>
-          <p:cNvSpPr txBox="1"/>
-          <p:nvPr/>
-        </p:nvSpPr>
-        <p:spPr>
-          <a:xfrm rot="0" flipH="0" flipV="0">
-            <a:off x="3086100" y="4791075"/>
-            <a:ext cx="2133600" cy="323850"/>
-          </a:xfrm>
-          <a:prstGeom prst="rect"/>
-        </p:spPr>
-        <p:txBody>
-          <a:bodyPr wrap="none" lIns="0" tIns="0" rIns="0" bIns="0"/>
-          <a:p>
-            <a:pPr>
-              <a:lnSpc>
-                <a:spcPct val="100000"/>
-              </a:lnSpc>
-            </a:pPr>
+              <a:t>凄凄</a:t>
+            </a:r>
+            <a:r>
+              <a:rPr lang="en-US" sz="2100">
+                <a:solidFill>
+                  <a:srgbClr val="B4552D"/>
+                </a:solidFill>
+                <a:latin typeface="宋体"/>
+                <a:ea typeface="宋体"/>
+              </a:rPr>
+              <a:t xml:space="preserve"> → </a:t>
+            </a:r>
             <a:r>
               <a:rPr lang="zh-CN" sz="2100">
                 <a:solidFill>
-                  <a:srgbClr val="1F3A34"/>
-                </a:solidFill>
-                <a:latin typeface="宋体"/>
-                <a:ea typeface="宋体"/>
-              </a:rPr>
-              <a:t>连自己也没找回来</a:t>
-            </a:r>
-            <a:endParaRPr/>
-          </a:p>
-        </p:txBody>
-      </p:sp>
-      <p:sp>
-        <p:nvSpPr>
-          <p:cNvPr id="232" name=""/>
+                  <a:srgbClr val="B4552D"/>
+                </a:solidFill>
+                <a:latin typeface="宋体"/>
+                <a:ea typeface="宋体"/>
+              </a:rPr>
+              <a:t>惨惨</a:t>
+            </a:r>
+            <a:r>
+              <a:rPr lang="en-US" sz="2100">
+                <a:solidFill>
+                  <a:srgbClr val="B4552D"/>
+                </a:solidFill>
+                <a:latin typeface="宋体"/>
+                <a:ea typeface="宋体"/>
+              </a:rPr>
+              <a:t xml:space="preserve"> → </a:t>
+            </a:r>
+            <a:r>
+              <a:rPr lang="zh-CN" sz="2100">
+                <a:solidFill>
+                  <a:srgbClr val="B4552D"/>
+                </a:solidFill>
+                <a:latin typeface="宋体"/>
+                <a:ea typeface="宋体"/>
+              </a:rPr>
+              <a:t>戚戚：凝于心</a:t>
+            </a:r>
+            <a:r>
+              <a:rPr lang="en-US" sz="2100">
+                <a:solidFill>
+                  <a:srgbClr val="B4552D"/>
+                </a:solidFill>
+                <a:latin typeface="宋体"/>
+                <a:ea typeface="宋体"/>
+              </a:rPr>
+              <a:t xml:space="preserve"> → </a:t>
+            </a:r>
+            <a:r>
+              <a:rPr lang="zh-CN" sz="2100">
+                <a:solidFill>
+                  <a:srgbClr val="B4552D"/>
+                </a:solidFill>
+                <a:latin typeface="宋体"/>
+                <a:ea typeface="宋体"/>
+              </a:rPr>
+              <a:t>不堪任</a:t>
+            </a:r>
+            <a:r>
+              <a:rPr lang="en-US" sz="2100">
+                <a:solidFill>
+                  <a:srgbClr val="B4552D"/>
+                </a:solidFill>
+                <a:latin typeface="宋体"/>
+                <a:ea typeface="宋体"/>
+              </a:rPr>
+              <a:t xml:space="preserve"> → </a:t>
+            </a:r>
+            <a:r>
+              <a:rPr lang="zh-CN" sz="2100">
+                <a:solidFill>
+                  <a:srgbClr val="B4552D"/>
+                </a:solidFill>
+                <a:latin typeface="宋体"/>
+                <a:ea typeface="宋体"/>
+              </a:rPr>
+              <a:t>肠痛心碎</a:t>
+            </a:r>
+            <a:endParaRPr/>
+          </a:p>
+        </p:txBody>
+      </p:sp>
+      <p:sp>
+        <p:nvSpPr>
+          <p:cNvPr id="228" name="" descr="{&quot;isTemplate&quot;:true,&quot;type&quot;:&quot;text&quot;}"/>
+          <p:cNvSpPr txBox="1"/>
+          <p:nvPr/>
+        </p:nvSpPr>
+        <p:spPr>
+          <a:xfrm rot="0" flipH="0" flipV="0">
+            <a:off x="609600" y="5305425"/>
+            <a:ext cx="10972800" cy="276225"/>
+          </a:xfrm>
+          <a:prstGeom prst="rect"/>
+        </p:spPr>
+        <p:txBody>
+          <a:bodyPr wrap="none" lIns="0" tIns="0" rIns="0" bIns="0"/>
+          <a:p>
+            <a:pPr>
+              <a:lnSpc>
+                <a:spcPct val="100000"/>
+              </a:lnSpc>
+            </a:pPr>
+            <a:r>
+              <a:rPr lang="zh-CN" sz="1800">
+                <a:solidFill>
+                  <a:srgbClr val="6B6B6B"/>
+                </a:solidFill>
+                <a:latin typeface="宋体"/>
+                <a:ea typeface="宋体"/>
+              </a:rPr>
+              <a:t>把“冷冷”挪到“清清”下面：由外入内这一层就断了。</a:t>
+            </a:r>
+            <a:endParaRPr/>
+          </a:p>
+        </p:txBody>
+      </p:sp>
+      <p:sp>
+        <p:nvSpPr>
+          <p:cNvPr id="229" name=""/>
           <p:cNvSpPr/>
           <p:nvPr/>
         </p:nvSpPr>
@@ -8890,7 +8879,7 @@
       </p:sp>
       <p:sp>
         <p:nvSpPr>
-          <p:cNvPr id="233" name="" descr="{&quot;isTemplate&quot;:true,&quot;type&quot;:&quot;text&quot;}"/>
+          <p:cNvPr id="230" name="" descr="{&quot;isTemplate&quot;:true,&quot;type&quot;:&quot;text&quot;}"/>
           <p:cNvSpPr txBox="1"/>
           <p:nvPr/>
         </p:nvSpPr>
@@ -8945,7 +8934,7 @@
       </p:sp>
       <p:sp>
         <p:nvSpPr>
-          <p:cNvPr id="234" name="" descr="{&quot;isTemplate&quot;:true,&quot;type&quot;:&quot;text&quot;}"/>
+          <p:cNvPr id="231" name="" descr="{&quot;isTemplate&quot;:true,&quot;type&quot;:&quot;text&quot;}"/>
           <p:cNvSpPr txBox="1"/>
           <p:nvPr/>
         </p:nvSpPr>
@@ -8988,7 +8977,7 @@
   <p:cSld>
     <p:spTree>
       <p:nvGrpSpPr>
-        <p:cNvPr id="235" name="" descr="&lt;Slide style={{ background: '#F5F1E6', padding: '48px 64px', fontFamily: '宋体' }}&gt;&#13;&#10;  &lt;Box style={{ flexDirection: 'row', justifyContent: 'space-between', alignItems: 'flex-end', height: 72 }}&gt;&#13;&#10;    &lt;Text style={{ fontSize: 40, fontWeight: 'bold', color: '#1F3A34', lineHeight: 1.2 }}&gt;六样东西，两个时候&lt;/Text&gt;&#13;&#10;    &lt;Text style={{ fontSize: 24, color: '#6B6B6B' }}&gt;环节三 · 任务二&lt;/Text&gt;&#13;&#10;  &lt;/Box&gt;&#13;&#10;  &lt;Box style={{ height: 472, marginTop: 20, flexDirection: 'column' }}&gt;&#13;&#10;  &lt;Box style={{ height: 472, flexDirection: 'column', justifyContent: 'center' }}&gt;&#13;&#10;    &lt;Text style={{ fontSize: 28, color: '#6B6B6B' }}&gt;词里写着六样东西——&lt;/Text&gt;&#13;&#10;    &lt;Box style={{ flexDirection: 'row', gap: 20, marginTop: 24, height: 150 }}&gt;&#13;&#10;      &lt;Box style={{ flex: 1, background: 'rgba(31,58,52,0.06)', alignItems: 'center', justifyContent: 'center' }}&gt;&lt;Text style={{ fontSize: 40, fontWeight: 'bold', color: '#1F3A34' }}&gt;淡酒&lt;/Text&gt;&lt;/Box&gt;&#13;&#10;      &lt;Box style={{ flex: 1, background: 'rgba(31,58,52,0.06)', alignItems: 'center', justifyContent: 'center' }}&gt;&lt;Text style={{ fontSize: 40, fontWeight: 'bold', color: '#1F3A34' }}&gt;晚风&lt;/Text&gt;&lt;/Box&gt;&#13;&#10;      &lt;Box style={{ flex: 1, background: 'rgba(31,58,52,0.06)', alignItems: 'center', justifyContent: 'center' }}&gt;&lt;Text style={{ fontSize: 40, fontWeight: 'bold', color: '#1F3A34' }}&gt;过雁&lt;/Text&gt;&lt;/Box&gt;&#13;&#10;    &lt;/Box&gt;&#13;&#10;    &lt;Box style={{ flexDirection: 'row', gap: 20, marginTop: 20, height: 150 }}&gt;&#13;&#10;      &lt;Box style={{ flex: 1, background: 'rgba(31,58,52,0.06)', alignItems: 'center', justifyContent: 'center' }}&gt;&lt;Text style={{ fontSize: 40, fontWeight: 'bold', color: '#1F3A34' }}&gt;黄花&lt;/Text&gt;&lt;/Box&gt;&#13;&#10;      &lt;Box style={{ flex: 1, background: 'rgba(31,58,52,0.06)', alignItems: 'center', justifyContent: 'center' }}&gt;&lt;Text style={{ fontSize: 40, fontWeight: 'bold', color: '#1F3A34' }}&gt;梧桐&lt;/Text&gt;&lt;/Box&gt;&#13;&#10;      &lt;Box style={{ flex: 1, background: 'rgba(31,58,52,0.06)', alignItems: 'center', justifyContent: 'center' }}&gt;&lt;Text style={{ fontSize: 40, fontWeight: 'bold', color: '#1F3A34' }}&gt;细雨&lt;/Text&gt;&lt;/Box&gt;&#13;&#10;    &lt;/Box&gt;&#13;&#10;    &lt;Text style={{ fontSize: 28, color: '#1F3A34', marginTop: 24 }}&gt;它们都在词里，但不在同一个“时候”。&lt;/Text&gt;&#13;&#10;  &lt;/Box&gt;&#13;&#10;  &lt;/Box&gt;&#13;&#10;  &lt;Box style={{ height: 40, marginTop: 12, borderTop: '1px solid rgba(31,58,52,0.2)', flexDirection: 'row', justifyContent: 'space-between', alignItems: 'center', paddingTop: 8 }}&gt;&#13;&#10;    &lt;Text style={{ fontSize: 24, color: '#6B6B6B' }}&gt;《声声慢》· 李清照&lt;/Text&gt;&#13;&#10;    &lt;Text style={{ fontSize: 24, color: '#B4552D' }}&gt;08/16&lt;/Text&gt;&#13;&#10;  &lt;/Box&gt;&#13;&#10;&lt;/Slide&gt;"/>
+        <p:cNvPr id="232" name="" descr="&lt;Slide style={{ background: '#F5F1E6', padding: '48px 64px', fontFamily: '宋体' }}&gt;&#13;&#10;  &lt;Box style={{ flexDirection: 'row', justifyContent: 'space-between', alignItems: 'flex-end', height: 72 }}&gt;&#13;&#10;    &lt;Text style={{ fontSize: 40, fontWeight: 'bold', color: '#1F3A34', lineHeight: 1.2 }}&gt;六样东西&lt;/Text&gt;&#13;&#10;    &lt;Text style={{ fontSize: 24, color: '#6B6B6B' }}&gt;环节三 · 任务二&lt;/Text&gt;&#13;&#10;  &lt;/Box&gt;&#13;&#10;  &lt;Box style={{ height: 472, marginTop: 20, flexDirection: 'column' }}&gt;&#13;&#10;  &lt;Box style={{ height: 472, flexDirection: 'column', justifyContent: 'center' }}&gt;&#13;&#10;    &lt;Text style={{ fontSize: 28, color: '#6B6B6B' }}&gt;词里有六样东西——&lt;/Text&gt;&#13;&#10;    &lt;Box style={{ flexDirection: 'row', gap: 20, marginTop: 24, height: 150 }}&gt;&#13;&#10;      &lt;Box style={{ flex: 1, background: 'rgba(31,58,52,0.06)', alignItems: 'center', justifyContent: 'center' }}&gt;&lt;Text style={{ fontSize: 40, fontWeight: 'bold', color: '#1F3A34' }}&gt;淡酒&lt;/Text&gt;&lt;/Box&gt;&#13;&#10;      &lt;Box style={{ flex: 1, background: 'rgba(31,58,52,0.06)', alignItems: 'center', justifyContent: 'center' }}&gt;&lt;Text style={{ fontSize: 40, fontWeight: 'bold', color: '#1F3A34' }}&gt;晚风&lt;/Text&gt;&lt;/Box&gt;&#13;&#10;      &lt;Box style={{ flex: 1, background: 'rgba(180,85,45,0.10)', alignItems: 'center', justifyContent: 'center' }}&gt;&lt;Text style={{ fontSize: 40, fontWeight: 'bold', color: '#B4552D' }}&gt;过雁&lt;/Text&gt;&lt;/Box&gt;&#13;&#10;    &lt;/Box&gt;&#13;&#10;    &lt;Box style={{ flexDirection: 'row', gap: 20, marginTop: 20, height: 150 }}&gt;&#13;&#10;      &lt;Box style={{ flex: 1, background: 'rgba(31,58,52,0.06)', alignItems: 'center', justifyContent: 'center' }}&gt;&lt;Text style={{ fontSize: 40, fontWeight: 'bold', color: '#1F3A34' }}&gt;黄花&lt;/Text&gt;&lt;/Box&gt;&#13;&#10;      &lt;Box style={{ flex: 1, background: 'rgba(180,85,45,0.10)', alignItems: 'center', justifyContent: 'center' }}&gt;&lt;Text style={{ fontSize: 40, fontWeight: 'bold', color: '#B4552D' }}&gt;梧桐&lt;/Text&gt;&lt;/Box&gt;&#13;&#10;      &lt;Box style={{ flex: 1, background: 'rgba(31,58,52,0.06)', alignItems: 'center', justifyContent: 'center' }}&gt;&lt;Text style={{ fontSize: 40, fontWeight: 'bold', color: '#1F3A34' }}&gt;细雨&lt;/Text&gt;&lt;/Box&gt;&#13;&#10;    &lt;/Box&gt;&#13;&#10;    &lt;Text style={{ fontSize: 28, color: '#1F3A34', marginTop: 24 }}&gt;选两个：别人写过它们吗？&lt;/Text&gt;&#13;&#10;  &lt;/Box&gt;&#13;&#10;  &lt;/Box&gt;&#13;&#10;  &lt;Box style={{ height: 40, marginTop: 12, borderTop: '1px solid rgba(31,58,52,0.2)', flexDirection: 'row', justifyContent: 'space-between', alignItems: 'center', paddingTop: 8 }}&gt;&#13;&#10;    &lt;Text style={{ fontSize: 24, color: '#6B6B6B' }}&gt;《声声慢》· 李清照&lt;/Text&gt;&#13;&#10;    &lt;Text style={{ fontSize: 24, color: '#B4552D' }}&gt;08/16&lt;/Text&gt;&#13;&#10;  &lt;/Box&gt;&#13;&#10;&lt;/Slide&gt;"/>
         <p:cNvGrpSpPr/>
         <p:nvPr/>
       </p:nvGrpSpPr>
@@ -9002,7 +8991,7 @@
       </p:grpSpPr>
       <p:sp>
         <p:nvSpPr>
-          <p:cNvPr id="236" name=""/>
+          <p:cNvPr id="233" name=""/>
           <p:cNvSpPr/>
           <p:nvPr/>
         </p:nvSpPr>
@@ -9026,14 +9015,14 @@
       </p:sp>
       <p:sp>
         <p:nvSpPr>
-          <p:cNvPr id="237" name="" descr="{&quot;isTemplate&quot;:true,&quot;type&quot;:&quot;text&quot;}"/>
+          <p:cNvPr id="234" name="" descr="{&quot;isTemplate&quot;:true,&quot;type&quot;:&quot;text&quot;}"/>
           <p:cNvSpPr txBox="1"/>
           <p:nvPr/>
         </p:nvSpPr>
         <p:spPr>
           <a:xfrm rot="0" flipH="0" flipV="0">
             <a:off x="609600" y="590550"/>
-            <a:ext cx="3429000" cy="552450"/>
+            <a:ext cx="1524000" cy="552450"/>
           </a:xfrm>
           <a:prstGeom prst="rect"/>
         </p:spPr>
@@ -9053,15 +9042,15 @@
                 <a:latin typeface="宋体"/>
                 <a:ea typeface="宋体"/>
               </a:rPr>
-              <a:t>六样东西，两个时候</a:t>
-            </a:r>
-            <a:endParaRPr/>
-          </a:p>
-        </p:txBody>
-      </p:sp>
-      <p:sp>
-        <p:nvSpPr>
-          <p:cNvPr id="238" name="" descr="{&quot;isTemplate&quot;:true,&quot;type&quot;:&quot;text&quot;}"/>
+              <a:t>六样东西</a:t>
+            </a:r>
+            <a:endParaRPr/>
+          </a:p>
+        </p:txBody>
+      </p:sp>
+      <p:sp>
+        <p:nvSpPr>
+          <p:cNvPr id="235" name="" descr="{&quot;isTemplate&quot;:true,&quot;type&quot;:&quot;text&quot;}"/>
           <p:cNvSpPr txBox="1"/>
           <p:nvPr/>
         </p:nvSpPr>
@@ -9116,7 +9105,7 @@
       </p:sp>
       <p:sp>
         <p:nvSpPr>
-          <p:cNvPr id="239" name="" descr="{&quot;isTemplate&quot;:true,&quot;type&quot;:&quot;text&quot;}"/>
+          <p:cNvPr id="236" name="" descr="{&quot;isTemplate&quot;:true,&quot;type&quot;:&quot;text&quot;}"/>
           <p:cNvSpPr txBox="1"/>
           <p:nvPr/>
         </p:nvSpPr>
@@ -9143,15 +9132,15 @@
                 <a:latin typeface="宋体"/>
                 <a:ea typeface="宋体"/>
               </a:rPr>
-              <a:t>词里写着六样东西——</a:t>
-            </a:r>
-            <a:endParaRPr/>
-          </a:p>
-        </p:txBody>
-      </p:sp>
-      <p:sp>
-        <p:nvSpPr>
-          <p:cNvPr id="240" name=""/>
+              <a:t>词里有六样东西——</a:t>
+            </a:r>
+            <a:endParaRPr/>
+          </a:p>
+        </p:txBody>
+      </p:sp>
+      <p:sp>
+        <p:nvSpPr>
+          <p:cNvPr id="237" name=""/>
           <p:cNvSpPr/>
           <p:nvPr/>
         </p:nvSpPr>
@@ -9177,7 +9166,7 @@
       </p:sp>
       <p:sp>
         <p:nvSpPr>
-          <p:cNvPr id="241" name="" descr="{&quot;isTemplate&quot;:true,&quot;type&quot;:&quot;text&quot;}"/>
+          <p:cNvPr id="238" name="" descr="{&quot;isTemplate&quot;:true,&quot;type&quot;:&quot;text&quot;}"/>
           <p:cNvSpPr txBox="1"/>
           <p:nvPr/>
         </p:nvSpPr>
@@ -9212,7 +9201,7 @@
       </p:sp>
       <p:sp>
         <p:nvSpPr>
-          <p:cNvPr id="242" name=""/>
+          <p:cNvPr id="239" name=""/>
           <p:cNvSpPr/>
           <p:nvPr/>
         </p:nvSpPr>
@@ -9238,7 +9227,7 @@
       </p:sp>
       <p:sp>
         <p:nvSpPr>
-          <p:cNvPr id="243" name="" descr="{&quot;isTemplate&quot;:true,&quot;type&quot;:&quot;text&quot;}"/>
+          <p:cNvPr id="240" name="" descr="{&quot;isTemplate&quot;:true,&quot;type&quot;:&quot;text&quot;}"/>
           <p:cNvSpPr txBox="1"/>
           <p:nvPr/>
         </p:nvSpPr>
@@ -9273,13 +9262,74 @@
       </p:sp>
       <p:sp>
         <p:nvSpPr>
-          <p:cNvPr id="244" name=""/>
+          <p:cNvPr id="241" name=""/>
           <p:cNvSpPr/>
           <p:nvPr/>
         </p:nvSpPr>
         <p:spPr>
           <a:xfrm rot="0" flipH="0" flipV="0">
             <a:off x="8048625" y="2057400"/>
+            <a:ext cx="3533775" cy="1428750"/>
+          </a:xfrm>
+          <a:prstGeom prst="rect">
+            <a:avLst/>
+          </a:prstGeom>
+          <a:solidFill>
+            <a:srgbClr val="B4552D">
+              <a:alpha val="10000"/>
+            </a:srgbClr>
+          </a:solidFill>
+          <a:ln/>
+        </p:spPr>
+        <p:txBody>
+          <a:bodyPr/>
+          <a:p/>
+        </p:txBody>
+      </p:sp>
+      <p:sp>
+        <p:nvSpPr>
+          <p:cNvPr id="242" name="" descr="{&quot;isTemplate&quot;:true,&quot;type&quot;:&quot;text&quot;}"/>
+          <p:cNvSpPr txBox="1"/>
+          <p:nvPr/>
+        </p:nvSpPr>
+        <p:spPr>
+          <a:xfrm rot="0" flipH="0" flipV="0">
+            <a:off x="9439275" y="2543175"/>
+            <a:ext cx="762000" cy="457200"/>
+          </a:xfrm>
+          <a:prstGeom prst="rect"/>
+        </p:spPr>
+        <p:txBody>
+          <a:bodyPr wrap="none" lIns="0" tIns="0" rIns="0" bIns="0"/>
+          <a:p>
+            <a:pPr>
+              <a:lnSpc>
+                <a:spcPct val="100000"/>
+              </a:lnSpc>
+            </a:pPr>
+            <a:r>
+              <a:rPr lang="zh-CN" sz="3000" b="1">
+                <a:solidFill>
+                  <a:srgbClr val="B4552D"/>
+                </a:solidFill>
+                <a:latin typeface="宋体"/>
+                <a:ea typeface="宋体"/>
+              </a:rPr>
+              <a:t>过雁</a:t>
+            </a:r>
+            <a:endParaRPr/>
+          </a:p>
+        </p:txBody>
+      </p:sp>
+      <p:sp>
+        <p:nvSpPr>
+          <p:cNvPr id="243" name=""/>
+          <p:cNvSpPr/>
+          <p:nvPr/>
+        </p:nvSpPr>
+        <p:spPr>
+          <a:xfrm rot="0" flipH="0" flipV="0">
+            <a:off x="609600" y="3676650"/>
             <a:ext cx="3533775" cy="1428750"/>
           </a:xfrm>
           <a:prstGeom prst="rect">
@@ -9299,13 +9349,13 @@
       </p:sp>
       <p:sp>
         <p:nvSpPr>
-          <p:cNvPr id="245" name="" descr="{&quot;isTemplate&quot;:true,&quot;type&quot;:&quot;text&quot;}"/>
-          <p:cNvSpPr txBox="1"/>
-          <p:nvPr/>
-        </p:nvSpPr>
-        <p:spPr>
-          <a:xfrm rot="0" flipH="0" flipV="0">
-            <a:off x="9439275" y="2543175"/>
+          <p:cNvPr id="244" name="" descr="{&quot;isTemplate&quot;:true,&quot;type&quot;:&quot;text&quot;}"/>
+          <p:cNvSpPr txBox="1"/>
+          <p:nvPr/>
+        </p:nvSpPr>
+        <p:spPr>
+          <a:xfrm rot="0" flipH="0" flipV="0">
+            <a:off x="2000250" y="4162425"/>
             <a:ext cx="762000" cy="457200"/>
           </a:xfrm>
           <a:prstGeom prst="rect"/>
@@ -9326,21 +9376,82 @@
                 <a:latin typeface="宋体"/>
                 <a:ea typeface="宋体"/>
               </a:rPr>
-              <a:t>过雁</a:t>
-            </a:r>
-            <a:endParaRPr/>
-          </a:p>
-        </p:txBody>
-      </p:sp>
-      <p:sp>
-        <p:nvSpPr>
-          <p:cNvPr id="246" name=""/>
+              <a:t>黄花</a:t>
+            </a:r>
+            <a:endParaRPr/>
+          </a:p>
+        </p:txBody>
+      </p:sp>
+      <p:sp>
+        <p:nvSpPr>
+          <p:cNvPr id="245" name=""/>
           <p:cNvSpPr/>
           <p:nvPr/>
         </p:nvSpPr>
         <p:spPr>
           <a:xfrm rot="0" flipH="0" flipV="0">
-            <a:off x="609600" y="3676650"/>
+            <a:off x="4333875" y="3676650"/>
+            <a:ext cx="3524250" cy="1428750"/>
+          </a:xfrm>
+          <a:prstGeom prst="rect">
+            <a:avLst/>
+          </a:prstGeom>
+          <a:solidFill>
+            <a:srgbClr val="B4552D">
+              <a:alpha val="10000"/>
+            </a:srgbClr>
+          </a:solidFill>
+          <a:ln/>
+        </p:spPr>
+        <p:txBody>
+          <a:bodyPr/>
+          <a:p/>
+        </p:txBody>
+      </p:sp>
+      <p:sp>
+        <p:nvSpPr>
+          <p:cNvPr id="246" name="" descr="{&quot;isTemplate&quot;:true,&quot;type&quot;:&quot;text&quot;}"/>
+          <p:cNvSpPr txBox="1"/>
+          <p:nvPr/>
+        </p:nvSpPr>
+        <p:spPr>
+          <a:xfrm rot="0" flipH="0" flipV="0">
+            <a:off x="5715000" y="4162425"/>
+            <a:ext cx="762000" cy="457200"/>
+          </a:xfrm>
+          <a:prstGeom prst="rect"/>
+        </p:spPr>
+        <p:txBody>
+          <a:bodyPr wrap="none" lIns="0" tIns="0" rIns="0" bIns="0"/>
+          <a:p>
+            <a:pPr>
+              <a:lnSpc>
+                <a:spcPct val="100000"/>
+              </a:lnSpc>
+            </a:pPr>
+            <a:r>
+              <a:rPr lang="zh-CN" sz="3000" b="1">
+                <a:solidFill>
+                  <a:srgbClr val="B4552D"/>
+                </a:solidFill>
+                <a:latin typeface="宋体"/>
+                <a:ea typeface="宋体"/>
+              </a:rPr>
+              <a:t>梧桐</a:t>
+            </a:r>
+            <a:endParaRPr/>
+          </a:p>
+        </p:txBody>
+      </p:sp>
+      <p:sp>
+        <p:nvSpPr>
+          <p:cNvPr id="247" name=""/>
+          <p:cNvSpPr/>
+          <p:nvPr/>
+        </p:nvSpPr>
+        <p:spPr>
+          <a:xfrm rot="0" flipH="0" flipV="0">
+            <a:off x="8048625" y="3676650"/>
             <a:ext cx="3533775" cy="1428750"/>
           </a:xfrm>
           <a:prstGeom prst="rect">
@@ -9360,129 +9471,7 @@
       </p:sp>
       <p:sp>
         <p:nvSpPr>
-          <p:cNvPr id="247" name="" descr="{&quot;isTemplate&quot;:true,&quot;type&quot;:&quot;text&quot;}"/>
-          <p:cNvSpPr txBox="1"/>
-          <p:nvPr/>
-        </p:nvSpPr>
-        <p:spPr>
-          <a:xfrm rot="0" flipH="0" flipV="0">
-            <a:off x="2000250" y="4162425"/>
-            <a:ext cx="762000" cy="457200"/>
-          </a:xfrm>
-          <a:prstGeom prst="rect"/>
-        </p:spPr>
-        <p:txBody>
-          <a:bodyPr wrap="none" lIns="0" tIns="0" rIns="0" bIns="0"/>
-          <a:p>
-            <a:pPr>
-              <a:lnSpc>
-                <a:spcPct val="100000"/>
-              </a:lnSpc>
-            </a:pPr>
-            <a:r>
-              <a:rPr lang="zh-CN" sz="3000" b="1">
-                <a:solidFill>
-                  <a:srgbClr val="1F3A34"/>
-                </a:solidFill>
-                <a:latin typeface="宋体"/>
-                <a:ea typeface="宋体"/>
-              </a:rPr>
-              <a:t>黄花</a:t>
-            </a:r>
-            <a:endParaRPr/>
-          </a:p>
-        </p:txBody>
-      </p:sp>
-      <p:sp>
-        <p:nvSpPr>
-          <p:cNvPr id="248" name=""/>
-          <p:cNvSpPr/>
-          <p:nvPr/>
-        </p:nvSpPr>
-        <p:spPr>
-          <a:xfrm rot="0" flipH="0" flipV="0">
-            <a:off x="4333875" y="3676650"/>
-            <a:ext cx="3524250" cy="1428750"/>
-          </a:xfrm>
-          <a:prstGeom prst="rect">
-            <a:avLst/>
-          </a:prstGeom>
-          <a:solidFill>
-            <a:srgbClr val="1F3A34">
-              <a:alpha val="6000"/>
-            </a:srgbClr>
-          </a:solidFill>
-          <a:ln/>
-        </p:spPr>
-        <p:txBody>
-          <a:bodyPr/>
-          <a:p/>
-        </p:txBody>
-      </p:sp>
-      <p:sp>
-        <p:nvSpPr>
-          <p:cNvPr id="249" name="" descr="{&quot;isTemplate&quot;:true,&quot;type&quot;:&quot;text&quot;}"/>
-          <p:cNvSpPr txBox="1"/>
-          <p:nvPr/>
-        </p:nvSpPr>
-        <p:spPr>
-          <a:xfrm rot="0" flipH="0" flipV="0">
-            <a:off x="5715000" y="4162425"/>
-            <a:ext cx="762000" cy="457200"/>
-          </a:xfrm>
-          <a:prstGeom prst="rect"/>
-        </p:spPr>
-        <p:txBody>
-          <a:bodyPr wrap="none" lIns="0" tIns="0" rIns="0" bIns="0"/>
-          <a:p>
-            <a:pPr>
-              <a:lnSpc>
-                <a:spcPct val="100000"/>
-              </a:lnSpc>
-            </a:pPr>
-            <a:r>
-              <a:rPr lang="zh-CN" sz="3000" b="1">
-                <a:solidFill>
-                  <a:srgbClr val="1F3A34"/>
-                </a:solidFill>
-                <a:latin typeface="宋体"/>
-                <a:ea typeface="宋体"/>
-              </a:rPr>
-              <a:t>梧桐</a:t>
-            </a:r>
-            <a:endParaRPr/>
-          </a:p>
-        </p:txBody>
-      </p:sp>
-      <p:sp>
-        <p:nvSpPr>
-          <p:cNvPr id="250" name=""/>
-          <p:cNvSpPr/>
-          <p:nvPr/>
-        </p:nvSpPr>
-        <p:spPr>
-          <a:xfrm rot="0" flipH="0" flipV="0">
-            <a:off x="8048625" y="3676650"/>
-            <a:ext cx="3533775" cy="1428750"/>
-          </a:xfrm>
-          <a:prstGeom prst="rect">
-            <a:avLst/>
-          </a:prstGeom>
-          <a:solidFill>
-            <a:srgbClr val="1F3A34">
-              <a:alpha val="6000"/>
-            </a:srgbClr>
-          </a:solidFill>
-          <a:ln/>
-        </p:spPr>
-        <p:txBody>
-          <a:bodyPr/>
-          <a:p/>
-        </p:txBody>
-      </p:sp>
-      <p:sp>
-        <p:nvSpPr>
-          <p:cNvPr id="251" name="" descr="{&quot;isTemplate&quot;:true,&quot;type&quot;:&quot;text&quot;}"/>
+          <p:cNvPr id="248" name="" descr="{&quot;isTemplate&quot;:true,&quot;type&quot;:&quot;text&quot;}"/>
           <p:cNvSpPr txBox="1"/>
           <p:nvPr/>
         </p:nvSpPr>
@@ -9517,7 +9506,7 @@
       </p:sp>
       <p:sp>
         <p:nvSpPr>
-          <p:cNvPr id="252" name="" descr="{&quot;isTemplate&quot;:true,&quot;type&quot;:&quot;text&quot;}"/>
+          <p:cNvPr id="249" name="" descr="{&quot;isTemplate&quot;:true,&quot;type&quot;:&quot;text&quot;}"/>
           <p:cNvSpPr txBox="1"/>
           <p:nvPr/>
         </p:nvSpPr>
@@ -9544,15 +9533,15 @@
                 <a:latin typeface="宋体"/>
                 <a:ea typeface="宋体"/>
               </a:rPr>
-              <a:t>它们都在词里，但不在同一个“时候”。</a:t>
-            </a:r>
-            <a:endParaRPr/>
-          </a:p>
-        </p:txBody>
-      </p:sp>
-      <p:sp>
-        <p:nvSpPr>
-          <p:cNvPr id="253" name=""/>
+              <a:t>选两个：别人写过它们吗？</a:t>
+            </a:r>
+            <a:endParaRPr/>
+          </a:p>
+        </p:txBody>
+      </p:sp>
+      <p:sp>
+        <p:nvSpPr>
+          <p:cNvPr id="250" name=""/>
           <p:cNvSpPr/>
           <p:nvPr/>
         </p:nvSpPr>
@@ -9594,7 +9583,7 @@
       </p:sp>
       <p:sp>
         <p:nvSpPr>
-          <p:cNvPr id="254" name="" descr="{&quot;isTemplate&quot;:true,&quot;type&quot;:&quot;text&quot;}"/>
+          <p:cNvPr id="251" name="" descr="{&quot;isTemplate&quot;:true,&quot;type&quot;:&quot;text&quot;}"/>
           <p:cNvSpPr txBox="1"/>
           <p:nvPr/>
         </p:nvSpPr>
@@ -9649,7 +9638,7 @@
       </p:sp>
       <p:sp>
         <p:nvSpPr>
-          <p:cNvPr id="255" name="" descr="{&quot;isTemplate&quot;:true,&quot;type&quot;:&quot;text&quot;}"/>
+          <p:cNvPr id="252" name="" descr="{&quot;isTemplate&quot;:true,&quot;type&quot;:&quot;text&quot;}"/>
           <p:cNvSpPr txBox="1"/>
           <p:nvPr/>
         </p:nvSpPr>
@@ -9692,7 +9681,7 @@
   <p:cSld>
     <p:spTree>
       <p:nvGrpSpPr>
-        <p:cNvPr id="256" name="" descr="&lt;Slide style={{ background: '#F5F1E6', padding: '48px 64px', fontFamily: '宋体' }}&gt;&#13;&#10;  &lt;Box style={{ flexDirection: 'row', justifyContent: 'space-between', alignItems: 'flex-end', height: 72 }}&gt;&#13;&#10;    &lt;Text style={{ fontSize: 40, fontWeight: 'bold', color: '#1F3A34', lineHeight: 1.2 }}&gt;每一项都要一个依据字&lt;/Text&gt;&#13;&#10;    &lt;Text style={{ fontSize: 24, color: '#6B6B6B' }}&gt;环节三 · 任务二&lt;/Text&gt;&#13;&#10;  &lt;/Box&gt;&#13;&#10;  &lt;Box style={{ height: 472, marginTop: 20, flexDirection: 'column' }}&gt;&#13;&#10;  &lt;Box style={{ height: 472, flexDirection: 'column' }}&gt;&#13;&#10;    &lt;Text style={{ fontSize: 28, color: '#1F3A34' }}&gt;把六样东西分进两栏，并在每样后面写一个“依据字”。&lt;/Text&gt;&#13;&#10;    &lt;Box style={{ flexDirection: 'row', gap: 24, marginTop: 24, height: 300 }}&gt;&#13;&#10;      &lt;Box style={{ flex: 1, border: '1px solid rgba(31,58,52,0.35)', padding: 20, flexDirection: 'column' }}&gt;&#13;&#10;        &lt;Text style={{ fontSize: 28, fontWeight: 'bold', color: '#1F3A34' }}&gt;旧时就有的&lt;/Text&gt;&#13;&#10;        &lt;Text style={{ fontSize: 24, color: '#6B6B6B', marginTop: 16 }}&gt;依据：______&lt;/Text&gt;&#13;&#10;      &lt;/Box&gt;&#13;&#10;      &lt;Box style={{ flex: 1, border: '1px solid rgba(180,85,45,0.45)', padding: 20, flexDirection: 'column' }}&gt;&#13;&#10;        &lt;Text style={{ fontSize: 28, fontWeight: 'bold', color: '#B4552D' }}&gt;如今才这样的&lt;/Text&gt;&#13;&#10;        &lt;Text style={{ fontSize: 24, color: '#6B6B6B', marginTop: 16 }}&gt;依据：______&lt;/Text&gt;&#13;&#10;      &lt;/Box&gt;&#13;&#10;    &lt;/Box&gt;&#13;&#10;    &lt;Text style={{ fontSize: 24, color: '#6B6B6B', marginTop: 20 }}&gt;“依据字”就是那个告诉你答案的字，不是你的感觉。&lt;/Text&gt;&#13;&#10;  &lt;/Box&gt;&#13;&#10;  &lt;/Box&gt;&#13;&#10;  &lt;Box style={{ height: 40, marginTop: 12, borderTop: '1px solid rgba(31,58,52,0.2)', flexDirection: 'row', justifyContent: 'space-between', alignItems: 'center', paddingTop: 8 }}&gt;&#13;&#10;    &lt;Text style={{ fontSize: 24, color: '#6B6B6B' }}&gt;《声声慢》· 李清照&lt;/Text&gt;&#13;&#10;    &lt;Text style={{ fontSize: 24, color: '#B4552D' }}&gt;09/16&lt;/Text&gt;&#13;&#10;  &lt;/Box&gt;&#13;&#10;&lt;/Slide&gt;"/>
+        <p:cNvPr id="253" name="" descr="&lt;Slide style={{ background: '#F5F1E6', padding: '48px 64px', fontFamily: '宋体' }}&gt;&#13;&#10;  &lt;Box style={{ flexDirection: 'row', justifyContent: 'space-between', alignItems: 'flex-end', height: 72 }}&gt;&#13;&#10;    &lt;Text style={{ fontSize: 40, fontWeight: 'bold', color: '#1F3A34', lineHeight: 1.2 }}&gt;前人怎么写它&lt;/Text&gt;&#13;&#10;    &lt;Text style={{ fontSize: 24, color: '#6B6B6B' }}&gt;环节三 · 任务二&lt;/Text&gt;&#13;&#10;  &lt;/Box&gt;&#13;&#10;  &lt;Box style={{ height: 472, marginTop: 20, flexDirection: 'column' }}&gt;&#13;&#10;  &lt;Box style={{ height: 472, flexDirection: 'column' }}&gt;&#13;&#10;    &lt;Text style={{ fontSize: 28, color: '#1F3A34' }}&gt;为你选的词找一条前人写过的句子，再说出这一首里它变在了哪里。&lt;/Text&gt;&#13;&#10;    &lt;Box style={{ flexDirection: 'row', gap: 24, marginTop: 24, height: 300 }}&gt;&#13;&#10;      &lt;Box style={{ flex: 1, border: '1px solid rgba(31,58,52,0.35)', padding: 20, flexDirection: 'column' }}&gt;&#13;&#10;        &lt;Text style={{ fontSize: 28, fontWeight: 'bold', color: '#1F3A34' }}&gt;前人怎么写&lt;/Text&gt;&#13;&#10;        &lt;Text style={{ fontSize: 24, color: '#6B6B6B', marginTop: 16, lineHeight: 1.7 }}&gt;哪一首？什么处境？&lt;/Text&gt;&#13;&#10;      &lt;/Box&gt;&#13;&#10;      &lt;Box style={{ flex: 1, border: '1px solid rgba(180,85,45,0.45)', padding: 20, flexDirection: 'column' }}&gt;&#13;&#10;        &lt;Text style={{ fontSize: 28, fontWeight: 'bold', color: '#B4552D' }}&gt;这一首变在哪&lt;/Text&gt;&#13;&#10;        &lt;Text style={{ fontSize: 24, color: '#6B6B6B', marginTop: 16, lineHeight: 1.7 }}&gt;说出那个字。&lt;/Text&gt;&#13;&#10;      &lt;/Box&gt;&#13;&#10;    &lt;/Box&gt;&#13;&#10;    &lt;Text style={{ fontSize: 24, color: '#6B6B6B', marginTop: 20 }}&gt;“代表凄凉”不算答案——要说出是谁写的、写的什么。&lt;/Text&gt;&#13;&#10;  &lt;/Box&gt;&#13;&#10;  &lt;/Box&gt;&#13;&#10;  &lt;Box style={{ height: 40, marginTop: 12, borderTop: '1px solid rgba(31,58,52,0.2)', flexDirection: 'row', justifyContent: 'space-between', alignItems: 'center', paddingTop: 8 }}&gt;&#13;&#10;    &lt;Text style={{ fontSize: 24, color: '#6B6B6B' }}&gt;《声声慢》· 李清照&lt;/Text&gt;&#13;&#10;    &lt;Text style={{ fontSize: 24, color: '#B4552D' }}&gt;09/16&lt;/Text&gt;&#13;&#10;  &lt;/Box&gt;&#13;&#10;&lt;/Slide&gt;"/>
         <p:cNvGrpSpPr/>
         <p:nvPr/>
       </p:nvGrpSpPr>
@@ -9706,7 +9695,7 @@
       </p:grpSpPr>
       <p:sp>
         <p:nvSpPr>
-          <p:cNvPr id="257" name=""/>
+          <p:cNvPr id="254" name=""/>
           <p:cNvSpPr/>
           <p:nvPr/>
         </p:nvSpPr>
@@ -9730,14 +9719,14 @@
       </p:sp>
       <p:sp>
         <p:nvSpPr>
-          <p:cNvPr id="258" name="" descr="{&quot;isTemplate&quot;:true,&quot;type&quot;:&quot;text&quot;}"/>
+          <p:cNvPr id="255" name="" descr="{&quot;isTemplate&quot;:true,&quot;type&quot;:&quot;text&quot;}"/>
           <p:cNvSpPr txBox="1"/>
           <p:nvPr/>
         </p:nvSpPr>
         <p:spPr>
           <a:xfrm rot="0" flipH="0" flipV="0">
             <a:off x="609600" y="590550"/>
-            <a:ext cx="3810000" cy="552450"/>
+            <a:ext cx="2286000" cy="552450"/>
           </a:xfrm>
           <a:prstGeom prst="rect"/>
         </p:spPr>
@@ -9757,15 +9746,15 @@
                 <a:latin typeface="宋体"/>
                 <a:ea typeface="宋体"/>
               </a:rPr>
-              <a:t>每一项都要一个依据字</a:t>
-            </a:r>
-            <a:endParaRPr/>
-          </a:p>
-        </p:txBody>
-      </p:sp>
-      <p:sp>
-        <p:nvSpPr>
-          <p:cNvPr id="259" name="" descr="{&quot;isTemplate&quot;:true,&quot;type&quot;:&quot;text&quot;}"/>
+              <a:t>前人怎么写它</a:t>
+            </a:r>
+            <a:endParaRPr/>
+          </a:p>
+        </p:txBody>
+      </p:sp>
+      <p:sp>
+        <p:nvSpPr>
+          <p:cNvPr id="256" name="" descr="{&quot;isTemplate&quot;:true,&quot;type&quot;:&quot;text&quot;}"/>
           <p:cNvSpPr txBox="1"/>
           <p:nvPr/>
         </p:nvSpPr>
@@ -9820,7 +9809,7 @@
       </p:sp>
       <p:sp>
         <p:nvSpPr>
-          <p:cNvPr id="260" name="" descr="{&quot;isTemplate&quot;:true,&quot;type&quot;:&quot;text&quot;}"/>
+          <p:cNvPr id="257" name="" descr="{&quot;isTemplate&quot;:true,&quot;type&quot;:&quot;text&quot;}"/>
           <p:cNvSpPr txBox="1"/>
           <p:nvPr/>
         </p:nvSpPr>
@@ -9847,15 +9836,15 @@
                 <a:latin typeface="宋体"/>
                 <a:ea typeface="宋体"/>
               </a:rPr>
-              <a:t>把六样东西分进两栏，并在每样后面写一个“依据字”。</a:t>
-            </a:r>
-            <a:endParaRPr/>
-          </a:p>
-        </p:txBody>
-      </p:sp>
-      <p:sp>
-        <p:nvSpPr>
-          <p:cNvPr id="261" name=""/>
+              <a:t>为你选的词找一条前人写过的句子，再说出这一首里它变在了哪里。</a:t>
+            </a:r>
+            <a:endParaRPr/>
+          </a:p>
+        </p:txBody>
+      </p:sp>
+      <p:sp>
+        <p:nvSpPr>
+          <p:cNvPr id="258" name=""/>
           <p:cNvSpPr/>
           <p:nvPr/>
         </p:nvSpPr>
@@ -9883,7 +9872,7 @@
       </p:sp>
       <p:sp>
         <p:nvSpPr>
-          <p:cNvPr id="262" name="" descr="{&quot;isTemplate&quot;:true,&quot;type&quot;:&quot;text&quot;}"/>
+          <p:cNvPr id="259" name="" descr="{&quot;isTemplate&quot;:true,&quot;type&quot;:&quot;text&quot;}"/>
           <p:cNvSpPr txBox="1"/>
           <p:nvPr/>
         </p:nvSpPr>
@@ -9910,31 +9899,31 @@
                 <a:latin typeface="宋体"/>
                 <a:ea typeface="宋体"/>
               </a:rPr>
-              <a:t>旧时就有的</a:t>
-            </a:r>
-            <a:endParaRPr/>
-          </a:p>
-        </p:txBody>
-      </p:sp>
-      <p:sp>
-        <p:nvSpPr>
-          <p:cNvPr id="263" name="" descr="{&quot;isTemplate&quot;:true,&quot;type&quot;:&quot;text&quot;}"/>
+              <a:t>前人怎么写</a:t>
+            </a:r>
+            <a:endParaRPr/>
+          </a:p>
+        </p:txBody>
+      </p:sp>
+      <p:sp>
+        <p:nvSpPr>
+          <p:cNvPr id="260" name="" descr="{&quot;isTemplate&quot;:true,&quot;type&quot;:&quot;text&quot;}"/>
           <p:cNvSpPr txBox="1"/>
           <p:nvPr/>
         </p:nvSpPr>
         <p:spPr>
           <a:xfrm rot="0" flipH="0" flipV="0">
             <a:off x="800100" y="2552700"/>
-            <a:ext cx="4991100" cy="276225"/>
-          </a:xfrm>
-          <a:prstGeom prst="rect"/>
-        </p:spPr>
-        <p:txBody>
-          <a:bodyPr wrap="none" lIns="0" tIns="0" rIns="0" bIns="0"/>
-          <a:p>
-            <a:pPr>
-              <a:lnSpc>
-                <a:spcPct val="100000"/>
+            <a:ext cx="4991100" cy="466725"/>
+          </a:xfrm>
+          <a:prstGeom prst="rect"/>
+        </p:spPr>
+        <p:txBody>
+          <a:bodyPr wrap="none" lIns="0" tIns="0" rIns="0" bIns="0"/>
+          <a:p>
+            <a:pPr>
+              <a:lnSpc>
+                <a:spcPct val="170000"/>
               </a:lnSpc>
             </a:pPr>
             <a:r>
@@ -9945,25 +9934,15 @@
                 <a:latin typeface="宋体"/>
                 <a:ea typeface="宋体"/>
               </a:rPr>
-              <a:t>依据：</a:t>
-            </a:r>
-            <a:r>
-              <a:rPr lang="en-US" sz="1800">
-                <a:solidFill>
-                  <a:srgbClr val="6B6B6B"/>
-                </a:solidFill>
-                <a:latin typeface="宋体"/>
-                <a:ea typeface="宋体"/>
-              </a:rPr>
-              <a:t>______</a:t>
-            </a:r>
-            <a:endParaRPr/>
-          </a:p>
-        </p:txBody>
-      </p:sp>
-      <p:sp>
-        <p:nvSpPr>
-          <p:cNvPr id="264" name=""/>
+              <a:t>哪一首？什么处境？</a:t>
+            </a:r>
+            <a:endParaRPr/>
+          </a:p>
+        </p:txBody>
+      </p:sp>
+      <p:sp>
+        <p:nvSpPr>
+          <p:cNvPr id="261" name=""/>
           <p:cNvSpPr/>
           <p:nvPr/>
         </p:nvSpPr>
@@ -9991,7 +9970,7 @@
       </p:sp>
       <p:sp>
         <p:nvSpPr>
-          <p:cNvPr id="265" name="" descr="{&quot;isTemplate&quot;:true,&quot;type&quot;:&quot;text&quot;}"/>
+          <p:cNvPr id="262" name="" descr="{&quot;isTemplate&quot;:true,&quot;type&quot;:&quot;text&quot;}"/>
           <p:cNvSpPr txBox="1"/>
           <p:nvPr/>
         </p:nvSpPr>
@@ -10018,31 +9997,31 @@
                 <a:latin typeface="宋体"/>
                 <a:ea typeface="宋体"/>
               </a:rPr>
-              <a:t>如今才这样的</a:t>
-            </a:r>
-            <a:endParaRPr/>
-          </a:p>
-        </p:txBody>
-      </p:sp>
-      <p:sp>
-        <p:nvSpPr>
-          <p:cNvPr id="266" name="" descr="{&quot;isTemplate&quot;:true,&quot;type&quot;:&quot;text&quot;}"/>
+              <a:t>这一首变在哪</a:t>
+            </a:r>
+            <a:endParaRPr/>
+          </a:p>
+        </p:txBody>
+      </p:sp>
+      <p:sp>
+        <p:nvSpPr>
+          <p:cNvPr id="263" name="" descr="{&quot;isTemplate&quot;:true,&quot;type&quot;:&quot;text&quot;}"/>
           <p:cNvSpPr txBox="1"/>
           <p:nvPr/>
         </p:nvSpPr>
         <p:spPr>
           <a:xfrm rot="0" flipH="0" flipV="0">
             <a:off x="6400800" y="2552700"/>
-            <a:ext cx="4991100" cy="276225"/>
-          </a:xfrm>
-          <a:prstGeom prst="rect"/>
-        </p:spPr>
-        <p:txBody>
-          <a:bodyPr wrap="none" lIns="0" tIns="0" rIns="0" bIns="0"/>
-          <a:p>
-            <a:pPr>
-              <a:lnSpc>
-                <a:spcPct val="100000"/>
+            <a:ext cx="4991100" cy="466725"/>
+          </a:xfrm>
+          <a:prstGeom prst="rect"/>
+        </p:spPr>
+        <p:txBody>
+          <a:bodyPr wrap="none" lIns="0" tIns="0" rIns="0" bIns="0"/>
+          <a:p>
+            <a:pPr>
+              <a:lnSpc>
+                <a:spcPct val="170000"/>
               </a:lnSpc>
             </a:pPr>
             <a:r>
@@ -10053,25 +10032,15 @@
                 <a:latin typeface="宋体"/>
                 <a:ea typeface="宋体"/>
               </a:rPr>
-              <a:t>依据：</a:t>
-            </a:r>
-            <a:r>
-              <a:rPr lang="en-US" sz="1800">
-                <a:solidFill>
-                  <a:srgbClr val="6B6B6B"/>
-                </a:solidFill>
-                <a:latin typeface="宋体"/>
-                <a:ea typeface="宋体"/>
-              </a:rPr>
-              <a:t>______</a:t>
-            </a:r>
-            <a:endParaRPr/>
-          </a:p>
-        </p:txBody>
-      </p:sp>
-      <p:sp>
-        <p:nvSpPr>
-          <p:cNvPr id="267" name="" descr="{&quot;isTemplate&quot;:true,&quot;type&quot;:&quot;text&quot;}"/>
+              <a:t>说出那个字。</a:t>
+            </a:r>
+            <a:endParaRPr/>
+          </a:p>
+        </p:txBody>
+      </p:sp>
+      <p:sp>
+        <p:nvSpPr>
+          <p:cNvPr id="264" name="" descr="{&quot;isTemplate&quot;:true,&quot;type&quot;:&quot;text&quot;}"/>
           <p:cNvSpPr txBox="1"/>
           <p:nvPr/>
         </p:nvSpPr>
@@ -10098,15 +10067,15 @@
                 <a:latin typeface="宋体"/>
                 <a:ea typeface="宋体"/>
               </a:rPr>
-              <a:t>“依据字”就是那个告诉你答案的字，不是你的感觉。</a:t>
-            </a:r>
-            <a:endParaRPr/>
-          </a:p>
-        </p:txBody>
-      </p:sp>
-      <p:sp>
-        <p:nvSpPr>
-          <p:cNvPr id="268" name=""/>
+              <a:t>“代表凄凉”不算答案——要说出是谁写的、写的什么。</a:t>
+            </a:r>
+            <a:endParaRPr/>
+          </a:p>
+        </p:txBody>
+      </p:sp>
+      <p:sp>
+        <p:nvSpPr>
+          <p:cNvPr id="265" name=""/>
           <p:cNvSpPr/>
           <p:nvPr/>
         </p:nvSpPr>
@@ -10148,7 +10117,7 @@
       </p:sp>
       <p:sp>
         <p:nvSpPr>
-          <p:cNvPr id="269" name="" descr="{&quot;isTemplate&quot;:true,&quot;type&quot;:&quot;text&quot;}"/>
+          <p:cNvPr id="266" name="" descr="{&quot;isTemplate&quot;:true,&quot;type&quot;:&quot;text&quot;}"/>
           <p:cNvSpPr txBox="1"/>
           <p:nvPr/>
         </p:nvSpPr>
@@ -10203,7 +10172,7 @@
       </p:sp>
       <p:sp>
         <p:nvSpPr>
-          <p:cNvPr id="270" name="" descr="{&quot;isTemplate&quot;:true,&quot;type&quot;:&quot;text&quot;}"/>
+          <p:cNvPr id="267" name="" descr="{&quot;isTemplate&quot;:true,&quot;type&quot;:&quot;text&quot;}"/>
           <p:cNvSpPr txBox="1"/>
           <p:nvPr/>
         </p:nvSpPr>
